--- a/CLAUDE/reports/World_Model_ASIC_report_2026-10-13.pptx
+++ b/CLAUDE/reports/World_Model_ASIC_report_2026-10-13.pptx
@@ -9,17 +9,19 @@
   </p:notesMasterIdLst>
   <p:sldIdLst>
     <p:sldId id="256" r:id="rId5"/>
-    <p:sldId id="442" r:id="rId24"/>
-    <p:sldId id="443" r:id="rId25"/>
-    <p:sldId id="444" r:id="rId26"/>
-    <p:sldId id="445" r:id="rId27"/>
-    <p:sldId id="446" r:id="rId28"/>
-    <p:sldId id="447" r:id="rId29"/>
-    <p:sldId id="448" r:id="rId30"/>
-    <p:sldId id="449" r:id="rId31"/>
-    <p:sldId id="450" r:id="rId32"/>
-    <p:sldId id="451" r:id="rId33"/>
-    <p:sldId id="452" r:id="rId34"/>
+    <p:sldId id="459" r:id="rId24"/>
+    <p:sldId id="460" r:id="rId25"/>
+    <p:sldId id="461" r:id="rId26"/>
+    <p:sldId id="462" r:id="rId27"/>
+    <p:sldId id="463" r:id="rId28"/>
+    <p:sldId id="464" r:id="rId29"/>
+    <p:sldId id="465" r:id="rId30"/>
+    <p:sldId id="466" r:id="rId31"/>
+    <p:sldId id="467" r:id="rId32"/>
+    <p:sldId id="468" r:id="rId33"/>
+    <p:sldId id="469" r:id="rId34"/>
+    <p:sldId id="470" r:id="rId35"/>
+    <p:sldId id="471" r:id="rId36"/>
   </p:sldIdLst>
   <p:sldSz cx="12192000" cy="6858000"/>
   <p:notesSz cx="6858000" cy="9144000"/>
@@ -487,7 +489,7 @@
 </p:notesMaster>
 </file>
 
-<file path=ppt/notesSlides/notesSlide100.xml><?xml version="1.0" encoding="utf-8"?>
+<file path=ppt/notesSlides/notesSlide200.xml><?xml version="1.0" encoding="utf-8"?>
 <p:notes xmlns:a="http://schemas.openxmlformats.org/drawingml/2006/main" xmlns:r="http://schemas.openxmlformats.org/officeDocument/2006/relationships" xmlns:p="http://schemas.openxmlformats.org/presentationml/2006/main">
   <p:cSld>
     <p:spTree>
@@ -506,7 +508,7 @@
       </p:grpSpPr>
       <p:sp>
         <p:nvSpPr>
-          <p:cNvPr id="2" name="投影片影像版面配置區 1"/>
+          <p:cNvPr id="2" name="Slide Image 1"/>
           <p:cNvSpPr>
             <a:spLocks noGrp="1" noRot="1" noChangeAspect="1"/>
           </p:cNvSpPr>
@@ -518,7 +520,7 @@
       </p:sp>
       <p:sp>
         <p:nvSpPr>
-          <p:cNvPr id="3" name="備忘稿版面配置區 2"/>
+          <p:cNvPr id="3" name="Notes 2"/>
           <p:cNvSpPr>
             <a:spLocks noGrp="1"/>
           </p:cNvSpPr>
@@ -533,7 +535,7 @@
           <a:p>
             <a:r>
               <a:rPr lang="zh-TW" altLang="en-US" dirty="0"/>
-              <a:t>老師好。今天報告的問題是：為機器人用的世界模型設計推論晶片，應該和現在的大型語言模型加速器有什麼不同。</a:t>
+              <a:t>老師好，今天報告世界模型與 VLA 推論加速器的研究：機器人用的推論晶片，應該在哪裡和語言模型加速器做出區別。</a:t>
             </a:r>
           </a:p>
         </p:txBody>
@@ -546,7 +548,7 @@
 </p:notes>
 </file>
 
-<file path=ppt/notesSlides/notesSlide101.xml><?xml version="1.0" encoding="utf-8"?>
+<file path=ppt/notesSlides/notesSlide201.xml><?xml version="1.0" encoding="utf-8"?>
 <p:notes xmlns:a="http://schemas.openxmlformats.org/drawingml/2006/main" xmlns:r="http://schemas.openxmlformats.org/officeDocument/2006/relationships" xmlns:p="http://schemas.openxmlformats.org/presentationml/2006/main">
   <p:cSld>
     <p:spTree>
@@ -565,7 +567,7 @@
       </p:grpSpPr>
       <p:sp>
         <p:nvSpPr>
-          <p:cNvPr id="2" name="投影片影像版面配置區 1"/>
+          <p:cNvPr id="2" name="Slide Image 1"/>
           <p:cNvSpPr>
             <a:spLocks noGrp="1" noRot="1" noChangeAspect="1"/>
           </p:cNvSpPr>
@@ -577,7 +579,7 @@
       </p:sp>
       <p:sp>
         <p:nvSpPr>
-          <p:cNvPr id="3" name="備忘稿版面配置區 2"/>
+          <p:cNvPr id="3" name="Notes 2"/>
           <p:cNvSpPr>
             <a:spLocks noGrp="1"/>
           </p:cNvSpPr>
@@ -592,7 +594,7 @@
           <a:p>
             <a:r>
               <a:rPr lang="zh-TW" altLang="en-US" dirty="0"/>
-              <a:t>我們的結論是：語言模型加速器是為「長度不定、狀態不斷長大、每次只算一個向量」的迴圈設計的；機器人世界模型則是「形狀固定、步數很少、每次算一個中等大小矩陣」的靜態計算。所以該投資的不是更大的陣列或更大的記憶體，而是小型陣列、依重用率區分的權重存放策略，以及靜態排程。</a:t>
+              <a:t>老師好。今天報告的問題是：為機器人用的世界模型設計推論晶片，應該和現在的大型語言模型加速器有什麼不同。現有加速器多半是為語言模型服務設計的，假設很長的逐字生成和不斷長大的 KV cache；但機器人模型的計算形狀不一樣：計算圖固定、只有幾步到十步、每步是中等大小的矩陣。所以我們想釐清：哪些語言模型的加速技巧能搬過來，晶片又該在哪裡做出區別。</a:t>
             </a:r>
           </a:p>
         </p:txBody>
@@ -605,7 +607,7 @@
 </p:notes>
 </file>
 
-<file path=ppt/notesSlides/notesSlide102.xml><?xml version="1.0" encoding="utf-8"?>
+<file path=ppt/notesSlides/notesSlide202.xml><?xml version="1.0" encoding="utf-8"?>
 <p:notes xmlns:a="http://schemas.openxmlformats.org/drawingml/2006/main" xmlns:r="http://schemas.openxmlformats.org/officeDocument/2006/relationships" xmlns:p="http://schemas.openxmlformats.org/presentationml/2006/main">
   <p:cSld>
     <p:spTree>
@@ -624,7 +626,7 @@
       </p:grpSpPr>
       <p:sp>
         <p:nvSpPr>
-          <p:cNvPr id="2" name="投影片影像版面配置區 1"/>
+          <p:cNvPr id="2" name="Slide Image 1"/>
           <p:cNvSpPr>
             <a:spLocks noGrp="1" noRot="1" noChangeAspect="1"/>
           </p:cNvSpPr>
@@ -636,7 +638,7 @@
       </p:sp>
       <p:sp>
         <p:nvSpPr>
-          <p:cNvPr id="3" name="備忘稿版面配置區 2"/>
+          <p:cNvPr id="3" name="Notes 2"/>
           <p:cNvSpPr>
             <a:spLocks noGrp="1"/>
           </p:cNvSpPr>
@@ -651,13 +653,7 @@
           <a:p>
             <a:r>
               <a:rPr lang="zh-TW" altLang="en-US" dirty="0"/>
-              <a:t>我們分析了十幾個開源的機器人模型，涵蓋直接輸出動作的模型、預測未來影片的模型，以及在潛在空間做規劃的模型，並以語言模型作對照。所有架構參數都讀自原始碼，計算量直接計數，再用週期級模擬器評估陣列利用率。研究由三個 AI 協作者分工撰寫並互相審查。</a:t>
-            </a:r>
-          </a:p>
-          <a:p>
-            <a:r>
-              <a:rPr lang="zh-TW" altLang="en-US" dirty="0"/>
-              <a:t>貫穿整份研究的觀念是：瓶頸不屬於某一類模型，而屬於「哪個運算階段、跑在哪種硬體上」。所以設計晶片時，要先把模型拆成階段，再逐一對照硬體。</a:t>
+              <a:t>我們分析了十二個開源模型，分成五類，以 Llama 3.1 作對照。架構參數都直接讀自原始碼，計算量直接計數；再做 roofline 分析，並用 SCALE-Sim 校準的週期級模擬評估陣列利用率。研究由三個 AI 協作者分工撰寫並互相審查。</a:t>
             </a:r>
           </a:p>
         </p:txBody>
@@ -670,7 +666,7 @@
 </p:notes>
 </file>
 
-<file path=ppt/notesSlides/notesSlide103.xml><?xml version="1.0" encoding="utf-8"?>
+<file path=ppt/notesSlides/notesSlide203.xml><?xml version="1.0" encoding="utf-8"?>
 <p:notes xmlns:a="http://schemas.openxmlformats.org/drawingml/2006/main" xmlns:r="http://schemas.openxmlformats.org/officeDocument/2006/relationships" xmlns:p="http://schemas.openxmlformats.org/presentationml/2006/main">
   <p:cSld>
     <p:spTree>
@@ -689,7 +685,7 @@
       </p:grpSpPr>
       <p:sp>
         <p:nvSpPr>
-          <p:cNvPr id="2" name="投影片影像版面配置區 1"/>
+          <p:cNvPr id="2" name="Slide Image 1"/>
           <p:cNvSpPr>
             <a:spLocks noGrp="1" noRot="1" noChangeAspect="1"/>
           </p:cNvSpPr>
@@ -701,7 +697,7 @@
       </p:sp>
       <p:sp>
         <p:nvSpPr>
-          <p:cNvPr id="3" name="備忘稿版面配置區 2"/>
+          <p:cNvPr id="3" name="Notes 2"/>
           <p:cNvSpPr>
             <a:spLocks noGrp="1"/>
           </p:cNvSpPr>
@@ -716,19 +712,7 @@
           <a:p>
             <a:r>
               <a:rPr lang="zh-TW" altLang="en-US" dirty="0"/>
-              <a:t>第一類是直接輸出動作的模型。它先用大型視覺語言模型把畫面看一次，再用小型動作網路反覆修正一整段動作。瓶頸在後段：每修正一次就要重讀小網路的權重，但每次只處理幾十列資料，運算單元大半閒置。和語言模型的差別在於被重讀的網路小到有機會放進晶片內，而且每次處理的是矩陣而不是向量。</a:t>
-            </a:r>
-          </a:p>
-          <a:p>
-            <a:r>
-              <a:rPr lang="zh-TW" altLang="en-US" dirty="0"/>
-              <a:t>第二類是預測未來影片的模型，每一步都要處理整段影片的大量 token，是算力與中間資料量壓力，前後還有大型三維卷積編解碼器。部分模型會跨段保存歷史記憶，這是唯一接近語言模型、需要大量狀態記憶體的情況。</a:t>
-            </a:r>
-          </a:p>
-          <a:p>
-            <a:r>
-              <a:rPr lang="zh-TW" altLang="en-US" dirty="0"/>
-              <a:t>第三類是在潛在空間做規劃的模型，平行想像幾百條候選未來，是唯一能用平行候選填滿硬體的機器人工作負載。</a:t>
+              <a:t>貫穿整份研究的觀念是：瓶頸不屬於某一類模型，而屬於哪個運算階段、跑在哪種硬體上。圖上每一點是一個模型的一個階段。同一個模型裡，不同階段的運算密度可以差十倍以上；同一個階段搬到頻寬較低的邊緣晶片，也可能從算力受限變成頻寬受限。所以設計晶片時要先把模型拆成階段。</a:t>
             </a:r>
           </a:p>
         </p:txBody>
@@ -741,7 +725,7 @@
 </p:notes>
 </file>
 
-<file path=ppt/notesSlides/notesSlide104.xml><?xml version="1.0" encoding="utf-8"?>
+<file path=ppt/notesSlides/notesSlide204.xml><?xml version="1.0" encoding="utf-8"?>
 <p:notes xmlns:a="http://schemas.openxmlformats.org/drawingml/2006/main" xmlns:r="http://schemas.openxmlformats.org/officeDocument/2006/relationships" xmlns:p="http://schemas.openxmlformats.org/presentationml/2006/main">
   <p:cSld>
     <p:spTree>
@@ -760,7 +744,7 @@
       </p:grpSpPr>
       <p:sp>
         <p:nvSpPr>
-          <p:cNvPr id="2" name="投影片影像版面配置區 1"/>
+          <p:cNvPr id="2" name="Slide Image 1"/>
           <p:cNvSpPr>
             <a:spLocks noGrp="1" noRot="1" noChangeAspect="1"/>
           </p:cNvSpPr>
@@ -772,7 +756,7 @@
       </p:sp>
       <p:sp>
         <p:nvSpPr>
-          <p:cNvPr id="3" name="備忘稿版面配置區 2"/>
+          <p:cNvPr id="3" name="Notes 2"/>
           <p:cNvSpPr>
             <a:spLocks noGrp="1"/>
           </p:cNvSpPr>
@@ -787,7 +771,7 @@
           <a:p>
             <a:r>
               <a:rPr lang="zh-TW" altLang="en-US" dirty="0"/>
-              <a:t>我們發現，狀態用一個緊湊向量還是一大組 token 表示，會讓硬體需求相差好幾個數量級；這個選擇比候選數或預測步數都重要，應該是晶片規格的第一個參數。我們也發現，讓動作模型一次多產生一些候選，幾乎不增加時間，因為多出的候選可以搭在原本就要做的權重讀取上。</a:t>
+              <a:t>第一類是直接輸出動作的 VLA。前段的視覺語言模型只跑一次，後段的小型動作專家要反覆修正幾步到十步。以 π0 為例，動作專家只佔百分之九的計算量，卻佔 Thor 上一半以上的延遲，因為每一步都要重讀它的權重，但每次只算約五十列。圖中可以看到，權重從外部串流時延遲隨步數線性上升；權重放在片上時幾乎是平的。這和語言模型逐字生成很像，差別在於被重讀的網路小到有機會放進晶片，而且每次算的是矩陣而不是向量。</a:t>
             </a:r>
           </a:p>
         </p:txBody>
@@ -800,7 +784,7 @@
 </p:notes>
 </file>
 
-<file path=ppt/notesSlides/notesSlide105.xml><?xml version="1.0" encoding="utf-8"?>
+<file path=ppt/notesSlides/notesSlide205.xml><?xml version="1.0" encoding="utf-8"?>
 <p:notes xmlns:a="http://schemas.openxmlformats.org/drawingml/2006/main" xmlns:r="http://schemas.openxmlformats.org/officeDocument/2006/relationships" xmlns:p="http://schemas.openxmlformats.org/presentationml/2006/main">
   <p:cSld>
     <p:spTree>
@@ -819,7 +803,7 @@
       </p:grpSpPr>
       <p:sp>
         <p:nvSpPr>
-          <p:cNvPr id="2" name="投影片影像版面配置區 1"/>
+          <p:cNvPr id="2" name="Slide Image 1"/>
           <p:cNvSpPr>
             <a:spLocks noGrp="1" noRot="1" noChangeAspect="1"/>
           </p:cNvSpPr>
@@ -831,7 +815,7 @@
       </p:sp>
       <p:sp>
         <p:nvSpPr>
-          <p:cNvPr id="3" name="備忘稿版面配置區 2"/>
+          <p:cNvPr id="3" name="Notes 2"/>
           <p:cNvSpPr>
             <a:spLocks noGrp="1"/>
           </p:cNvSpPr>
@@ -846,7 +830,7 @@
           <a:p>
             <a:r>
               <a:rPr lang="zh-TW" altLang="en-US" dirty="0"/>
-              <a:t>我們逐項檢視了過去幾年語言模型的加速技巧。只有低精度權重是對所有類別都有效的通用解。語言模型最具代表性的技巧，例如分頁式記憶體管理、跨使用者動態批次、投機解碼，都建立在「狀態會長大」和「有很多使用者可以合併」這兩個前提上，而機器人兩者都沒有。影片模型真正有效的，則是擴散模型才有的槓桿：減少去噪步數，以及在步與步之間重用計算。</a:t>
+              <a:t>需要保存的中間狀態也和語言模型完全不同。VLA 只有零點七到十幾 MB，大小由相機數和 token 數決定，每次重新規劃就丟掉；語言模型則隨上下文和批次一路長到十幾 GB。只有逐段生成的影片世界模型需要跨段保存 GB 級的滑動視窗。所以這類晶片不需要分頁式的 KV 管理，所有狀態大小在編譯時就已知。</a:t>
             </a:r>
           </a:p>
         </p:txBody>
@@ -859,7 +843,7 @@
 </p:notes>
 </file>
 
-<file path=ppt/notesSlides/notesSlide106.xml><?xml version="1.0" encoding="utf-8"?>
+<file path=ppt/notesSlides/notesSlide206.xml><?xml version="1.0" encoding="utf-8"?>
 <p:notes xmlns:a="http://schemas.openxmlformats.org/drawingml/2006/main" xmlns:r="http://schemas.openxmlformats.org/officeDocument/2006/relationships" xmlns:p="http://schemas.openxmlformats.org/presentationml/2006/main">
   <p:cSld>
     <p:spTree>
@@ -878,7 +862,7 @@
       </p:grpSpPr>
       <p:sp>
         <p:nvSpPr>
-          <p:cNvPr id="2" name="投影片影像版面配置區 1"/>
+          <p:cNvPr id="2" name="Slide Image 1"/>
           <p:cNvSpPr>
             <a:spLocks noGrp="1" noRot="1" noChangeAspect="1"/>
           </p:cNvSpPr>
@@ -890,7 +874,7 @@
       </p:sp>
       <p:sp>
         <p:nvSpPr>
-          <p:cNvPr id="3" name="備忘稿版面配置區 2"/>
+          <p:cNvPr id="3" name="Notes 2"/>
           <p:cNvSpPr>
             <a:spLocks noGrp="1"/>
           </p:cNvSpPr>
@@ -905,7 +889,7 @@
           <a:p>
             <a:r>
               <a:rPr lang="zh-TW" altLang="en-US" dirty="0"/>
-              <a:t>陣列層級的模擬也支持這個判斷。語言模型加速器常用一個大型的權重固定陣列，再加上專門算向量的引擎。但機器人模型的主要運算是幾十到幾百列的中等矩陣：在大型陣列上，大部分運算單元閒置；同樣的運算單元總數若切成多個小陣列，並讓每個矩陣自行選擇資料流動方式，利用率可以大幅提高，而且跑大矩陣時不會變差。把小網路權重放在晶片內，只有搭配小陣列才真正有效；兩者要一起做。</a:t>
+              <a:t>第三類是在潛在空間做規劃的模型。一次決策的成本約等於編碼加上搜尋輪數、候選數、預測步數和每次轉移成本的乘積。表中兩個模型都叫潛在世界模型，但一個的狀態是緊湊向量、轉移是小型 MLP，另一個是每幀 256 個 token 的 Transformer，每次轉移成本差了三到五個數量級。所以狀態表示的選擇，比候選數或步數更重要，是晶片規格的第一個參數。另外，讓動作模型一次多產生候選幾乎不增加時間，因為多出的候選搭在原本就要做的權重讀取上。</a:t>
             </a:r>
           </a:p>
         </p:txBody>
@@ -918,7 +902,7 @@
 </p:notes>
 </file>
 
-<file path=ppt/notesSlides/notesSlide107.xml><?xml version="1.0" encoding="utf-8"?>
+<file path=ppt/notesSlides/notesSlide207.xml><?xml version="1.0" encoding="utf-8"?>
 <p:notes xmlns:a="http://schemas.openxmlformats.org/drawingml/2006/main" xmlns:r="http://schemas.openxmlformats.org/officeDocument/2006/relationships" xmlns:p="http://schemas.openxmlformats.org/presentationml/2006/main">
   <p:cSld>
     <p:spTree>
@@ -937,7 +921,7 @@
       </p:grpSpPr>
       <p:sp>
         <p:nvSpPr>
-          <p:cNvPr id="2" name="投影片影像版面配置區 1"/>
+          <p:cNvPr id="2" name="Slide Image 1"/>
           <p:cNvSpPr>
             <a:spLocks noGrp="1" noRot="1" noChangeAspect="1"/>
           </p:cNvSpPr>
@@ -949,7 +933,7 @@
       </p:sp>
       <p:sp>
         <p:nvSpPr>
-          <p:cNvPr id="3" name="備忘稿版面配置區 2"/>
+          <p:cNvPr id="3" name="Notes 2"/>
           <p:cNvSpPr>
             <a:spLocks noGrp="1"/>
           </p:cNvSpPr>
@@ -964,19 +948,7 @@
           <a:p>
             <a:r>
               <a:rPr lang="zh-TW" altLang="en-US" dirty="0"/>
-              <a:t>為了驗證這些觀念，我們解剖了一個新的世界動作模型 Flex-π。它用大型影片模型當主幹，再加一個較小的動作網路；同一份權重可以在執行時選擇只輸出動作，或連未來畫面一起預測。我們從原始碼算出的計算量，和官方實測延遲高度吻合。</a:t>
-            </a:r>
-          </a:p>
-          <a:p>
-            <a:r>
-              <a:rPr lang="zh-TW" altLang="en-US" dirty="0"/>
-              <a:t>它每次推論分兩段：先把當下畫面送進大主幹一次，存下每層的注意力資料；再從雜訊出發，把一整段動作修正四次，每次都讀取剛才存的資料。</a:t>
-            </a:r>
-          </a:p>
-          <a:p>
-            <a:r>
-              <a:rPr lang="zh-TW" altLang="en-US" dirty="0"/>
-              <a:t>這個案例顯示三個和語言模型根本不同的地方：成本主體在每次重做的前段；大主幹與小網路的重用率兩極；存下的資料不是快取，跨推論不能重用。我們也從原始碼找到一些可以直接刪掉、結果完全不變的計算。把這些和小陣列、權重放晶片內一起做，延遲可以降到語言模型式設計的一半以下。</a:t>
+              <a:t>我們逐項量化了約六十項 2026 年以前的語言模型加速技巧。只有低精度權重對所有類別都有效。分頁式記憶體、動態批次、投機解碼這些招牌技巧，都建立在狀態會長大、有很多使用者可以合併的前提上，機器人兩者都沒有。影片模型真正有效的則是擴散模型才有的槓桿：減少去噪步數，以及在步與步之間重用計算。</a:t>
             </a:r>
           </a:p>
         </p:txBody>
@@ -989,7 +961,7 @@
 </p:notes>
 </file>
 
-<file path=ppt/notesSlides/notesSlide108.xml><?xml version="1.0" encoding="utf-8"?>
+<file path=ppt/notesSlides/notesSlide208.xml><?xml version="1.0" encoding="utf-8"?>
 <p:notes xmlns:a="http://schemas.openxmlformats.org/drawingml/2006/main" xmlns:r="http://schemas.openxmlformats.org/officeDocument/2006/relationships" xmlns:p="http://schemas.openxmlformats.org/presentationml/2006/main">
   <p:cSld>
     <p:spTree>
@@ -1008,7 +980,7 @@
       </p:grpSpPr>
       <p:sp>
         <p:nvSpPr>
-          <p:cNvPr id="2" name="投影片影像版面配置區 1"/>
+          <p:cNvPr id="2" name="Slide Image 1"/>
           <p:cNvSpPr>
             <a:spLocks noGrp="1" noRot="1" noChangeAspect="1"/>
           </p:cNvSpPr>
@@ -1020,7 +992,7 @@
       </p:sp>
       <p:sp>
         <p:nvSpPr>
-          <p:cNvPr id="3" name="備忘稿版面配置區 2"/>
+          <p:cNvPr id="3" name="Notes 2"/>
           <p:cNvSpPr>
             <a:spLocks noGrp="1"/>
           </p:cNvSpPr>
@@ -1035,7 +1007,7 @@
           <a:p>
             <a:r>
               <a:rPr lang="zh-TW" altLang="en-US" dirty="0"/>
-              <a:t>綜合以上，我們建議的晶片和語言模型加速器有五個區別。第一，用多個小陣列取代單一大陣列，不做專門算向量的引擎。第二，權重依重用率分兩路：反覆讀的小網路放晶片內，只讀一次的大主幹用低精度從外部串流；外部記憶體以頻寬為優先。第三，狀態大小在編譯時就已知，不需要動態管理。第四，編譯器把每種推論模式編成固定排程，刪除冗餘計算，並提供可保證的最壞延遲，這對閉迴路控制比平均吞吐量更重要。第五，要有適合三維卷積的前端，而注意力只需要一個能處理結構化遮罩的小單元。</a:t>
+              <a:t>陣列層級的模擬支持這個判斷。同樣的乘加單元數，如果用一個 128 乘 128 的權重固定陣列，VLA 動作迴圈只有一成左右的利用率；切成 16 個 32 乘 32 的小陣列、讓每個矩陣自選資料流，可以提高到六到八成，而大矩陣的工作負載在小陣列上仍有九成以上。語言模型 decode 在任何陣列上都很低，這也解釋了它們為什麼轉向向量引擎。另外，權重放片上只有搭配小陣列才真正有效。</a:t>
             </a:r>
           </a:p>
         </p:txBody>
@@ -1048,7 +1020,7 @@
 </p:notes>
 </file>
 
-<file path=ppt/notesSlides/notesSlide109.xml><?xml version="1.0" encoding="utf-8"?>
+<file path=ppt/notesSlides/notesSlide209.xml><?xml version="1.0" encoding="utf-8"?>
 <p:notes xmlns:a="http://schemas.openxmlformats.org/drawingml/2006/main" xmlns:r="http://schemas.openxmlformats.org/officeDocument/2006/relationships" xmlns:p="http://schemas.openxmlformats.org/presentationml/2006/main">
   <p:cSld>
     <p:spTree>
@@ -1067,7 +1039,7 @@
       </p:grpSpPr>
       <p:sp>
         <p:nvSpPr>
-          <p:cNvPr id="2" name="投影片影像版面配置區 1"/>
+          <p:cNvPr id="2" name="Slide Image 1"/>
           <p:cNvSpPr>
             <a:spLocks noGrp="1" noRot="1" noChangeAspect="1"/>
           </p:cNvSpPr>
@@ -1079,7 +1051,7 @@
       </p:sp>
       <p:sp>
         <p:nvSpPr>
-          <p:cNvPr id="3" name="備忘稿版面配置區 2"/>
+          <p:cNvPr id="3" name="Notes 2"/>
           <p:cNvSpPr>
             <a:spLocks noGrp="1"/>
           </p:cNvSpPr>
@@ -1094,7 +1066,7 @@
           <a:p>
             <a:r>
               <a:rPr lang="zh-TW" altLang="en-US" dirty="0"/>
-              <a:t>規格上有三個需要先決定的取捨：要不要支援需要大量歷史記憶的影片模型；小網路要放晶片內，還是改用一次多產生候選的方式來分攤讀取；以及大主幹的精度要壓到多低。</a:t>
+              <a:t>為了驗證這些觀念，我們解剖了 Flex-π。它用 50 億參數的影片模型當主幹，加上 10 億參數的動作網路。每次推論先把當下觀測送進主幹一次，存下每層的注意力資料，這是 prefill；再對一整段動作做四步去噪。我們從原始碼算出的計算量和官方實測吻合。關鍵發現是：在邊緣硬體上，成本主體不是後段的去噪，而是每次推論都要重做的前段；語言模型可以把前段攤提掉，這裡不行。</a:t>
             </a:r>
           </a:p>
         </p:txBody>
@@ -1107,7 +1079,7 @@
 </p:notes>
 </file>
 
-<file path=ppt/notesSlides/notesSlide110.xml><?xml version="1.0" encoding="utf-8"?>
+<file path=ppt/notesSlides/notesSlide210.xml><?xml version="1.0" encoding="utf-8"?>
 <p:notes xmlns:a="http://schemas.openxmlformats.org/drawingml/2006/main" xmlns:r="http://schemas.openxmlformats.org/officeDocument/2006/relationships" xmlns:p="http://schemas.openxmlformats.org/presentationml/2006/main">
   <p:cSld>
     <p:spTree>
@@ -1126,7 +1098,7 @@
       </p:grpSpPr>
       <p:sp>
         <p:nvSpPr>
-          <p:cNvPr id="2" name="投影片影像版面配置區 1"/>
+          <p:cNvPr id="2" name="Slide Image 1"/>
           <p:cNvSpPr>
             <a:spLocks noGrp="1" noRot="1" noChangeAspect="1"/>
           </p:cNvSpPr>
@@ -1138,7 +1110,7 @@
       </p:sp>
       <p:sp>
         <p:nvSpPr>
-          <p:cNvPr id="3" name="備忘稿版面配置區 2"/>
+          <p:cNvPr id="3" name="Notes 2"/>
           <p:cNvSpPr>
             <a:spLocks noGrp="1"/>
           </p:cNvSpPr>
@@ -1153,13 +1125,7 @@
           <a:p>
             <a:r>
               <a:rPr lang="zh-TW" altLang="en-US" dirty="0"/>
-              <a:t>這些結論都來自原始碼計數、理論估算和模擬，不是晶片實測；我們也還沒有實際執行那個大型模型。互審過程中，我們撤回了一項加速宣稱，也修正了陣列模型的排程假設；也接受了提醒：矩陣運算加速之後，正規化、排序這類非矩陣運算可能變成新瓶頸，這一點尚未量化。</a:t>
-            </a:r>
-          </a:p>
-          <a:p>
-            <a:r>
-              <a:rPr lang="zh-TW" altLang="en-US" dirty="0"/>
-              <a:t>下一步是在 GPU 上實測兩件事：一次多產生候選是否真的幾乎不增加時間，以及刪除冗餘計算的實際效益。若前者不成立，我們會撤回「動作網路受頻寬限制」的結論。</a:t>
+              <a:t>我們也從原始碼找到幾處可以直接刪掉、結果完全不變的計算：只輸出動作時，主幹最上面七層算出來沒有人用；文字指令的 K/V 每步都重算，其實整個任務都不變。存下的錨點 K/V 不是語言模型意義上的快取，跨推論不能重用，只在同一次推論的幾步之間有用。表中是 Thor 等級晶片上的估算：語言模型式的設計只能降到 55.6 毫秒，加入小陣列、刪除冗餘、專家常駐片上後可降到約 19.6 毫秒。總計含編碼器約 4.8 毫秒，都是理想下限。</a:t>
             </a:r>
           </a:p>
         </p:txBody>
@@ -1172,7 +1138,7 @@
 </p:notes>
 </file>
 
-<file path=ppt/notesSlides/notesSlide111.xml><?xml version="1.0" encoding="utf-8"?>
+<file path=ppt/notesSlides/notesSlide211.xml><?xml version="1.0" encoding="utf-8"?>
 <p:notes xmlns:a="http://schemas.openxmlformats.org/drawingml/2006/main" xmlns:r="http://schemas.openxmlformats.org/officeDocument/2006/relationships" xmlns:p="http://schemas.openxmlformats.org/presentationml/2006/main">
   <p:cSld>
     <p:spTree>
@@ -1191,7 +1157,7 @@
       </p:grpSpPr>
       <p:sp>
         <p:nvSpPr>
-          <p:cNvPr id="2" name="投影片影像版面配置區 1"/>
+          <p:cNvPr id="2" name="Slide Image 1"/>
           <p:cNvSpPr>
             <a:spLocks noGrp="1" noRot="1" noChangeAspect="1"/>
           </p:cNvSpPr>
@@ -1203,7 +1169,7 @@
       </p:sp>
       <p:sp>
         <p:nvSpPr>
-          <p:cNvPr id="3" name="備忘稿版面配置區 2"/>
+          <p:cNvPr id="3" name="Notes 2"/>
           <p:cNvSpPr>
             <a:spLocks noGrp="1"/>
           </p:cNvSpPr>
@@ -1218,7 +1184,125 @@
           <a:p>
             <a:r>
               <a:rPr lang="zh-TW" altLang="en-US" dirty="0"/>
-              <a:t>總結一句話：機器人世界模型的晶片，差異化的方向不是更大，而是更貼合它固定、短而中等大小的計算形狀。最後想請教老師三個問題：一，多個小陣列帶來的互連與控制成本，會吃掉多少利用率上的好處？二，把小網路權重放進晶片內需要相當大的 SRAM，老師認為這值得，還是應該優先用多候選來分攤讀取？三，若要往硬體原型推進，應該先驗證哪一個單元？報告到這裡，謝謝老師。</a:t>
+              <a:t>綜合以上，我們建議的晶片和語言模型加速器有五個區別：用多個小陣列取代單一大陣列；權重依重用率分兩路，反覆讀的小網路放片上、只讀一次的大主幹用低精度串流，外部記憶體以頻寬為優先；狀態靜態配置；編譯器把每種推論模式編成固定排程，保證最壞延遲，這對閉迴路控制比平均吞吐量更重要；以及三維卷積前端。下表是規格上必須先決定的三個取捨。</a:t>
+            </a:r>
+          </a:p>
+        </p:txBody>
+      </p:sp>
+    </p:spTree>
+  </p:cSld>
+  <p:clrMapOvr>
+    <a:masterClrMapping/>
+  </p:clrMapOvr>
+</p:notes>
+</file>
+
+<file path=ppt/notesSlides/notesSlide212.xml><?xml version="1.0" encoding="utf-8"?>
+<p:notes xmlns:a="http://schemas.openxmlformats.org/drawingml/2006/main" xmlns:r="http://schemas.openxmlformats.org/officeDocument/2006/relationships" xmlns:p="http://schemas.openxmlformats.org/presentationml/2006/main">
+  <p:cSld>
+    <p:spTree>
+      <p:nvGrpSpPr>
+        <p:cNvPr id="1" name=""/>
+        <p:cNvGrpSpPr/>
+        <p:nvPr/>
+      </p:nvGrpSpPr>
+      <p:grpSpPr>
+        <a:xfrm>
+          <a:off x="0" y="0"/>
+          <a:ext cx="0" cy="0"/>
+          <a:chOff x="0" y="0"/>
+          <a:chExt cx="0" cy="0"/>
+        </a:xfrm>
+      </p:grpSpPr>
+      <p:sp>
+        <p:nvSpPr>
+          <p:cNvPr id="2" name="Slide Image 1"/>
+          <p:cNvSpPr>
+            <a:spLocks noGrp="1" noRot="1" noChangeAspect="1"/>
+          </p:cNvSpPr>
+          <p:nvPr>
+            <p:ph type="sldImg"/>
+          </p:nvPr>
+        </p:nvSpPr>
+        <p:spPr/>
+      </p:sp>
+      <p:sp>
+        <p:nvSpPr>
+          <p:cNvPr id="3" name="Notes 2"/>
+          <p:cNvSpPr>
+            <a:spLocks noGrp="1"/>
+          </p:cNvSpPr>
+          <p:nvPr>
+            <p:ph type="body" idx="1"/>
+          </p:nvPr>
+        </p:nvSpPr>
+        <p:spPr/>
+        <p:txBody>
+          <a:bodyPr/>
+          <a:lstStyle/>
+          <a:p>
+            <a:r>
+              <a:rPr lang="zh-TW" altLang="en-US" dirty="0"/>
+              <a:t>這些結論都來自原始碼計數、理論估算和模擬，不是晶片實測，也還沒實際執行 Flex-π 的權重。互審過程中我們撤回了一項加速宣稱，也修正了陣列模型的排程假設；也接受了提醒：矩陣運算加速之後，正規化、排序這類非矩陣運算可能變成新瓶頸。下一步是在 GPU 上實測多候選是否真的幾乎不增加時間，以及刪除冗餘計算的效益；若前者不成立，我們會撤回動作網路受頻寬限制的結論。</a:t>
+            </a:r>
+          </a:p>
+        </p:txBody>
+      </p:sp>
+    </p:spTree>
+  </p:cSld>
+  <p:clrMapOvr>
+    <a:masterClrMapping/>
+  </p:clrMapOvr>
+</p:notes>
+</file>
+
+<file path=ppt/notesSlides/notesSlide213.xml><?xml version="1.0" encoding="utf-8"?>
+<p:notes xmlns:a="http://schemas.openxmlformats.org/drawingml/2006/main" xmlns:r="http://schemas.openxmlformats.org/officeDocument/2006/relationships" xmlns:p="http://schemas.openxmlformats.org/presentationml/2006/main">
+  <p:cSld>
+    <p:spTree>
+      <p:nvGrpSpPr>
+        <p:cNvPr id="1" name=""/>
+        <p:cNvGrpSpPr/>
+        <p:nvPr/>
+      </p:nvGrpSpPr>
+      <p:grpSpPr>
+        <a:xfrm>
+          <a:off x="0" y="0"/>
+          <a:ext cx="0" cy="0"/>
+          <a:chOff x="0" y="0"/>
+          <a:chExt cx="0" cy="0"/>
+        </a:xfrm>
+      </p:grpSpPr>
+      <p:sp>
+        <p:nvSpPr>
+          <p:cNvPr id="2" name="Slide Image 1"/>
+          <p:cNvSpPr>
+            <a:spLocks noGrp="1" noRot="1" noChangeAspect="1"/>
+          </p:cNvSpPr>
+          <p:nvPr>
+            <p:ph type="sldImg"/>
+          </p:nvPr>
+        </p:nvSpPr>
+        <p:spPr/>
+      </p:sp>
+      <p:sp>
+        <p:nvSpPr>
+          <p:cNvPr id="3" name="Notes 2"/>
+          <p:cNvSpPr>
+            <a:spLocks noGrp="1"/>
+          </p:cNvSpPr>
+          <p:nvPr>
+            <p:ph type="body" idx="1"/>
+          </p:nvPr>
+        </p:nvSpPr>
+        <p:spPr/>
+        <p:txBody>
+          <a:bodyPr/>
+          <a:lstStyle/>
+          <a:p>
+            <a:r>
+              <a:rPr lang="zh-TW" altLang="en-US" dirty="0"/>
+              <a:t>總結一句話：機器人世界模型的晶片，差異化方向不是更大，而是更貼合它固定、短而中等大小的計算形狀。最後想請教老師三個問題：多個小陣列帶來的互連與控制成本，會吃掉多少利用率上的好處？把小網路權重放進晶片需要相當大的 SRAM，這值得嗎，還是應該優先用多候選來分攤讀取？若要往硬體原型推進，應該先驗證哪一個單元？報告到這裡，謝謝老師。</a:t>
             </a:r>
           </a:p>
         </p:txBody>
@@ -5079,7 +5163,7 @@
           <a:p>
             <a:pPr algn="ctr"/>
             <a:r>
-              <a:rPr lang="en-US" altLang="zh-TW" sz="3200" dirty="0">
+              <a:rPr lang="en-US" altLang="zh-TW" sz="3200" dirty="0" err="1">
                 <a:solidFill>
                   <a:prstClr val="black"/>
                 </a:solidFill>
@@ -5087,13 +5171,10 @@
                 <a:ea typeface="Arial Unicode MS" pitchFamily="34" charset="-120"/>
                 <a:cs typeface="Times New Roman" pitchFamily="18" charset="0"/>
               </a:rPr>
-              <a:t>機器人世界模型的推論晶片，</a:t>
-            </a:r>
-            <a:br>
-              <a:rPr lang="zh-TW" altLang="en-US" sz="3200"/>
-            </a:br>
-            <a:r>
-              <a:rPr lang="zh-TW" altLang="en-US" sz="3200" dirty="0">
+              <a:t>World Model &amp; VLA Inference: </a:t>
+            </a:r>
+            <a:r>
+              <a:rPr lang="en-US" altLang="zh-TW" sz="3200" dirty="0">
                 <a:solidFill>
                   <a:prstClr val="black"/>
                 </a:solidFill>
@@ -5101,7 +5182,28 @@
                 <a:ea typeface="Arial Unicode MS" pitchFamily="34" charset="-120"/>
                 <a:cs typeface="Times New Roman" pitchFamily="18" charset="0"/>
               </a:rPr>
-              <a:t>該和 LLM 加速器有什麼不同</a:t>
+              <a:t>Where a Robot ASIC</a:t>
+            </a:r>
+            <a:br>
+              <a:rPr lang="en-US" altLang="zh-TW" sz="3200" dirty="0">
+                <a:solidFill>
+                  <a:prstClr val="black"/>
+                </a:solidFill>
+                <a:latin typeface="Times New Roman" pitchFamily="18" charset="0"/>
+                <a:ea typeface="Arial Unicode MS" pitchFamily="34" charset="-120"/>
+                <a:cs typeface="Times New Roman" pitchFamily="18" charset="0"/>
+              </a:rPr>
+            </a:br>
+            <a:r>
+              <a:rPr lang="en-US" altLang="zh-TW" sz="3200" dirty="0">
+                <a:solidFill>
+                  <a:prstClr val="black"/>
+                </a:solidFill>
+                <a:latin typeface="Times New Roman" pitchFamily="18" charset="0"/>
+                <a:ea typeface="Arial Unicode MS" pitchFamily="34" charset="-120"/>
+                <a:cs typeface="Times New Roman" pitchFamily="18" charset="0"/>
+              </a:rPr>
+              <a:t>Must Differ from LLM Accelerators</a:t>
             </a:r>
             <a:endParaRPr kumimoji="0" lang="en-US" altLang="zh-TW" sz="3200" b="0" i="0" u="none" strike="noStrike" kern="1200" cap="none" spc="0" normalizeH="0" baseline="0" noProof="0" dirty="0">
               <a:ln>
@@ -5149,7 +5251,11 @@
             <a:pPr algn="ctr"/>
             <a:r>
               <a:rPr lang="en-US" altLang="zh-TW" dirty="0"/>
-              <a:t>2026.10.13  World Model 推論加速器研究</a:t>
+              <a:t>2026.10.13</a:t>
+            </a:r>
+            <a:r>
+              <a:rPr lang="zh-TW" altLang="en-US" dirty="0"/>
+              <a:t/>
             </a:r>
             <a:endParaRPr lang="zh-TW" altLang="en-US" sz="3200" dirty="0"/>
           </a:p>
@@ -5188,1420 +5294,6 @@
     <p:extLst>
       <p:ext uri="{BB962C8B-B14F-4D97-AF65-F5344CB8AC3E}">
         <p14:creationId xmlns:p14="http://schemas.microsoft.com/office/powerpoint/2010/main" val="2448480051"/>
-      </p:ext>
-    </p:extLst>
-  </p:cSld>
-  <p:clrMapOvr>
-    <a:masterClrMapping/>
-  </p:clrMapOvr>
-</p:sld>
-</file>
-
-<file path=ppt/slides/slide11.xml><?xml version="1.0" encoding="utf-8"?>
-<p:sld xmlns:a="http://schemas.openxmlformats.org/drawingml/2006/main" xmlns:r="http://schemas.openxmlformats.org/officeDocument/2006/relationships" xmlns:p="http://schemas.openxmlformats.org/presentationml/2006/main">
-  <p:cSld>
-    <p:spTree>
-      <p:nvGrpSpPr>
-        <p:cNvPr id="1" name="">
-          <a:extLst>
-            <a:ext uri="{FF2B5EF4-FFF2-40B4-BE49-F238E27FC236}">
-              <a16:creationId xmlns:a16="http://schemas.microsoft.com/office/drawing/2014/main" id="{D3360C21-ECAB-84A5-87AC-3F78426689AE}"/>
-            </a:ext>
-          </a:extLst>
-        </p:cNvPr>
-        <p:cNvGrpSpPr/>
-        <p:nvPr/>
-      </p:nvGrpSpPr>
-      <p:grpSpPr>
-        <a:xfrm>
-          <a:off x="0" y="0"/>
-          <a:ext cx="0" cy="0"/>
-          <a:chOff x="0" y="0"/>
-          <a:chExt cx="0" cy="0"/>
-        </a:xfrm>
-      </p:grpSpPr>
-      <p:sp>
-        <p:nvSpPr>
-          <p:cNvPr id="12" name="內容版面配置區 5">
-            <a:extLst>
-              <a:ext uri="{FF2B5EF4-FFF2-40B4-BE49-F238E27FC236}">
-                <a16:creationId xmlns:a16="http://schemas.microsoft.com/office/drawing/2014/main" id="{98A79EE8-057B-9F45-406A-BCEA24834930}"/>
-              </a:ext>
-            </a:extLst>
-          </p:cNvPr>
-          <p:cNvSpPr txBox="1">
-            <a:spLocks/>
-          </p:cNvSpPr>
-          <p:nvPr/>
-        </p:nvSpPr>
-        <p:spPr bwMode="auto">
-          <a:xfrm>
-            <a:off x="609600" y="1175657"/>
-            <a:ext cx="10972800" cy="4950509"/>
-          </a:xfrm>
-          <a:prstGeom prst="rect">
-            <a:avLst/>
-          </a:prstGeom>
-          <a:noFill/>
-          <a:ln w="9525">
-            <a:noFill/>
-            <a:miter lim="800000"/>
-            <a:headEnd/>
-            <a:tailEnd/>
-          </a:ln>
-        </p:spPr>
-        <p:txBody>
-          <a:bodyPr vert="horz" wrap="square" lIns="91440" tIns="45720" rIns="91440" bIns="45720" numCol="1" anchor="t" anchorCtr="0" compatLnSpc="1">
-            <a:prstTxWarp prst="textNoShape">
-              <a:avLst/>
-            </a:prstTxWarp>
-            <a:normAutofit/>
-          </a:bodyPr>
-          <a:lstStyle>
-            <a:lvl1pPr marL="342891" indent="-342891" algn="l" rtl="0" eaLnBrk="1" fontAlgn="base" hangingPunct="1">
-              <a:spcBef>
-                <a:spcPct val="20000"/>
-              </a:spcBef>
-              <a:spcAft>
-                <a:spcPct val="0"/>
-              </a:spcAft>
-              <a:buFont typeface="Arial" charset="0"/>
-              <a:buChar char="•"/>
-              <a:defRPr sz="2800" kern="1200">
-                <a:solidFill>
-                  <a:schemeClr val="tx1"/>
-                </a:solidFill>
-                <a:latin typeface="+mn-lt"/>
-                <a:ea typeface="+mn-ea"/>
-                <a:cs typeface="+mn-cs"/>
-              </a:defRPr>
-            </a:lvl1pPr>
-            <a:lvl2pPr marL="742932" indent="-285744" algn="l" rtl="0" eaLnBrk="1" fontAlgn="base" hangingPunct="1">
-              <a:spcBef>
-                <a:spcPct val="20000"/>
-              </a:spcBef>
-              <a:spcAft>
-                <a:spcPct val="0"/>
-              </a:spcAft>
-              <a:buFont typeface="Arial" charset="0"/>
-              <a:buChar char="–"/>
-              <a:defRPr sz="2400" kern="1200">
-                <a:solidFill>
-                  <a:schemeClr val="accent1">
-                    <a:lumMod val="75000"/>
-                  </a:schemeClr>
-                </a:solidFill>
-                <a:latin typeface="+mn-lt"/>
-                <a:ea typeface="+mn-ea"/>
-                <a:cs typeface="+mn-cs"/>
-              </a:defRPr>
-            </a:lvl2pPr>
-            <a:lvl3pPr marL="1142971" indent="-228594" algn="l" rtl="0" eaLnBrk="1" fontAlgn="base" hangingPunct="1">
-              <a:spcBef>
-                <a:spcPct val="20000"/>
-              </a:spcBef>
-              <a:spcAft>
-                <a:spcPct val="0"/>
-              </a:spcAft>
-              <a:buFont typeface="Arial" charset="0"/>
-              <a:buChar char="•"/>
-              <a:defRPr sz="2000" kern="1200">
-                <a:solidFill>
-                  <a:schemeClr val="accent1"/>
-                </a:solidFill>
-                <a:latin typeface="+mn-lt"/>
-                <a:ea typeface="+mn-ea"/>
-                <a:cs typeface="+mn-cs"/>
-              </a:defRPr>
-            </a:lvl3pPr>
-            <a:lvl4pPr marL="1600160" indent="-228594" algn="l" rtl="0" eaLnBrk="1" fontAlgn="base" hangingPunct="1">
-              <a:spcBef>
-                <a:spcPct val="20000"/>
-              </a:spcBef>
-              <a:spcAft>
-                <a:spcPct val="0"/>
-              </a:spcAft>
-              <a:buFont typeface="Arial" charset="0"/>
-              <a:buChar char="–"/>
-              <a:defRPr sz="1800" kern="1200">
-                <a:solidFill>
-                  <a:schemeClr val="accent6">
-                    <a:lumMod val="75000"/>
-                  </a:schemeClr>
-                </a:solidFill>
-                <a:latin typeface="+mn-lt"/>
-                <a:ea typeface="+mn-ea"/>
-                <a:cs typeface="+mn-cs"/>
-              </a:defRPr>
-            </a:lvl4pPr>
-            <a:lvl5pPr marL="2057349" indent="-228594" algn="l" rtl="0" eaLnBrk="1" fontAlgn="base" hangingPunct="1">
-              <a:spcBef>
-                <a:spcPct val="20000"/>
-              </a:spcBef>
-              <a:spcAft>
-                <a:spcPct val="0"/>
-              </a:spcAft>
-              <a:buFont typeface="Arial" charset="0"/>
-              <a:buChar char="»"/>
-              <a:defRPr sz="1800" kern="1200">
-                <a:solidFill>
-                  <a:schemeClr val="accent6"/>
-                </a:solidFill>
-                <a:latin typeface="+mn-lt"/>
-                <a:ea typeface="+mn-ea"/>
-                <a:cs typeface="+mn-cs"/>
-              </a:defRPr>
-            </a:lvl5pPr>
-            <a:lvl6pPr marL="2514537" indent="-228594" algn="l" defTabSz="914377" rtl="0" eaLnBrk="1" latinLnBrk="0" hangingPunct="1">
-              <a:spcBef>
-                <a:spcPct val="20000"/>
-              </a:spcBef>
-              <a:buFont typeface="Arial" pitchFamily="34" charset="0"/>
-              <a:buChar char="•"/>
-              <a:defRPr sz="2000" kern="1200">
-                <a:solidFill>
-                  <a:schemeClr val="tx1"/>
-                </a:solidFill>
-                <a:latin typeface="+mn-lt"/>
-                <a:ea typeface="+mn-ea"/>
-                <a:cs typeface="+mn-cs"/>
-              </a:defRPr>
-            </a:lvl6pPr>
-            <a:lvl7pPr marL="2971726" indent="-228594" algn="l" defTabSz="914377" rtl="0" eaLnBrk="1" latinLnBrk="0" hangingPunct="1">
-              <a:spcBef>
-                <a:spcPct val="20000"/>
-              </a:spcBef>
-              <a:buFont typeface="Arial" pitchFamily="34" charset="0"/>
-              <a:buChar char="•"/>
-              <a:defRPr sz="2000" kern="1200">
-                <a:solidFill>
-                  <a:schemeClr val="tx1"/>
-                </a:solidFill>
-                <a:latin typeface="+mn-lt"/>
-                <a:ea typeface="+mn-ea"/>
-                <a:cs typeface="+mn-cs"/>
-              </a:defRPr>
-            </a:lvl7pPr>
-            <a:lvl8pPr marL="3428914" indent="-228594" algn="l" defTabSz="914377" rtl="0" eaLnBrk="1" latinLnBrk="0" hangingPunct="1">
-              <a:spcBef>
-                <a:spcPct val="20000"/>
-              </a:spcBef>
-              <a:buFont typeface="Arial" pitchFamily="34" charset="0"/>
-              <a:buChar char="•"/>
-              <a:defRPr sz="2000" kern="1200">
-                <a:solidFill>
-                  <a:schemeClr val="tx1"/>
-                </a:solidFill>
-                <a:latin typeface="+mn-lt"/>
-                <a:ea typeface="+mn-ea"/>
-                <a:cs typeface="+mn-cs"/>
-              </a:defRPr>
-            </a:lvl8pPr>
-            <a:lvl9pPr marL="3886103" indent="-228594" algn="l" defTabSz="914377" rtl="0" eaLnBrk="1" latinLnBrk="0" hangingPunct="1">
-              <a:spcBef>
-                <a:spcPct val="20000"/>
-              </a:spcBef>
-              <a:buFont typeface="Arial" pitchFamily="34" charset="0"/>
-              <a:buChar char="•"/>
-              <a:defRPr sz="2000" kern="1200">
-                <a:solidFill>
-                  <a:schemeClr val="tx1"/>
-                </a:solidFill>
-                <a:latin typeface="+mn-lt"/>
-                <a:ea typeface="+mn-ea"/>
-                <a:cs typeface="+mn-cs"/>
-              </a:defRPr>
-            </a:lvl9pPr>
-          </a:lstStyle>
-          <a:p>
-            <a:pPr>
-              <a:spcAft>
-                <a:spcPts val="0"/>
-              </a:spcAft>
-            </a:pPr>
-            <a:r>
-              <a:rPr lang="zh-TW" altLang="en-US" dirty="0" b="1"/>
-              <a:t>LLM 加速器的設計假設</a:t>
-            </a:r>
-          </a:p>
-          <a:p>
-            <a:pPr lvl="1">
-              <a:spcAft>
-                <a:spcPts val="0"/>
-              </a:spcAft>
-            </a:pPr>
-            <a:r>
-              <a:rPr lang="zh-TW" altLang="en-US" dirty="0"/>
-              <a:t>生成長度不定，狀態隨對話不斷長大</a:t>
-            </a:r>
-          </a:p>
-          <a:p>
-            <a:pPr lvl="1">
-              <a:spcAft>
-                <a:spcPts val="0"/>
-              </a:spcAft>
-            </a:pPr>
-            <a:r>
-              <a:rPr lang="zh-TW" altLang="en-US" dirty="0"/>
-              <a:t>每次只算一個向量（矩陣乘向量）</a:t>
-            </a:r>
-          </a:p>
-          <a:p>
-            <a:pPr>
-              <a:spcAft>
-                <a:spcPts val="0"/>
-              </a:spcAft>
-            </a:pPr>
-            <a:r>
-              <a:rPr lang="zh-TW" altLang="en-US" dirty="0" b="1"/>
-              <a:t>機器人世界模型的實際負載</a:t>
-            </a:r>
-          </a:p>
-          <a:p>
-            <a:pPr lvl="1">
-              <a:spcAft>
-                <a:spcPts val="0"/>
-              </a:spcAft>
-            </a:pPr>
-            <a:r>
-              <a:rPr lang="zh-TW" altLang="en-US" dirty="0"/>
-              <a:t>形狀固定的靜態計算，步數只有幾步到十步</a:t>
-            </a:r>
-          </a:p>
-          <a:p>
-            <a:pPr lvl="1">
-              <a:spcAft>
-                <a:spcPts val="0"/>
-              </a:spcAft>
-            </a:pPr>
-            <a:r>
-              <a:rPr lang="zh-TW" altLang="en-US" dirty="0"/>
-              <a:t>每次算中等大小的矩陣</a:t>
-            </a:r>
-          </a:p>
-          <a:p>
-            <a:pPr>
-              <a:spcAft>
-                <a:spcPts val="0"/>
-              </a:spcAft>
-            </a:pPr>
-            <a:r>
-              <a:rPr lang="zh-TW" altLang="en-US" dirty="0" b="1"/>
-              <a:t>該投資的方向</a:t>
-            </a:r>
-          </a:p>
-          <a:p>
-            <a:pPr lvl="1">
-              <a:spcAft>
-                <a:spcPts val="0"/>
-              </a:spcAft>
-            </a:pPr>
-            <a:r>
-              <a:rPr lang="zh-TW" altLang="en-US" dirty="0"/>
-              <a:t>小型陣列、依重用率分兩路的權重存放、靜態排程</a:t>
-            </a:r>
-          </a:p>
-        </p:txBody>
-      </p:sp>
-      <p:sp>
-        <p:nvSpPr>
-          <p:cNvPr id="3" name="副標題 2">
-            <a:extLst>
-              <a:ext uri="{FF2B5EF4-FFF2-40B4-BE49-F238E27FC236}">
-                <a16:creationId xmlns:a16="http://schemas.microsoft.com/office/drawing/2014/main" id="{0D642BDC-5B19-506B-CC3D-CAF272E3FB6A}"/>
-              </a:ext>
-            </a:extLst>
-          </p:cNvPr>
-          <p:cNvSpPr>
-            <a:spLocks noGrp="1"/>
-          </p:cNvSpPr>
-          <p:nvPr>
-            <p:ph type="title"/>
-          </p:nvPr>
-        </p:nvSpPr>
-        <p:spPr>
-          <a:xfrm>
-            <a:off x="609600" y="317155"/>
-            <a:ext cx="10972800" cy="582594"/>
-          </a:xfrm>
-        </p:spPr>
-        <p:txBody>
-          <a:bodyPr wrap="square" anchor="ctr">
-            <a:normAutofit fontScale="90000"/>
-          </a:bodyPr>
-          <a:lstStyle/>
-          <a:p>
-            <a:r>
-              <a:rPr lang="en-US" altLang="zh-TW" dirty="0"/>
-              <a:t>結論：差異化不是更大，而是更貼合計算形狀</a:t>
-            </a:r>
-            <a:endParaRPr lang="en-US" altLang="zh-TW" dirty="0">
-              <a:latin typeface="+mn-ea"/>
-              <a:cs typeface="Times New Roman" panose="02020603050405020304" pitchFamily="18" charset="0"/>
-            </a:endParaRPr>
-          </a:p>
-        </p:txBody>
-      </p:sp>
-      <p:sp>
-        <p:nvSpPr>
-          <p:cNvPr id="2" name="投影片編號版面配置區 1">
-            <a:extLst>
-              <a:ext uri="{FF2B5EF4-FFF2-40B4-BE49-F238E27FC236}">
-                <a16:creationId xmlns:a16="http://schemas.microsoft.com/office/drawing/2014/main" id="{9B73AECC-E727-FB48-3345-1117D9DF8296}"/>
-              </a:ext>
-            </a:extLst>
-          </p:cNvPr>
-          <p:cNvSpPr>
-            <a:spLocks noGrp="1"/>
-          </p:cNvSpPr>
-          <p:nvPr>
-            <p:ph type="sldNum" sz="quarter" idx="12"/>
-          </p:nvPr>
-        </p:nvSpPr>
-        <p:spPr/>
-        <p:txBody>
-          <a:bodyPr/>
-          <a:lstStyle/>
-          <a:p>
-            <a:fld id="{E61F77C1-B770-47FB-877F-E631DD26508E}" type="slidenum">
-              <a:rPr lang="zh-TW" altLang="en-US" smtClean="0"/>
-              <a:t>2</a:t>
-            </a:fld>
-            <a:endParaRPr lang="zh-TW" altLang="en-US" dirty="0"/>
-          </a:p>
-        </p:txBody>
-      </p:sp>
-    </p:spTree>
-    <p:extLst>
-      <p:ext uri="{BB962C8B-B14F-4D97-AF65-F5344CB8AC3E}">
-        <p14:creationId xmlns:p14="http://schemas.microsoft.com/office/powerpoint/2010/main" val="340821465"/>
-      </p:ext>
-    </p:extLst>
-  </p:cSld>
-  <p:clrMapOvr>
-    <a:masterClrMapping/>
-  </p:clrMapOvr>
-</p:sld>
-</file>
-
-<file path=ppt/slides/slide12.xml><?xml version="1.0" encoding="utf-8"?>
-<p:sld xmlns:a="http://schemas.openxmlformats.org/drawingml/2006/main" xmlns:r="http://schemas.openxmlformats.org/officeDocument/2006/relationships" xmlns:p="http://schemas.openxmlformats.org/presentationml/2006/main">
-  <p:cSld>
-    <p:spTree>
-      <p:nvGrpSpPr>
-        <p:cNvPr id="1" name="">
-          <a:extLst>
-            <a:ext uri="{FF2B5EF4-FFF2-40B4-BE49-F238E27FC236}">
-              <a16:creationId xmlns:a16="http://schemas.microsoft.com/office/drawing/2014/main" id="{D3360C21-ECAB-84A5-87AC-3F78426689AE}"/>
-            </a:ext>
-          </a:extLst>
-        </p:cNvPr>
-        <p:cNvGrpSpPr/>
-        <p:nvPr/>
-      </p:nvGrpSpPr>
-      <p:grpSpPr>
-        <a:xfrm>
-          <a:off x="0" y="0"/>
-          <a:ext cx="0" cy="0"/>
-          <a:chOff x="0" y="0"/>
-          <a:chExt cx="0" cy="0"/>
-        </a:xfrm>
-      </p:grpSpPr>
-      <p:sp>
-        <p:nvSpPr>
-          <p:cNvPr id="12" name="內容版面配置區 5">
-            <a:extLst>
-              <a:ext uri="{FF2B5EF4-FFF2-40B4-BE49-F238E27FC236}">
-                <a16:creationId xmlns:a16="http://schemas.microsoft.com/office/drawing/2014/main" id="{98A79EE8-057B-9F45-406A-BCEA24834930}"/>
-              </a:ext>
-            </a:extLst>
-          </p:cNvPr>
-          <p:cNvSpPr txBox="1">
-            <a:spLocks/>
-          </p:cNvSpPr>
-          <p:nvPr/>
-        </p:nvSpPr>
-        <p:spPr bwMode="auto">
-          <a:xfrm>
-            <a:off x="609600" y="1175657"/>
-            <a:ext cx="10972800" cy="4950509"/>
-          </a:xfrm>
-          <a:prstGeom prst="rect">
-            <a:avLst/>
-          </a:prstGeom>
-          <a:noFill/>
-          <a:ln w="9525">
-            <a:noFill/>
-            <a:miter lim="800000"/>
-            <a:headEnd/>
-            <a:tailEnd/>
-          </a:ln>
-        </p:spPr>
-        <p:txBody>
-          <a:bodyPr vert="horz" wrap="square" lIns="91440" tIns="45720" rIns="91440" bIns="45720" numCol="1" anchor="t" anchorCtr="0" compatLnSpc="1">
-            <a:prstTxWarp prst="textNoShape">
-              <a:avLst/>
-            </a:prstTxWarp>
-            <a:normAutofit/>
-          </a:bodyPr>
-          <a:lstStyle>
-            <a:lvl1pPr marL="342891" indent="-342891" algn="l" rtl="0" eaLnBrk="1" fontAlgn="base" hangingPunct="1">
-              <a:spcBef>
-                <a:spcPct val="20000"/>
-              </a:spcBef>
-              <a:spcAft>
-                <a:spcPct val="0"/>
-              </a:spcAft>
-              <a:buFont typeface="Arial" charset="0"/>
-              <a:buChar char="•"/>
-              <a:defRPr sz="2800" kern="1200">
-                <a:solidFill>
-                  <a:schemeClr val="tx1"/>
-                </a:solidFill>
-                <a:latin typeface="+mn-lt"/>
-                <a:ea typeface="+mn-ea"/>
-                <a:cs typeface="+mn-cs"/>
-              </a:defRPr>
-            </a:lvl1pPr>
-            <a:lvl2pPr marL="742932" indent="-285744" algn="l" rtl="0" eaLnBrk="1" fontAlgn="base" hangingPunct="1">
-              <a:spcBef>
-                <a:spcPct val="20000"/>
-              </a:spcBef>
-              <a:spcAft>
-                <a:spcPct val="0"/>
-              </a:spcAft>
-              <a:buFont typeface="Arial" charset="0"/>
-              <a:buChar char="–"/>
-              <a:defRPr sz="2400" kern="1200">
-                <a:solidFill>
-                  <a:schemeClr val="accent1">
-                    <a:lumMod val="75000"/>
-                  </a:schemeClr>
-                </a:solidFill>
-                <a:latin typeface="+mn-lt"/>
-                <a:ea typeface="+mn-ea"/>
-                <a:cs typeface="+mn-cs"/>
-              </a:defRPr>
-            </a:lvl2pPr>
-            <a:lvl3pPr marL="1142971" indent="-228594" algn="l" rtl="0" eaLnBrk="1" fontAlgn="base" hangingPunct="1">
-              <a:spcBef>
-                <a:spcPct val="20000"/>
-              </a:spcBef>
-              <a:spcAft>
-                <a:spcPct val="0"/>
-              </a:spcAft>
-              <a:buFont typeface="Arial" charset="0"/>
-              <a:buChar char="•"/>
-              <a:defRPr sz="2000" kern="1200">
-                <a:solidFill>
-                  <a:schemeClr val="accent1"/>
-                </a:solidFill>
-                <a:latin typeface="+mn-lt"/>
-                <a:ea typeface="+mn-ea"/>
-                <a:cs typeface="+mn-cs"/>
-              </a:defRPr>
-            </a:lvl3pPr>
-            <a:lvl4pPr marL="1600160" indent="-228594" algn="l" rtl="0" eaLnBrk="1" fontAlgn="base" hangingPunct="1">
-              <a:spcBef>
-                <a:spcPct val="20000"/>
-              </a:spcBef>
-              <a:spcAft>
-                <a:spcPct val="0"/>
-              </a:spcAft>
-              <a:buFont typeface="Arial" charset="0"/>
-              <a:buChar char="–"/>
-              <a:defRPr sz="1800" kern="1200">
-                <a:solidFill>
-                  <a:schemeClr val="accent6">
-                    <a:lumMod val="75000"/>
-                  </a:schemeClr>
-                </a:solidFill>
-                <a:latin typeface="+mn-lt"/>
-                <a:ea typeface="+mn-ea"/>
-                <a:cs typeface="+mn-cs"/>
-              </a:defRPr>
-            </a:lvl4pPr>
-            <a:lvl5pPr marL="2057349" indent="-228594" algn="l" rtl="0" eaLnBrk="1" fontAlgn="base" hangingPunct="1">
-              <a:spcBef>
-                <a:spcPct val="20000"/>
-              </a:spcBef>
-              <a:spcAft>
-                <a:spcPct val="0"/>
-              </a:spcAft>
-              <a:buFont typeface="Arial" charset="0"/>
-              <a:buChar char="»"/>
-              <a:defRPr sz="1800" kern="1200">
-                <a:solidFill>
-                  <a:schemeClr val="accent6"/>
-                </a:solidFill>
-                <a:latin typeface="+mn-lt"/>
-                <a:ea typeface="+mn-ea"/>
-                <a:cs typeface="+mn-cs"/>
-              </a:defRPr>
-            </a:lvl5pPr>
-            <a:lvl6pPr marL="2514537" indent="-228594" algn="l" defTabSz="914377" rtl="0" eaLnBrk="1" latinLnBrk="0" hangingPunct="1">
-              <a:spcBef>
-                <a:spcPct val="20000"/>
-              </a:spcBef>
-              <a:buFont typeface="Arial" pitchFamily="34" charset="0"/>
-              <a:buChar char="•"/>
-              <a:defRPr sz="2000" kern="1200">
-                <a:solidFill>
-                  <a:schemeClr val="tx1"/>
-                </a:solidFill>
-                <a:latin typeface="+mn-lt"/>
-                <a:ea typeface="+mn-ea"/>
-                <a:cs typeface="+mn-cs"/>
-              </a:defRPr>
-            </a:lvl6pPr>
-            <a:lvl7pPr marL="2971726" indent="-228594" algn="l" defTabSz="914377" rtl="0" eaLnBrk="1" latinLnBrk="0" hangingPunct="1">
-              <a:spcBef>
-                <a:spcPct val="20000"/>
-              </a:spcBef>
-              <a:buFont typeface="Arial" pitchFamily="34" charset="0"/>
-              <a:buChar char="•"/>
-              <a:defRPr sz="2000" kern="1200">
-                <a:solidFill>
-                  <a:schemeClr val="tx1"/>
-                </a:solidFill>
-                <a:latin typeface="+mn-lt"/>
-                <a:ea typeface="+mn-ea"/>
-                <a:cs typeface="+mn-cs"/>
-              </a:defRPr>
-            </a:lvl7pPr>
-            <a:lvl8pPr marL="3428914" indent="-228594" algn="l" defTabSz="914377" rtl="0" eaLnBrk="1" latinLnBrk="0" hangingPunct="1">
-              <a:spcBef>
-                <a:spcPct val="20000"/>
-              </a:spcBef>
-              <a:buFont typeface="Arial" pitchFamily="34" charset="0"/>
-              <a:buChar char="•"/>
-              <a:defRPr sz="2000" kern="1200">
-                <a:solidFill>
-                  <a:schemeClr val="tx1"/>
-                </a:solidFill>
-                <a:latin typeface="+mn-lt"/>
-                <a:ea typeface="+mn-ea"/>
-                <a:cs typeface="+mn-cs"/>
-              </a:defRPr>
-            </a:lvl8pPr>
-            <a:lvl9pPr marL="3886103" indent="-228594" algn="l" defTabSz="914377" rtl="0" eaLnBrk="1" latinLnBrk="0" hangingPunct="1">
-              <a:spcBef>
-                <a:spcPct val="20000"/>
-              </a:spcBef>
-              <a:buFont typeface="Arial" pitchFamily="34" charset="0"/>
-              <a:buChar char="•"/>
-              <a:defRPr sz="2000" kern="1200">
-                <a:solidFill>
-                  <a:schemeClr val="tx1"/>
-                </a:solidFill>
-                <a:latin typeface="+mn-lt"/>
-                <a:ea typeface="+mn-ea"/>
-                <a:cs typeface="+mn-cs"/>
-              </a:defRPr>
-            </a:lvl9pPr>
-          </a:lstStyle>
-          <a:p>
-            <a:pPr>
-              <a:spcAft>
-                <a:spcPts val="0"/>
-              </a:spcAft>
-            </a:pPr>
-            <a:r>
-              <a:rPr lang="zh-TW" altLang="en-US" dirty="0" b="1"/>
-              <a:t>研究範圍</a:t>
-            </a:r>
-          </a:p>
-          <a:p>
-            <a:pPr lvl="1">
-              <a:spcAft>
-                <a:spcPts val="0"/>
-              </a:spcAft>
-            </a:pPr>
-            <a:r>
-              <a:rPr lang="zh-TW" altLang="en-US" dirty="0"/>
-              <a:t>十幾個開源機器人模型：動作輸出、影片預測、潛在空間規劃</a:t>
-            </a:r>
-          </a:p>
-          <a:p>
-            <a:pPr lvl="1">
-              <a:spcAft>
-                <a:spcPts val="0"/>
-              </a:spcAft>
-            </a:pPr>
-            <a:r>
-              <a:rPr lang="zh-TW" altLang="en-US" dirty="0"/>
-              <a:t>架構讀自原始碼、計算量直接計數、週期級模擬評估陣列利用率</a:t>
-            </a:r>
-          </a:p>
-          <a:p>
-            <a:pPr lvl="1">
-              <a:spcAft>
-                <a:spcPts val="0"/>
-              </a:spcAft>
-            </a:pPr>
-            <a:r>
-              <a:rPr lang="zh-TW" altLang="en-US" dirty="0"/>
-              <a:t>三個 AI 協作者分工撰寫並互相審查</a:t>
-            </a:r>
-          </a:p>
-          <a:p>
-            <a:pPr>
-              <a:spcAft>
-                <a:spcPts val="0"/>
-              </a:spcAft>
-            </a:pPr>
-            <a:r>
-              <a:rPr lang="zh-TW" altLang="en-US" dirty="0" b="1"/>
-              <a:t>核心觀念：瓶頸屬於「運算階段 × 硬體」</a:t>
-            </a:r>
-          </a:p>
-          <a:p>
-            <a:pPr lvl="1">
-              <a:spcAft>
-                <a:spcPts val="0"/>
-              </a:spcAft>
-            </a:pPr>
-            <a:r>
-              <a:rPr lang="zh-TW" altLang="en-US" dirty="0"/>
-              <a:t>同一模型內，不同階段的運算密度相差很大</a:t>
-            </a:r>
-          </a:p>
-          <a:p>
-            <a:pPr lvl="1">
-              <a:spcAft>
-                <a:spcPts val="0"/>
-              </a:spcAft>
-            </a:pPr>
-            <a:r>
-              <a:rPr lang="zh-TW" altLang="en-US" dirty="0"/>
-              <a:t>同一階段搬到低頻寬的邊緣晶片，可能從算力受限變成頻寬受限</a:t>
-            </a:r>
-          </a:p>
-        </p:txBody>
-      </p:sp>
-      <p:sp>
-        <p:nvSpPr>
-          <p:cNvPr id="3" name="副標題 2">
-            <a:extLst>
-              <a:ext uri="{FF2B5EF4-FFF2-40B4-BE49-F238E27FC236}">
-                <a16:creationId xmlns:a16="http://schemas.microsoft.com/office/drawing/2014/main" id="{0D642BDC-5B19-506B-CC3D-CAF272E3FB6A}"/>
-              </a:ext>
-            </a:extLst>
-          </p:cNvPr>
-          <p:cNvSpPr>
-            <a:spLocks noGrp="1"/>
-          </p:cNvSpPr>
-          <p:nvPr>
-            <p:ph type="title"/>
-          </p:nvPr>
-        </p:nvSpPr>
-        <p:spPr>
-          <a:xfrm>
-            <a:off x="609600" y="317155"/>
-            <a:ext cx="10972800" cy="582594"/>
-          </a:xfrm>
-        </p:spPr>
-        <p:txBody>
-          <a:bodyPr wrap="square" anchor="ctr">
-            <a:normAutofit fontScale="90000"/>
-          </a:bodyPr>
-          <a:lstStyle/>
-          <a:p>
-            <a:r>
-              <a:rPr lang="en-US" altLang="zh-TW" dirty="0"/>
-              <a:t>研究方法與核心觀念</a:t>
-            </a:r>
-            <a:endParaRPr lang="en-US" altLang="zh-TW" dirty="0">
-              <a:latin typeface="+mn-ea"/>
-              <a:cs typeface="Times New Roman" panose="02020603050405020304" pitchFamily="18" charset="0"/>
-            </a:endParaRPr>
-          </a:p>
-        </p:txBody>
-      </p:sp>
-      <p:sp>
-        <p:nvSpPr>
-          <p:cNvPr id="2" name="投影片編號版面配置區 1">
-            <a:extLst>
-              <a:ext uri="{FF2B5EF4-FFF2-40B4-BE49-F238E27FC236}">
-                <a16:creationId xmlns:a16="http://schemas.microsoft.com/office/drawing/2014/main" id="{9B73AECC-E727-FB48-3345-1117D9DF8296}"/>
-              </a:ext>
-            </a:extLst>
-          </p:cNvPr>
-          <p:cNvSpPr>
-            <a:spLocks noGrp="1"/>
-          </p:cNvSpPr>
-          <p:nvPr>
-            <p:ph type="sldNum" sz="quarter" idx="12"/>
-          </p:nvPr>
-        </p:nvSpPr>
-        <p:spPr/>
-        <p:txBody>
-          <a:bodyPr/>
-          <a:lstStyle/>
-          <a:p>
-            <a:fld id="{E61F77C1-B770-47FB-877F-E631DD26508E}" type="slidenum">
-              <a:rPr lang="zh-TW" altLang="en-US" smtClean="0"/>
-              <a:t>2</a:t>
-            </a:fld>
-            <a:endParaRPr lang="zh-TW" altLang="en-US" dirty="0"/>
-          </a:p>
-        </p:txBody>
-      </p:sp>
-    </p:spTree>
-    <p:extLst>
-      <p:ext uri="{BB962C8B-B14F-4D97-AF65-F5344CB8AC3E}">
-        <p14:creationId xmlns:p14="http://schemas.microsoft.com/office/powerpoint/2010/main" val="340821465"/>
-      </p:ext>
-    </p:extLst>
-  </p:cSld>
-  <p:clrMapOvr>
-    <a:masterClrMapping/>
-  </p:clrMapOvr>
-</p:sld>
-</file>
-
-<file path=ppt/slides/slide13.xml><?xml version="1.0" encoding="utf-8"?>
-<p:sld xmlns:a="http://schemas.openxmlformats.org/drawingml/2006/main" xmlns:r="http://schemas.openxmlformats.org/officeDocument/2006/relationships" xmlns:p="http://schemas.openxmlformats.org/presentationml/2006/main">
-  <p:cSld>
-    <p:spTree>
-      <p:nvGrpSpPr>
-        <p:cNvPr id="1" name="">
-          <a:extLst>
-            <a:ext uri="{FF2B5EF4-FFF2-40B4-BE49-F238E27FC236}">
-              <a16:creationId xmlns:a16="http://schemas.microsoft.com/office/drawing/2014/main" id="{899712D3-450B-8A9B-004C-BA15EF779FC3}"/>
-            </a:ext>
-          </a:extLst>
-        </p:cNvPr>
-        <p:cNvGrpSpPr/>
-        <p:nvPr/>
-      </p:nvGrpSpPr>
-      <p:grpSpPr>
-        <a:xfrm>
-          <a:off x="0" y="0"/>
-          <a:ext cx="0" cy="0"/>
-          <a:chOff x="0" y="0"/>
-          <a:chExt cx="0" cy="0"/>
-        </a:xfrm>
-      </p:grpSpPr>
-      <p:sp>
-        <p:nvSpPr>
-          <p:cNvPr id="16" name="標題 15">
-            <a:extLst>
-              <a:ext uri="{FF2B5EF4-FFF2-40B4-BE49-F238E27FC236}">
-                <a16:creationId xmlns:a16="http://schemas.microsoft.com/office/drawing/2014/main" id="{8F81C2D5-EE54-2187-DAF1-8E01970B299D}"/>
-              </a:ext>
-            </a:extLst>
-          </p:cNvPr>
-          <p:cNvSpPr>
-            <a:spLocks noGrp="1"/>
-          </p:cNvSpPr>
-          <p:nvPr>
-            <p:ph type="title"/>
-          </p:nvPr>
-        </p:nvSpPr>
-        <p:spPr>
-          <a:xfrm>
-            <a:off x="609600" y="307296"/>
-            <a:ext cx="10972800" cy="582594"/>
-          </a:xfrm>
-        </p:spPr>
-        <p:txBody>
-          <a:bodyPr/>
-          <a:lstStyle/>
-          <a:p>
-            <a:r>
-              <a:rPr lang="en-US" altLang="zh-TW" sz="3600" dirty="0"/>
-              <a:t>三類模型，三種不同的壓力</a:t>
-            </a:r>
-            <a:endParaRPr lang="zh-TW" altLang="en-US" sz="3600" dirty="0"/>
-          </a:p>
-        </p:txBody>
-      </p:sp>
-      <p:sp>
-        <p:nvSpPr>
-          <p:cNvPr id="2" name="投影片編號版面配置區 1">
-            <a:extLst>
-              <a:ext uri="{FF2B5EF4-FFF2-40B4-BE49-F238E27FC236}">
-                <a16:creationId xmlns:a16="http://schemas.microsoft.com/office/drawing/2014/main" id="{7EB00882-1F9D-F272-09CD-90F6F8458DB3}"/>
-              </a:ext>
-            </a:extLst>
-          </p:cNvPr>
-          <p:cNvSpPr>
-            <a:spLocks noGrp="1"/>
-          </p:cNvSpPr>
-          <p:nvPr>
-            <p:ph type="sldNum" sz="quarter" idx="12"/>
-          </p:nvPr>
-        </p:nvSpPr>
-        <p:spPr/>
-        <p:txBody>
-          <a:bodyPr/>
-          <a:lstStyle/>
-          <a:p>
-            <a:fld id="{E61F77C1-B770-47FB-877F-E631DD26508E}" type="slidenum">
-              <a:rPr lang="zh-TW" altLang="en-US" smtClean="0"/>
-              <a:t>3</a:t>
-            </a:fld>
-            <a:endParaRPr lang="zh-TW" altLang="en-US"/>
-          </a:p>
-        </p:txBody>
-      </p:sp>
-      <p:sp>
-        <p:nvSpPr>
-          <p:cNvPr id="5" name="內容版面配置區 5">
-            <a:extLst>
-              <a:ext uri="{FF2B5EF4-FFF2-40B4-BE49-F238E27FC236}">
-                <a16:creationId xmlns:a16="http://schemas.microsoft.com/office/drawing/2014/main" id="{C963857C-37A3-2A6F-5230-B3DAA1E1C89C}"/>
-              </a:ext>
-            </a:extLst>
-          </p:cNvPr>
-          <p:cNvSpPr txBox="1">
-            <a:spLocks/>
-          </p:cNvSpPr>
-          <p:nvPr/>
-        </p:nvSpPr>
-        <p:spPr bwMode="auto">
-          <a:xfrm>
-            <a:off x="609599" y="1175657"/>
-            <a:ext cx="10972800" cy="594360"/>
-          </a:xfrm>
-          <a:prstGeom prst="rect">
-            <a:avLst/>
-          </a:prstGeom>
-          <a:noFill/>
-          <a:ln w="9525">
-            <a:noFill/>
-            <a:miter lim="800000"/>
-            <a:headEnd/>
-            <a:tailEnd/>
-          </a:ln>
-        </p:spPr>
-        <p:txBody>
-          <a:bodyPr vert="horz" wrap="square" lIns="91440" tIns="45720" rIns="91440" bIns="45720" numCol="1" anchor="t" anchorCtr="0" compatLnSpc="1">
-            <a:prstTxWarp prst="textNoShape">
-              <a:avLst/>
-            </a:prstTxWarp>
-            <a:normAutofit/>
-          </a:bodyPr>
-          <a:lstStyle>
-            <a:lvl1pPr marL="342891" indent="-342891" algn="l" rtl="0" eaLnBrk="1" fontAlgn="base" hangingPunct="1">
-              <a:spcBef>
-                <a:spcPct val="20000"/>
-              </a:spcBef>
-              <a:spcAft>
-                <a:spcPct val="0"/>
-              </a:spcAft>
-              <a:buFont typeface="Arial" charset="0"/>
-              <a:buChar char="•"/>
-              <a:defRPr sz="2800" kern="1200">
-                <a:solidFill>
-                  <a:schemeClr val="tx1"/>
-                </a:solidFill>
-                <a:latin typeface="+mn-lt"/>
-                <a:ea typeface="+mn-ea"/>
-                <a:cs typeface="+mn-cs"/>
-              </a:defRPr>
-            </a:lvl1pPr>
-            <a:lvl2pPr marL="742932" indent="-285744" algn="l" rtl="0" eaLnBrk="1" fontAlgn="base" hangingPunct="1">
-              <a:spcBef>
-                <a:spcPct val="20000"/>
-              </a:spcBef>
-              <a:spcAft>
-                <a:spcPct val="0"/>
-              </a:spcAft>
-              <a:buFont typeface="Arial" charset="0"/>
-              <a:buChar char="–"/>
-              <a:defRPr sz="2400" kern="1200">
-                <a:solidFill>
-                  <a:schemeClr val="accent1">
-                    <a:lumMod val="75000"/>
-                  </a:schemeClr>
-                </a:solidFill>
-                <a:latin typeface="+mn-lt"/>
-                <a:ea typeface="+mn-ea"/>
-                <a:cs typeface="+mn-cs"/>
-              </a:defRPr>
-            </a:lvl2pPr>
-            <a:lvl3pPr marL="1142971" indent="-228594" algn="l" rtl="0" eaLnBrk="1" fontAlgn="base" hangingPunct="1">
-              <a:spcBef>
-                <a:spcPct val="20000"/>
-              </a:spcBef>
-              <a:spcAft>
-                <a:spcPct val="0"/>
-              </a:spcAft>
-              <a:buFont typeface="Arial" charset="0"/>
-              <a:buChar char="•"/>
-              <a:defRPr sz="2000" kern="1200">
-                <a:solidFill>
-                  <a:schemeClr val="accent1"/>
-                </a:solidFill>
-                <a:latin typeface="+mn-lt"/>
-                <a:ea typeface="+mn-ea"/>
-                <a:cs typeface="+mn-cs"/>
-              </a:defRPr>
-            </a:lvl3pPr>
-            <a:lvl4pPr marL="1600160" indent="-228594" algn="l" rtl="0" eaLnBrk="1" fontAlgn="base" hangingPunct="1">
-              <a:spcBef>
-                <a:spcPct val="20000"/>
-              </a:spcBef>
-              <a:spcAft>
-                <a:spcPct val="0"/>
-              </a:spcAft>
-              <a:buFont typeface="Arial" charset="0"/>
-              <a:buChar char="–"/>
-              <a:defRPr sz="1800" kern="1200">
-                <a:solidFill>
-                  <a:schemeClr val="accent6">
-                    <a:lumMod val="75000"/>
-                  </a:schemeClr>
-                </a:solidFill>
-                <a:latin typeface="+mn-lt"/>
-                <a:ea typeface="+mn-ea"/>
-                <a:cs typeface="+mn-cs"/>
-              </a:defRPr>
-            </a:lvl4pPr>
-            <a:lvl5pPr marL="2057349" indent="-228594" algn="l" rtl="0" eaLnBrk="1" fontAlgn="base" hangingPunct="1">
-              <a:spcBef>
-                <a:spcPct val="20000"/>
-              </a:spcBef>
-              <a:spcAft>
-                <a:spcPct val="0"/>
-              </a:spcAft>
-              <a:buFont typeface="Arial" charset="0"/>
-              <a:buChar char="»"/>
-              <a:defRPr sz="1800" kern="1200">
-                <a:solidFill>
-                  <a:schemeClr val="accent6"/>
-                </a:solidFill>
-                <a:latin typeface="+mn-lt"/>
-                <a:ea typeface="+mn-ea"/>
-                <a:cs typeface="+mn-cs"/>
-              </a:defRPr>
-            </a:lvl5pPr>
-            <a:lvl6pPr marL="2514537" indent="-228594" algn="l" defTabSz="914377" rtl="0" eaLnBrk="1" latinLnBrk="0" hangingPunct="1">
-              <a:spcBef>
-                <a:spcPct val="20000"/>
-              </a:spcBef>
-              <a:buFont typeface="Arial" pitchFamily="34" charset="0"/>
-              <a:buChar char="•"/>
-              <a:defRPr sz="2000" kern="1200">
-                <a:solidFill>
-                  <a:schemeClr val="tx1"/>
-                </a:solidFill>
-                <a:latin typeface="+mn-lt"/>
-                <a:ea typeface="+mn-ea"/>
-                <a:cs typeface="+mn-cs"/>
-              </a:defRPr>
-            </a:lvl6pPr>
-            <a:lvl7pPr marL="2971726" indent="-228594" algn="l" defTabSz="914377" rtl="0" eaLnBrk="1" latinLnBrk="0" hangingPunct="1">
-              <a:spcBef>
-                <a:spcPct val="20000"/>
-              </a:spcBef>
-              <a:buFont typeface="Arial" pitchFamily="34" charset="0"/>
-              <a:buChar char="•"/>
-              <a:defRPr sz="2000" kern="1200">
-                <a:solidFill>
-                  <a:schemeClr val="tx1"/>
-                </a:solidFill>
-                <a:latin typeface="+mn-lt"/>
-                <a:ea typeface="+mn-ea"/>
-                <a:cs typeface="+mn-cs"/>
-              </a:defRPr>
-            </a:lvl7pPr>
-            <a:lvl8pPr marL="3428914" indent="-228594" algn="l" defTabSz="914377" rtl="0" eaLnBrk="1" latinLnBrk="0" hangingPunct="1">
-              <a:spcBef>
-                <a:spcPct val="20000"/>
-              </a:spcBef>
-              <a:buFont typeface="Arial" pitchFamily="34" charset="0"/>
-              <a:buChar char="•"/>
-              <a:defRPr sz="2000" kern="1200">
-                <a:solidFill>
-                  <a:schemeClr val="tx1"/>
-                </a:solidFill>
-                <a:latin typeface="+mn-lt"/>
-                <a:ea typeface="+mn-ea"/>
-                <a:cs typeface="+mn-cs"/>
-              </a:defRPr>
-            </a:lvl8pPr>
-            <a:lvl9pPr marL="3886103" indent="-228594" algn="l" defTabSz="914377" rtl="0" eaLnBrk="1" latinLnBrk="0" hangingPunct="1">
-              <a:spcBef>
-                <a:spcPct val="20000"/>
-              </a:spcBef>
-              <a:buFont typeface="Arial" pitchFamily="34" charset="0"/>
-              <a:buChar char="•"/>
-              <a:defRPr sz="2000" kern="1200">
-                <a:solidFill>
-                  <a:schemeClr val="tx1"/>
-                </a:solidFill>
-                <a:latin typeface="+mn-lt"/>
-                <a:ea typeface="+mn-ea"/>
-                <a:cs typeface="+mn-cs"/>
-              </a:defRPr>
-            </a:lvl9pPr>
-          </a:lstStyle>
-          <a:p>
-            <a:pPr>
-              <a:spcAft>
-                <a:spcPts val="0"/>
-              </a:spcAft>
-            </a:pPr>
-            <a:r>
-              <a:rPr lang="zh-TW" altLang="en-US" dirty="0"/>
-              <a:t>同樣叫世界模型，對硬體的壓力完全不同</a:t>
-            </a:r>
-          </a:p>
-        </p:txBody>
-      </p:sp>
-      <p:graphicFrame>
-        <p:nvGraphicFramePr>
-          <p:cNvPr id="30" name="表格 30"/>
-          <p:cNvGraphicFramePr>
-            <a:graphicFrameLocks noGrp="1"/>
-          </p:cNvGraphicFramePr>
-          <p:nvPr/>
-        </p:nvGraphicFramePr>
-        <p:xfrm>
-          <a:off x="609600" y="1874520"/>
-          <a:ext cx="10972800" cy="1828800"/>
-        </p:xfrm>
-        <a:graphic>
-          <a:graphicData uri="http://schemas.openxmlformats.org/drawingml/2006/table">
-            <a:tbl>
-              <a:tblPr firstRow="1" bandRow="1"/>
-              <a:tblGrid>
-                <a:gridCol w="1600200"/>
-                <a:gridCol w="3124200"/>
-                <a:gridCol w="3124200"/>
-                <a:gridCol w="3124200"/>
-              </a:tblGrid>
-              <a:tr h="457200">
-                <a:tc>
-                  <a:txBody>
-                    <a:bodyPr/>
-                    <a:lstStyle/>
-                    <a:p>
-                      <a:r>
-                        <a:rPr lang="zh-TW" altLang="en-US" dirty="0" b="1" sz="1800">
-                          <a:solidFill>
-                            <a:schemeClr val="bg1"/>
-                          </a:solidFill>
-                        </a:rPr>
-                        <a:t/>
-                      </a:r>
-                    </a:p>
-                  </a:txBody>
-                  <a:tcPr marL="91440" marR="91440" marT="64008" marB="64008" anchor="ctr">
-                    <a:solidFill>
-                      <a:schemeClr val="accent1"/>
-                    </a:solidFill>
-                  </a:tcPr>
-                </a:tc>
-                <a:tc>
-                  <a:txBody>
-                    <a:bodyPr/>
-                    <a:lstStyle/>
-                    <a:p>
-                      <a:r>
-                        <a:rPr lang="zh-TW" altLang="en-US" dirty="0" b="1" sz="1800">
-                          <a:solidFill>
-                            <a:schemeClr val="bg1"/>
-                          </a:solidFill>
-                        </a:rPr>
-                        <a:t>直接輸出動作</a:t>
-                      </a:r>
-                    </a:p>
-                  </a:txBody>
-                  <a:tcPr marL="91440" marR="91440" marT="64008" marB="64008" anchor="ctr">
-                    <a:solidFill>
-                      <a:schemeClr val="accent1"/>
-                    </a:solidFill>
-                  </a:tcPr>
-                </a:tc>
-                <a:tc>
-                  <a:txBody>
-                    <a:bodyPr/>
-                    <a:lstStyle/>
-                    <a:p>
-                      <a:r>
-                        <a:rPr lang="zh-TW" altLang="en-US" dirty="0" b="1" sz="1800">
-                          <a:solidFill>
-                            <a:schemeClr val="bg1"/>
-                          </a:solidFill>
-                        </a:rPr>
-                        <a:t>預測未來影片</a:t>
-                      </a:r>
-                    </a:p>
-                  </a:txBody>
-                  <a:tcPr marL="91440" marR="91440" marT="64008" marB="64008" anchor="ctr">
-                    <a:solidFill>
-                      <a:schemeClr val="accent1"/>
-                    </a:solidFill>
-                  </a:tcPr>
-                </a:tc>
-                <a:tc>
-                  <a:txBody>
-                    <a:bodyPr/>
-                    <a:lstStyle/>
-                    <a:p>
-                      <a:r>
-                        <a:rPr lang="zh-TW" altLang="en-US" dirty="0" b="1" sz="1800">
-                          <a:solidFill>
-                            <a:schemeClr val="bg1"/>
-                          </a:solidFill>
-                        </a:rPr>
-                        <a:t>潛在空間規劃</a:t>
-                      </a:r>
-                    </a:p>
-                  </a:txBody>
-                  <a:tcPr marL="91440" marR="91440" marT="64008" marB="64008" anchor="ctr">
-                    <a:solidFill>
-                      <a:schemeClr val="accent1"/>
-                    </a:solidFill>
-                  </a:tcPr>
-                </a:tc>
-              </a:tr>
-              <a:tr h="457200">
-                <a:tc>
-                  <a:txBody>
-                    <a:bodyPr/>
-                    <a:lstStyle/>
-                    <a:p>
-                      <a:r>
-                        <a:rPr lang="zh-TW" altLang="en-US" dirty="0" b="1" sz="1800"/>
-                        <a:t>怎麼算</a:t>
-                      </a:r>
-                    </a:p>
-                  </a:txBody>
-                  <a:tcPr marL="91440" marR="91440" marT="64008" marB="64008" anchor="ctr">
-                    <a:solidFill>
-                      <a:schemeClr val="accent1">
-                        <a:lumMod val="20000"/>
-                        <a:lumOff val="80000"/>
-                      </a:schemeClr>
-                    </a:solidFill>
-                  </a:tcPr>
-                </a:tc>
-                <a:tc>
-                  <a:txBody>
-                    <a:bodyPr/>
-                    <a:lstStyle/>
-                    <a:p>
-                      <a:r>
-                        <a:rPr lang="zh-TW" altLang="en-US" dirty="0" sz="1800"/>
-                        <a:t>大模型看畫面一次，小網路反覆修正一段動作</a:t>
-                      </a:r>
-                    </a:p>
-                  </a:txBody>
-                  <a:tcPr marL="91440" marR="91440" marT="64008" marB="64008" anchor="ctr">
-                    <a:solidFill>
-                      <a:schemeClr val="accent1">
-                        <a:lumMod val="20000"/>
-                        <a:lumOff val="80000"/>
-                      </a:schemeClr>
-                    </a:solidFill>
-                  </a:tcPr>
-                </a:tc>
-                <a:tc>
-                  <a:txBody>
-                    <a:bodyPr/>
-                    <a:lstStyle/>
-                    <a:p>
-                      <a:r>
-                        <a:rPr lang="zh-TW" altLang="en-US" dirty="0" sz="1800"/>
-                        <a:t>每步處理整段影片的大量 token</a:t>
-                      </a:r>
-                    </a:p>
-                  </a:txBody>
-                  <a:tcPr marL="91440" marR="91440" marT="64008" marB="64008" anchor="ctr">
-                    <a:solidFill>
-                      <a:schemeClr val="accent1">
-                        <a:lumMod val="20000"/>
-                        <a:lumOff val="80000"/>
-                      </a:schemeClr>
-                    </a:solidFill>
-                  </a:tcPr>
-                </a:tc>
-                <a:tc>
-                  <a:txBody>
-                    <a:bodyPr/>
-                    <a:lstStyle/>
-                    <a:p>
-                      <a:r>
-                        <a:rPr lang="zh-TW" altLang="en-US" dirty="0" sz="1800"/>
-                        <a:t>壓縮成狀態，平行想像數百條候選未來</a:t>
-                      </a:r>
-                    </a:p>
-                  </a:txBody>
-                  <a:tcPr marL="91440" marR="91440" marT="64008" marB="64008" anchor="ctr">
-                    <a:solidFill>
-                      <a:schemeClr val="accent1">
-                        <a:lumMod val="20000"/>
-                        <a:lumOff val="80000"/>
-                      </a:schemeClr>
-                    </a:solidFill>
-                  </a:tcPr>
-                </a:tc>
-              </a:tr>
-              <a:tr h="457200">
-                <a:tc>
-                  <a:txBody>
-                    <a:bodyPr/>
-                    <a:lstStyle/>
-                    <a:p>
-                      <a:r>
-                        <a:rPr lang="zh-TW" altLang="en-US" dirty="0" b="1" sz="1800"/>
-                        <a:t>瓶頸</a:t>
-                      </a:r>
-                    </a:p>
-                  </a:txBody>
-                  <a:tcPr marL="91440" marR="91440" marT="64008" marB="64008" anchor="ctr">
-                    <a:solidFill>
-                      <a:schemeClr val="bg1"/>
-                    </a:solidFill>
-                  </a:tcPr>
-                </a:tc>
-                <a:tc>
-                  <a:txBody>
-                    <a:bodyPr/>
-                    <a:lstStyle/>
-                    <a:p>
-                      <a:r>
-                        <a:rPr lang="zh-TW" altLang="en-US" dirty="0" sz="1800"/>
-                        <a:t>每步重讀小網路權重，但每次只算幾十列</a:t>
-                      </a:r>
-                    </a:p>
-                  </a:txBody>
-                  <a:tcPr marL="91440" marR="91440" marT="64008" marB="64008" anchor="ctr">
-                    <a:solidFill>
-                      <a:schemeClr val="bg1"/>
-                    </a:solidFill>
-                  </a:tcPr>
-                </a:tc>
-                <a:tc>
-                  <a:txBody>
-                    <a:bodyPr/>
-                    <a:lstStyle/>
-                    <a:p>
-                      <a:r>
-                        <a:rPr lang="zh-TW" altLang="en-US" dirty="0" sz="1800"/>
-                        <a:t>算力與中間資料量，加上三維卷積編解碼器</a:t>
-                      </a:r>
-                    </a:p>
-                  </a:txBody>
-                  <a:tcPr marL="91440" marR="91440" marT="64008" marB="64008" anchor="ctr">
-                    <a:solidFill>
-                      <a:schemeClr val="bg1"/>
-                    </a:solidFill>
-                  </a:tcPr>
-                </a:tc>
-                <a:tc>
-                  <a:txBody>
-                    <a:bodyPr/>
-                    <a:lstStyle/>
-                    <a:p>
-                      <a:r>
-                        <a:rPr lang="zh-TW" altLang="en-US" dirty="0" sz="1800"/>
-                        <a:t>取決於狀態怎麼表示</a:t>
-                      </a:r>
-                    </a:p>
-                  </a:txBody>
-                  <a:tcPr marL="91440" marR="91440" marT="64008" marB="64008" anchor="ctr">
-                    <a:solidFill>
-                      <a:schemeClr val="bg1"/>
-                    </a:solidFill>
-                  </a:tcPr>
-                </a:tc>
-              </a:tr>
-              <a:tr h="457200">
-                <a:tc>
-                  <a:txBody>
-                    <a:bodyPr/>
-                    <a:lstStyle/>
-                    <a:p>
-                      <a:r>
-                        <a:rPr lang="zh-TW" altLang="en-US" dirty="0" b="1" sz="1800"/>
-                        <a:t>狀態</a:t>
-                      </a:r>
-                    </a:p>
-                  </a:txBody>
-                  <a:tcPr marL="91440" marR="91440" marT="64008" marB="64008" anchor="ctr">
-                    <a:solidFill>
-                      <a:schemeClr val="accent1">
-                        <a:lumMod val="20000"/>
-                        <a:lumOff val="80000"/>
-                      </a:schemeClr>
-                    </a:solidFill>
-                  </a:tcPr>
-                </a:tc>
-                <a:tc>
-                  <a:txBody>
-                    <a:bodyPr/>
-                    <a:lstStyle/>
-                    <a:p>
-                      <a:r>
-                        <a:rPr lang="zh-TW" altLang="en-US" dirty="0" sz="1800"/>
-                        <a:t>小且大小固定，重新規劃就丟掉</a:t>
-                      </a:r>
-                    </a:p>
-                  </a:txBody>
-                  <a:tcPr marL="91440" marR="91440" marT="64008" marB="64008" anchor="ctr">
-                    <a:solidFill>
-                      <a:schemeClr val="accent1">
-                        <a:lumMod val="20000"/>
-                        <a:lumOff val="80000"/>
-                      </a:schemeClr>
-                    </a:solidFill>
-                  </a:tcPr>
-                </a:tc>
-                <a:tc>
-                  <a:txBody>
-                    <a:bodyPr/>
-                    <a:lstStyle/>
-                    <a:p>
-                      <a:r>
-                        <a:rPr lang="zh-TW" altLang="en-US" dirty="0" sz="1800"/>
-                        <a:t>部分模型需跨段保存歷史記憶</a:t>
-                      </a:r>
-                    </a:p>
-                  </a:txBody>
-                  <a:tcPr marL="91440" marR="91440" marT="64008" marB="64008" anchor="ctr">
-                    <a:solidFill>
-                      <a:schemeClr val="accent1">
-                        <a:lumMod val="20000"/>
-                        <a:lumOff val="80000"/>
-                      </a:schemeClr>
-                    </a:solidFill>
-                  </a:tcPr>
-                </a:tc>
-                <a:tc>
-                  <a:txBody>
-                    <a:bodyPr/>
-                    <a:lstStyle/>
-                    <a:p>
-                      <a:r>
-                        <a:rPr lang="zh-TW" altLang="en-US" dirty="0" sz="1800"/>
-                        <a:t>唯一能用平行候選填滿硬體</a:t>
-                      </a:r>
-                    </a:p>
-                  </a:txBody>
-                  <a:tcPr marL="91440" marR="91440" marT="64008" marB="64008" anchor="ctr">
-                    <a:solidFill>
-                      <a:schemeClr val="accent1">
-                        <a:lumMod val="20000"/>
-                        <a:lumOff val="80000"/>
-                      </a:schemeClr>
-                    </a:solidFill>
-                  </a:tcPr>
-                </a:tc>
-              </a:tr>
-            </a:tbl>
-          </a:graphicData>
-        </a:graphic>
-      </p:graphicFrame>
-    </p:spTree>
-    <p:extLst>
-      <p:ext uri="{BB962C8B-B14F-4D97-AF65-F5344CB8AC3E}">
-        <p14:creationId xmlns:p14="http://schemas.microsoft.com/office/powerpoint/2010/main" val="1325503144"/>
       </p:ext>
     </p:extLst>
   </p:cSld>
@@ -6834,8 +5526,8 @@
               </a:spcAft>
             </a:pPr>
             <a:r>
-              <a:rPr lang="zh-TW" altLang="en-US" dirty="0" b="1"/>
-              <a:t>狀態用一個緊湊向量，還是一大組 token？</a:t>
+              <a:rPr lang="en-US" altLang="zh-TW" sz="2400" dirty="0"/>
+              <a:t>Background</a:t>
             </a:r>
           </a:p>
           <a:p>
@@ -6845,8 +5537,8 @@
               </a:spcAft>
             </a:pPr>
             <a:r>
-              <a:rPr lang="zh-TW" altLang="en-US" dirty="0"/>
-              <a:t>同樣叫潛在世界模型，硬體需求可相差好幾個數量級</a:t>
+              <a:rPr lang="en-US" altLang="zh-TW" sz="2000" dirty="0"/>
+              <a:t>Robot foundation models (VLA, video world models, world-action models) are moving onto edge SoCs</a:t>
             </a:r>
           </a:p>
           <a:p>
@@ -6856,8 +5548,8 @@
               </a:spcAft>
             </a:pPr>
             <a:r>
-              <a:rPr lang="zh-TW" altLang="en-US" dirty="0"/>
-              <a:t>比候選數、預測步數都重要</a:t>
+              <a:rPr lang="en-US" altLang="zh-TW" sz="2000" dirty="0"/>
+              <a:t>Existing AI accelerators are tuned for LLM serving: long autoregressive decode and a growing KV cache</a:t>
             </a:r>
           </a:p>
           <a:p>
@@ -6867,8 +5559,8 @@
               </a:spcAft>
             </a:pPr>
             <a:r>
-              <a:rPr lang="zh-TW" altLang="en-US" dirty="0" b="1"/>
-              <a:t>候選平行度幾乎免費</a:t>
+              <a:rPr lang="en-US" altLang="zh-TW" sz="2400" dirty="0"/>
+              <a:t>Problem</a:t>
             </a:r>
           </a:p>
           <a:p>
@@ -6878,8 +5570,8 @@
               </a:spcAft>
             </a:pPr>
             <a:r>
-              <a:rPr lang="zh-TW" altLang="en-US" dirty="0"/>
-              <a:t>動作模型一次多產生一些候選，時間幾乎不增加</a:t>
+              <a:rPr lang="en-US" altLang="zh-TW" sz="2000" dirty="0"/>
+              <a:t>Robot inference has a different shape: fixed graphs, 4–10 denoising steps, medium-size GEMMs</a:t>
             </a:r>
           </a:p>
           <a:p>
@@ -6889,8 +5581,30 @@
               </a:spcAft>
             </a:pPr>
             <a:r>
-              <a:rPr lang="zh-TW" altLang="en-US" dirty="0"/>
-              <a:t>多出的候選搭在原本就要做的權重讀取上</a:t>
+              <a:rPr lang="en-US" altLang="zh-TW" sz="2000" dirty="0"/>
+              <a:t>Unclear which LLM-accelerator techniques transfer, and which features a robot ASIC actually needs</a:t>
+            </a:r>
+          </a:p>
+          <a:p>
+            <a:pPr>
+              <a:spcAft>
+                <a:spcPts val="0"/>
+              </a:spcAft>
+            </a:pPr>
+            <a:r>
+              <a:rPr lang="en-US" altLang="zh-TW" sz="2400" dirty="0"/>
+              <a:t>Goal</a:t>
+            </a:r>
+          </a:p>
+          <a:p>
+            <a:pPr lvl="1">
+              <a:spcAft>
+                <a:spcPts val="0"/>
+              </a:spcAft>
+            </a:pPr>
+            <a:r>
+              <a:rPr lang="en-US" altLang="zh-TW" sz="2000" dirty="0"/>
+              <a:t>Identify where a world-model / VLA ASIC must differ from a conventional LLM accelerator</a:t>
             </a:r>
           </a:p>
         </p:txBody>
@@ -6925,7 +5639,7 @@
           <a:p>
             <a:r>
               <a:rPr lang="en-US" altLang="zh-TW" dirty="0"/>
-              <a:t>晶片規格的第一個參數：狀態表示</a:t>
+              <a:t>Introduction</a:t>
             </a:r>
             <a:endParaRPr lang="en-US" altLang="zh-TW" dirty="0">
               <a:latin typeface="+mn-ea"/>
@@ -6984,7 +5698,7 @@
         <p:cNvPr id="1" name="">
           <a:extLst>
             <a:ext uri="{FF2B5EF4-FFF2-40B4-BE49-F238E27FC236}">
-              <a16:creationId xmlns:a16="http://schemas.microsoft.com/office/drawing/2014/main" id="{899712D3-450B-8A9B-004C-BA15EF779FC3}"/>
+              <a16:creationId xmlns:a16="http://schemas.microsoft.com/office/drawing/2014/main" id="{D3360C21-ECAB-84A5-87AC-3F78426689AE}"/>
             </a:ext>
           </a:extLst>
         </p:cNvPr>
@@ -7001,73 +5715,10 @@
       </p:grpSpPr>
       <p:sp>
         <p:nvSpPr>
-          <p:cNvPr id="16" name="標題 15">
+          <p:cNvPr id="12" name="內容版面配置區 5">
             <a:extLst>
               <a:ext uri="{FF2B5EF4-FFF2-40B4-BE49-F238E27FC236}">
-                <a16:creationId xmlns:a16="http://schemas.microsoft.com/office/drawing/2014/main" id="{8F81C2D5-EE54-2187-DAF1-8E01970B299D}"/>
-              </a:ext>
-            </a:extLst>
-          </p:cNvPr>
-          <p:cNvSpPr>
-            <a:spLocks noGrp="1"/>
-          </p:cNvSpPr>
-          <p:nvPr>
-            <p:ph type="title"/>
-          </p:nvPr>
-        </p:nvSpPr>
-        <p:spPr>
-          <a:xfrm>
-            <a:off x="609600" y="307296"/>
-            <a:ext cx="10972800" cy="582594"/>
-          </a:xfrm>
-        </p:spPr>
-        <p:txBody>
-          <a:bodyPr/>
-          <a:lstStyle/>
-          <a:p>
-            <a:r>
-              <a:rPr lang="en-US" altLang="zh-TW" sz="3600" dirty="0"/>
-              <a:t>語言模型的老招，哪些能用、哪些不能</a:t>
-            </a:r>
-            <a:endParaRPr lang="zh-TW" altLang="en-US" sz="3600" dirty="0"/>
-          </a:p>
-        </p:txBody>
-      </p:sp>
-      <p:sp>
-        <p:nvSpPr>
-          <p:cNvPr id="2" name="投影片編號版面配置區 1">
-            <a:extLst>
-              <a:ext uri="{FF2B5EF4-FFF2-40B4-BE49-F238E27FC236}">
-                <a16:creationId xmlns:a16="http://schemas.microsoft.com/office/drawing/2014/main" id="{7EB00882-1F9D-F272-09CD-90F6F8458DB3}"/>
-              </a:ext>
-            </a:extLst>
-          </p:cNvPr>
-          <p:cNvSpPr>
-            <a:spLocks noGrp="1"/>
-          </p:cNvSpPr>
-          <p:nvPr>
-            <p:ph type="sldNum" sz="quarter" idx="12"/>
-          </p:nvPr>
-        </p:nvSpPr>
-        <p:spPr/>
-        <p:txBody>
-          <a:bodyPr/>
-          <a:lstStyle/>
-          <a:p>
-            <a:fld id="{E61F77C1-B770-47FB-877F-E631DD26508E}" type="slidenum">
-              <a:rPr lang="zh-TW" altLang="en-US" smtClean="0"/>
-              <a:t>3</a:t>
-            </a:fld>
-            <a:endParaRPr lang="zh-TW" altLang="en-US"/>
-          </a:p>
-        </p:txBody>
-      </p:sp>
-      <p:sp>
-        <p:nvSpPr>
-          <p:cNvPr id="5" name="內容版面配置區 5">
-            <a:extLst>
-              <a:ext uri="{FF2B5EF4-FFF2-40B4-BE49-F238E27FC236}">
-                <a16:creationId xmlns:a16="http://schemas.microsoft.com/office/drawing/2014/main" id="{C963857C-37A3-2A6F-5230-B3DAA1E1C89C}"/>
+                <a16:creationId xmlns:a16="http://schemas.microsoft.com/office/drawing/2014/main" id="{98A79EE8-057B-9F45-406A-BCEA24834930}"/>
               </a:ext>
             </a:extLst>
           </p:cNvPr>
@@ -7078,8 +5729,8 @@
         </p:nvSpPr>
         <p:spPr bwMode="auto">
           <a:xfrm>
-            <a:off x="609599" y="1175657"/>
-            <a:ext cx="10972800" cy="594360"/>
+            <a:off x="609600" y="1175657"/>
+            <a:ext cx="10972800" cy="2057400"/>
           </a:xfrm>
           <a:prstGeom prst="rect">
             <a:avLst/>
@@ -7262,53 +5913,180 @@
               </a:spcAft>
             </a:pPr>
             <a:r>
-              <a:rPr lang="zh-TW" altLang="en-US" dirty="0"/>
-              <a:t>只有低精度是通用解；招牌技巧的前提，機器人都沒有</a:t>
-            </a:r>
+              <a:rPr lang="en-US" altLang="zh-TW" sz="2400" dirty="0"/>
+              <a:t>Approach</a:t>
+            </a:r>
+          </a:p>
+          <a:p>
+            <a:pPr lvl="1">
+              <a:spcAft>
+                <a:spcPts val="0"/>
+              </a:spcAft>
+            </a:pPr>
+            <a:r>
+              <a:rPr lang="en-US" altLang="zh-TW" sz="2000" dirty="0"/>
+              <a:t>Parameters read from 12 open-source repos; FLOPs counted on official code</a:t>
+            </a:r>
+          </a:p>
+          <a:p>
+            <a:pPr lvl="1">
+              <a:spcAft>
+                <a:spcPts val="0"/>
+              </a:spcAft>
+            </a:pPr>
+            <a:r>
+              <a:rPr lang="en-US" altLang="zh-TW" sz="2000" dirty="0"/>
+              <a:t>Roofline analysis on edge (Jetson Thor-class) and datacenter (H100) targets</a:t>
+            </a:r>
+          </a:p>
+          <a:p>
+            <a:pPr lvl="1">
+              <a:spcAft>
+                <a:spcPts val="0"/>
+              </a:spcAft>
+            </a:pPr>
+            <a:r>
+              <a:rPr lang="en-US" altLang="zh-TW" sz="2000" dirty="0"/>
+              <a:t>Cycle-level systolic-array simulation calibrated with SCALE-Sim</a:t>
+            </a:r>
+          </a:p>
+          <a:p>
+            <a:pPr lvl="1">
+              <a:spcAft>
+                <a:spcPts val="0"/>
+              </a:spcAft>
+            </a:pPr>
+            <a:r>
+              <a:rPr lang="en-US" altLang="zh-TW" sz="2000" dirty="0"/>
+              <a:t>Cross-review among three AI research agents (Claude, GPT, Antigravity)</a:t>
+            </a:r>
+          </a:p>
+        </p:txBody>
+      </p:sp>
+      <p:sp>
+        <p:nvSpPr>
+          <p:cNvPr id="3" name="副標題 2">
+            <a:extLst>
+              <a:ext uri="{FF2B5EF4-FFF2-40B4-BE49-F238E27FC236}">
+                <a16:creationId xmlns:a16="http://schemas.microsoft.com/office/drawing/2014/main" id="{0D642BDC-5B19-506B-CC3D-CAF272E3FB6A}"/>
+              </a:ext>
+            </a:extLst>
+          </p:cNvPr>
+          <p:cNvSpPr>
+            <a:spLocks noGrp="1"/>
+          </p:cNvSpPr>
+          <p:nvPr>
+            <p:ph type="title"/>
+          </p:nvPr>
+        </p:nvSpPr>
+        <p:spPr>
+          <a:xfrm>
+            <a:off x="609600" y="317155"/>
+            <a:ext cx="10972800" cy="582594"/>
+          </a:xfrm>
+        </p:spPr>
+        <p:txBody>
+          <a:bodyPr wrap="square" anchor="ctr">
+            <a:normAutofit fontScale="90000"/>
+          </a:bodyPr>
+          <a:lstStyle/>
+          <a:p>
+            <a:r>
+              <a:rPr lang="en-US" altLang="zh-TW" dirty="0"/>
+              <a:t>Methodology Overview</a:t>
+            </a:r>
+            <a:endParaRPr lang="en-US" altLang="zh-TW" dirty="0">
+              <a:latin typeface="+mn-ea"/>
+              <a:cs typeface="Times New Roman" panose="02020603050405020304" pitchFamily="18" charset="0"/>
+            </a:endParaRPr>
+          </a:p>
+        </p:txBody>
+      </p:sp>
+      <p:sp>
+        <p:nvSpPr>
+          <p:cNvPr id="2" name="投影片編號版面配置區 1">
+            <a:extLst>
+              <a:ext uri="{FF2B5EF4-FFF2-40B4-BE49-F238E27FC236}">
+                <a16:creationId xmlns:a16="http://schemas.microsoft.com/office/drawing/2014/main" id="{9B73AECC-E727-FB48-3345-1117D9DF8296}"/>
+              </a:ext>
+            </a:extLst>
+          </p:cNvPr>
+          <p:cNvSpPr>
+            <a:spLocks noGrp="1"/>
+          </p:cNvSpPr>
+          <p:nvPr>
+            <p:ph type="sldNum" sz="quarter" idx="12"/>
+          </p:nvPr>
+        </p:nvSpPr>
+        <p:spPr/>
+        <p:txBody>
+          <a:bodyPr/>
+          <a:lstStyle/>
+          <a:p>
+            <a:fld id="{E61F77C1-B770-47FB-877F-E631DD26508E}" type="slidenum">
+              <a:rPr lang="zh-TW" altLang="en-US" smtClean="0"/>
+              <a:t>2</a:t>
+            </a:fld>
+            <a:endParaRPr lang="zh-TW" altLang="en-US" dirty="0"/>
           </a:p>
         </p:txBody>
       </p:sp>
       <p:graphicFrame>
         <p:nvGraphicFramePr>
-          <p:cNvPr id="30" name="表格 30"/>
+          <p:cNvPr id="40" name="Table 40"/>
           <p:cNvGraphicFramePr>
             <a:graphicFrameLocks noGrp="1"/>
           </p:cNvGraphicFramePr>
           <p:nvPr/>
         </p:nvGraphicFramePr>
         <p:xfrm>
-          <a:off x="609600" y="1874520"/>
-          <a:ext cx="10972800" cy="3200400"/>
+          <a:off x="1066800" y="3246120"/>
+          <a:ext cx="10058400" cy="2176272"/>
         </p:xfrm>
         <a:graphic>
           <a:graphicData uri="http://schemas.openxmlformats.org/drawingml/2006/table">
             <a:tbl>
-              <a:tblPr firstRow="1" bandRow="1"/>
+              <a:tblPr firstRow="1"/>
               <a:tblGrid>
-                <a:gridCol w="3291840"/>
-                <a:gridCol w="1737360"/>
-                <a:gridCol w="5943600"/>
+                <a:gridCol w="2103120"/>
+                <a:gridCol w="3108960"/>
+                <a:gridCol w="4846320"/>
               </a:tblGrid>
-              <a:tr h="457200">
+              <a:tr h="310896">
                 <a:tc>
                   <a:txBody>
                     <a:bodyPr/>
                     <a:lstStyle/>
                     <a:p>
+                      <a:pPr algn="l"/>
                       <a:r>
-                        <a:rPr lang="zh-TW" altLang="en-US" dirty="0" b="1" sz="1800">
+                        <a:rPr lang="en-US" altLang="zh-TW" sz="1400" b="1" dirty="0">
                           <a:solidFill>
-                            <a:schemeClr val="bg1"/>
+                            <a:srgbClr val="000000"/>
                           </a:solidFill>
                         </a:rPr>
-                        <a:t>技巧</a:t>
+                        <a:t>Family</a:t>
                       </a:r>
                     </a:p>
                   </a:txBody>
-                  <a:tcPr marL="91440" marR="91440" marT="64008" marB="64008" anchor="ctr">
-                    <a:solidFill>
-                      <a:schemeClr val="accent1"/>
-                    </a:solidFill>
+                  <a:tcPr marL="68580" marR="68580" marT="27432" marB="27432" anchor="ctr">
+                    <a:lnL w="0">
+                      <a:noFill/>
+                    </a:lnL>
+                    <a:lnR w="0">
+                      <a:noFill/>
+                    </a:lnR>
+                    <a:lnT w="19050">
+                      <a:solidFill>
+                        <a:srgbClr val="000000"/>
+                      </a:solidFill>
+                    </a:lnT>
+                    <a:lnB w="9525">
+                      <a:solidFill>
+                        <a:srgbClr val="000000"/>
+                      </a:solidFill>
+                    </a:lnB>
+                    <a:noFill/>
                   </a:tcPr>
                 </a:tc>
                 <a:tc>
@@ -7316,20 +6094,35 @@
                     <a:bodyPr/>
                     <a:lstStyle/>
                     <a:p>
+                      <a:pPr algn="l"/>
                       <a:r>
-                        <a:rPr lang="zh-TW" altLang="en-US" dirty="0" b="1" sz="1800">
+                        <a:rPr lang="en-US" altLang="zh-TW" sz="1400" b="1" dirty="0">
                           <a:solidFill>
-                            <a:schemeClr val="bg1"/>
+                            <a:srgbClr val="000000"/>
                           </a:solidFill>
                         </a:rPr>
-                        <a:t>對世界模型</a:t>
+                        <a:t>Models</a:t>
                       </a:r>
                     </a:p>
                   </a:txBody>
-                  <a:tcPr marL="91440" marR="91440" marT="64008" marB="64008" anchor="ctr">
-                    <a:solidFill>
-                      <a:schemeClr val="accent1"/>
-                    </a:solidFill>
+                  <a:tcPr marL="68580" marR="68580" marT="27432" marB="27432" anchor="ctr">
+                    <a:lnL w="0">
+                      <a:noFill/>
+                    </a:lnL>
+                    <a:lnR w="0">
+                      <a:noFill/>
+                    </a:lnR>
+                    <a:lnT w="19050">
+                      <a:solidFill>
+                        <a:srgbClr val="000000"/>
+                      </a:solidFill>
+                    </a:lnT>
+                    <a:lnB w="9525">
+                      <a:solidFill>
+                        <a:srgbClr val="000000"/>
+                      </a:solidFill>
+                    </a:lnB>
+                    <a:noFill/>
                   </a:tcPr>
                 </a:tc>
                 <a:tc>
@@ -7337,42 +6130,69 @@
                     <a:bodyPr/>
                     <a:lstStyle/>
                     <a:p>
+                      <a:pPr algn="l"/>
                       <a:r>
-                        <a:rPr lang="zh-TW" altLang="en-US" dirty="0" b="1" sz="1800">
+                        <a:rPr lang="en-US" altLang="zh-TW" sz="1400" b="1" dirty="0">
                           <a:solidFill>
-                            <a:schemeClr val="bg1"/>
+                            <a:srgbClr val="000000"/>
                           </a:solidFill>
                         </a:rPr>
-                        <a:t>原因</a:t>
+                        <a:t>Inference pattern</a:t>
                       </a:r>
                     </a:p>
                   </a:txBody>
-                  <a:tcPr marL="91440" marR="91440" marT="64008" marB="64008" anchor="ctr">
-                    <a:solidFill>
-                      <a:schemeClr val="accent1"/>
-                    </a:solidFill>
+                  <a:tcPr marL="68580" marR="68580" marT="27432" marB="27432" anchor="ctr">
+                    <a:lnL w="0">
+                      <a:noFill/>
+                    </a:lnL>
+                    <a:lnR w="0">
+                      <a:noFill/>
+                    </a:lnR>
+                    <a:lnT w="19050">
+                      <a:solidFill>
+                        <a:srgbClr val="000000"/>
+                      </a:solidFill>
+                    </a:lnT>
+                    <a:lnB w="9525">
+                      <a:solidFill>
+                        <a:srgbClr val="000000"/>
+                      </a:solidFill>
+                    </a:lnB>
+                    <a:noFill/>
                   </a:tcPr>
                 </a:tc>
               </a:tr>
-              <a:tr h="457200">
+              <a:tr h="310896">
                 <a:tc>
                   <a:txBody>
                     <a:bodyPr/>
                     <a:lstStyle/>
                     <a:p>
+                      <a:pPr algn="l"/>
                       <a:r>
-                        <a:rPr lang="zh-TW" altLang="en-US" dirty="0" sz="1800"/>
-                        <a:t>低精度權重</a:t>
+                        <a:rPr lang="en-US" altLang="zh-TW" sz="1400" dirty="0">
+                          <a:solidFill>
+                            <a:srgbClr val="000000"/>
+                          </a:solidFill>
+                        </a:rPr>
+                        <a:t>Flow-matching VLA</a:t>
                       </a:r>
                     </a:p>
                   </a:txBody>
-                  <a:tcPr marL="91440" marR="91440" marT="64008" marB="64008" anchor="ctr">
-                    <a:solidFill>
-                      <a:schemeClr val="accent1">
-                        <a:lumMod val="20000"/>
-                        <a:lumOff val="80000"/>
-                      </a:schemeClr>
-                    </a:solidFill>
+                  <a:tcPr marL="68580" marR="68580" marT="27432" marB="27432" anchor="ctr">
+                    <a:lnL w="0">
+                      <a:noFill/>
+                    </a:lnL>
+                    <a:lnR w="0">
+                      <a:noFill/>
+                    </a:lnR>
+                    <a:lnT w="0">
+                      <a:noFill/>
+                    </a:lnT>
+                    <a:lnB w="0">
+                      <a:noFill/>
+                    </a:lnB>
+                    <a:noFill/>
                   </a:tcPr>
                 </a:tc>
                 <a:tc>
@@ -7380,23 +6200,31 @@
                     <a:bodyPr/>
                     <a:lstStyle/>
                     <a:p>
+                      <a:pPr algn="l"/>
                       <a:r>
-                        <a:rPr lang="zh-TW" altLang="en-US" dirty="0" b="1" sz="1800">
+                        <a:rPr lang="en-US" altLang="zh-TW" sz="1400" dirty="0">
                           <a:solidFill>
-                            <a:srgbClr val="1F6F4A"/>
+                            <a:srgbClr val="000000"/>
                           </a:solidFill>
                         </a:rPr>
-                        <a:t>有效</a:t>
+                        <a:t>π0, π0.5, SmolVLA, GR00T N1.7</a:t>
                       </a:r>
                     </a:p>
                   </a:txBody>
-                  <a:tcPr marL="91440" marR="91440" marT="64008" marB="64008" anchor="ctr">
-                    <a:solidFill>
-                      <a:schemeClr val="accent1">
-                        <a:lumMod val="20000"/>
-                        <a:lumOff val="80000"/>
-                      </a:schemeClr>
-                    </a:solidFill>
+                  <a:tcPr marL="68580" marR="68580" marT="27432" marB="27432" anchor="ctr">
+                    <a:lnL w="0">
+                      <a:noFill/>
+                    </a:lnL>
+                    <a:lnR w="0">
+                      <a:noFill/>
+                    </a:lnR>
+                    <a:lnT w="0">
+                      <a:noFill/>
+                    </a:lnT>
+                    <a:lnB w="0">
+                      <a:noFill/>
+                    </a:lnB>
+                    <a:noFill/>
                   </a:tcPr>
                 </a:tc>
                 <a:tc>
@@ -7404,38 +6232,65 @@
                     <a:bodyPr/>
                     <a:lstStyle/>
                     <a:p>
+                      <a:pPr algn="l"/>
                       <a:r>
-                        <a:rPr lang="zh-TW" altLang="en-US" dirty="0" sz="1800"/>
-                        <a:t>所有類別都受頻寬或算力限制</a:t>
+                        <a:rPr lang="en-US" altLang="zh-TW" sz="1400" dirty="0">
+                          <a:solidFill>
+                            <a:srgbClr val="000000"/>
+                          </a:solidFill>
+                        </a:rPr>
+                        <a:t>VLM prefix once + 4–10-step action-expert loop</a:t>
                       </a:r>
                     </a:p>
                   </a:txBody>
-                  <a:tcPr marL="91440" marR="91440" marT="64008" marB="64008" anchor="ctr">
-                    <a:solidFill>
-                      <a:schemeClr val="accent1">
-                        <a:lumMod val="20000"/>
-                        <a:lumOff val="80000"/>
-                      </a:schemeClr>
-                    </a:solidFill>
+                  <a:tcPr marL="68580" marR="68580" marT="27432" marB="27432" anchor="ctr">
+                    <a:lnL w="0">
+                      <a:noFill/>
+                    </a:lnL>
+                    <a:lnR w="0">
+                      <a:noFill/>
+                    </a:lnR>
+                    <a:lnT w="0">
+                      <a:noFill/>
+                    </a:lnT>
+                    <a:lnB w="0">
+                      <a:noFill/>
+                    </a:lnB>
+                    <a:noFill/>
                   </a:tcPr>
                 </a:tc>
               </a:tr>
-              <a:tr h="457200">
+              <a:tr h="310896">
                 <a:tc>
                   <a:txBody>
                     <a:bodyPr/>
                     <a:lstStyle/>
                     <a:p>
+                      <a:pPr algn="l"/>
                       <a:r>
-                        <a:rPr lang="zh-TW" altLang="en-US" dirty="0" sz="1800"/>
-                        <a:t>減少去噪步數、步間重用</a:t>
+                        <a:rPr lang="en-US" altLang="zh-TW" sz="1400" dirty="0">
+                          <a:solidFill>
+                            <a:srgbClr val="000000"/>
+                          </a:solidFill>
+                        </a:rPr>
+                        <a:t>Autoregressive VLA</a:t>
                       </a:r>
                     </a:p>
                   </a:txBody>
-                  <a:tcPr marL="91440" marR="91440" marT="64008" marB="64008" anchor="ctr">
-                    <a:solidFill>
-                      <a:schemeClr val="bg1"/>
-                    </a:solidFill>
+                  <a:tcPr marL="68580" marR="68580" marT="27432" marB="27432" anchor="ctr">
+                    <a:lnL w="0">
+                      <a:noFill/>
+                    </a:lnL>
+                    <a:lnR w="0">
+                      <a:noFill/>
+                    </a:lnR>
+                    <a:lnT w="0">
+                      <a:noFill/>
+                    </a:lnT>
+                    <a:lnB w="0">
+                      <a:noFill/>
+                    </a:lnB>
+                    <a:noFill/>
                   </a:tcPr>
                 </a:tc>
                 <a:tc>
@@ -7443,20 +6298,31 @@
                     <a:bodyPr/>
                     <a:lstStyle/>
                     <a:p>
+                      <a:pPr algn="l"/>
                       <a:r>
-                        <a:rPr lang="zh-TW" altLang="en-US" dirty="0" b="1" sz="1800">
+                        <a:rPr lang="en-US" altLang="zh-TW" sz="1400" dirty="0">
                           <a:solidFill>
-                            <a:srgbClr val="1F6F4A"/>
+                            <a:srgbClr val="000000"/>
                           </a:solidFill>
                         </a:rPr>
-                        <a:t>有效</a:t>
+                        <a:t>OpenVLA, π0-FAST</a:t>
                       </a:r>
                     </a:p>
                   </a:txBody>
-                  <a:tcPr marL="91440" marR="91440" marT="64008" marB="64008" anchor="ctr">
-                    <a:solidFill>
-                      <a:schemeClr val="bg1"/>
-                    </a:solidFill>
+                  <a:tcPr marL="68580" marR="68580" marT="27432" marB="27432" anchor="ctr">
+                    <a:lnL w="0">
+                      <a:noFill/>
+                    </a:lnL>
+                    <a:lnR w="0">
+                      <a:noFill/>
+                    </a:lnR>
+                    <a:lnT w="0">
+                      <a:noFill/>
+                    </a:lnT>
+                    <a:lnB w="0">
+                      <a:noFill/>
+                    </a:lnB>
+                    <a:noFill/>
                   </a:tcPr>
                 </a:tc>
                 <a:tc>
@@ -7464,38 +6330,65 @@
                     <a:bodyPr/>
                     <a:lstStyle/>
                     <a:p>
+                      <a:pPr algn="l"/>
                       <a:r>
-                        <a:rPr lang="zh-TW" altLang="en-US" dirty="0" sz="1800"/>
-                        <a:t>擴散模型特有的槓桿</a:t>
+                        <a:rPr lang="en-US" altLang="zh-TW" sz="1400" dirty="0">
+                          <a:solidFill>
+                            <a:srgbClr val="000000"/>
+                          </a:solidFill>
+                        </a:rPr>
+                        <a:t>VLM prefix + short LLM-style decode</a:t>
                       </a:r>
                     </a:p>
                   </a:txBody>
-                  <a:tcPr marL="91440" marR="91440" marT="64008" marB="64008" anchor="ctr">
-                    <a:solidFill>
-                      <a:schemeClr val="bg1"/>
-                    </a:solidFill>
+                  <a:tcPr marL="68580" marR="68580" marT="27432" marB="27432" anchor="ctr">
+                    <a:lnL w="0">
+                      <a:noFill/>
+                    </a:lnL>
+                    <a:lnR w="0">
+                      <a:noFill/>
+                    </a:lnR>
+                    <a:lnT w="0">
+                      <a:noFill/>
+                    </a:lnT>
+                    <a:lnB w="0">
+                      <a:noFill/>
+                    </a:lnB>
+                    <a:noFill/>
                   </a:tcPr>
                 </a:tc>
               </a:tr>
-              <a:tr h="457200">
+              <a:tr h="310896">
                 <a:tc>
                   <a:txBody>
                     <a:bodyPr/>
                     <a:lstStyle/>
                     <a:p>
+                      <a:pPr algn="l"/>
                       <a:r>
-                        <a:rPr lang="zh-TW" altLang="en-US" dirty="0" sz="1800"/>
-                        <a:t>分頁式記憶體管理</a:t>
+                        <a:rPr lang="en-US" altLang="zh-TW" sz="1400" dirty="0">
+                          <a:solidFill>
+                            <a:srgbClr val="000000"/>
+                          </a:solidFill>
+                        </a:rPr>
+                        <a:t>Video world model</a:t>
                       </a:r>
                     </a:p>
                   </a:txBody>
-                  <a:tcPr marL="91440" marR="91440" marT="64008" marB="64008" anchor="ctr">
-                    <a:solidFill>
-                      <a:schemeClr val="accent1">
-                        <a:lumMod val="20000"/>
-                        <a:lumOff val="80000"/>
-                      </a:schemeClr>
-                    </a:solidFill>
+                  <a:tcPr marL="68580" marR="68580" marT="27432" marB="27432" anchor="ctr">
+                    <a:lnL w="0">
+                      <a:noFill/>
+                    </a:lnL>
+                    <a:lnR w="0">
+                      <a:noFill/>
+                    </a:lnR>
+                    <a:lnT w="0">
+                      <a:noFill/>
+                    </a:lnT>
+                    <a:lnB w="0">
+                      <a:noFill/>
+                    </a:lnB>
+                    <a:noFill/>
                   </a:tcPr>
                 </a:tc>
                 <a:tc>
@@ -7503,23 +6396,31 @@
                     <a:bodyPr/>
                     <a:lstStyle/>
                     <a:p>
+                      <a:pPr algn="l"/>
                       <a:r>
-                        <a:rPr lang="zh-TW" altLang="en-US" dirty="0" b="1" sz="1800">
+                        <a:rPr lang="en-US" altLang="zh-TW" sz="1400" dirty="0">
                           <a:solidFill>
-                            <a:srgbClr val="B03A2E"/>
+                            <a:srgbClr val="000000"/>
                           </a:solidFill>
                         </a:rPr>
-                        <a:t>無效</a:t>
+                        <a:t>Cosmos-Predict2.5, Matrix-Game 2.0/3.0</a:t>
                       </a:r>
                     </a:p>
                   </a:txBody>
-                  <a:tcPr marL="91440" marR="91440" marT="64008" marB="64008" anchor="ctr">
-                    <a:solidFill>
-                      <a:schemeClr val="accent1">
-                        <a:lumMod val="20000"/>
-                        <a:lumOff val="80000"/>
-                      </a:schemeClr>
-                    </a:solidFill>
+                  <a:tcPr marL="68580" marR="68580" marT="27432" marB="27432" anchor="ctr">
+                    <a:lnL w="0">
+                      <a:noFill/>
+                    </a:lnL>
+                    <a:lnR w="0">
+                      <a:noFill/>
+                    </a:lnR>
+                    <a:lnT w="0">
+                      <a:noFill/>
+                    </a:lnT>
+                    <a:lnB w="0">
+                      <a:noFill/>
+                    </a:lnB>
+                    <a:noFill/>
                   </a:tcPr>
                 </a:tc>
                 <a:tc>
@@ -7527,38 +6428,65 @@
                     <a:bodyPr/>
                     <a:lstStyle/>
                     <a:p>
+                      <a:pPr algn="l"/>
                       <a:r>
-                        <a:rPr lang="zh-TW" altLang="en-US" dirty="0" sz="1800"/>
-                        <a:t>狀態大小固定，不會長大</a:t>
+                        <a:rPr lang="en-US" altLang="zh-TW" sz="1400" dirty="0">
+                          <a:solidFill>
+                            <a:srgbClr val="000000"/>
+                          </a:solidFill>
+                        </a:rPr>
+                        <a:t>Thousands of tokens denoised per step</a:t>
                       </a:r>
                     </a:p>
                   </a:txBody>
-                  <a:tcPr marL="91440" marR="91440" marT="64008" marB="64008" anchor="ctr">
-                    <a:solidFill>
-                      <a:schemeClr val="accent1">
-                        <a:lumMod val="20000"/>
-                        <a:lumOff val="80000"/>
-                      </a:schemeClr>
-                    </a:solidFill>
+                  <a:tcPr marL="68580" marR="68580" marT="27432" marB="27432" anchor="ctr">
+                    <a:lnL w="0">
+                      <a:noFill/>
+                    </a:lnL>
+                    <a:lnR w="0">
+                      <a:noFill/>
+                    </a:lnR>
+                    <a:lnT w="0">
+                      <a:noFill/>
+                    </a:lnT>
+                    <a:lnB w="0">
+                      <a:noFill/>
+                    </a:lnB>
+                    <a:noFill/>
                   </a:tcPr>
                 </a:tc>
               </a:tr>
-              <a:tr h="457200">
+              <a:tr h="310896">
                 <a:tc>
                   <a:txBody>
                     <a:bodyPr/>
                     <a:lstStyle/>
                     <a:p>
+                      <a:pPr algn="l"/>
                       <a:r>
-                        <a:rPr lang="zh-TW" altLang="en-US" dirty="0" sz="1800"/>
-                        <a:t>跨使用者動態批次</a:t>
+                        <a:rPr lang="en-US" altLang="zh-TW" sz="1400" dirty="0">
+                          <a:solidFill>
+                            <a:srgbClr val="000000"/>
+                          </a:solidFill>
+                        </a:rPr>
+                        <a:t>World-action model</a:t>
                       </a:r>
                     </a:p>
                   </a:txBody>
-                  <a:tcPr marL="91440" marR="91440" marT="64008" marB="64008" anchor="ctr">
-                    <a:solidFill>
-                      <a:schemeClr val="bg1"/>
-                    </a:solidFill>
+                  <a:tcPr marL="68580" marR="68580" marT="27432" marB="27432" anchor="ctr">
+                    <a:lnL w="0">
+                      <a:noFill/>
+                    </a:lnL>
+                    <a:lnR w="0">
+                      <a:noFill/>
+                    </a:lnR>
+                    <a:lnT w="0">
+                      <a:noFill/>
+                    </a:lnT>
+                    <a:lnB w="0">
+                      <a:noFill/>
+                    </a:lnB>
+                    <a:noFill/>
                   </a:tcPr>
                 </a:tc>
                 <a:tc>
@@ -7566,20 +6494,31 @@
                     <a:bodyPr/>
                     <a:lstStyle/>
                     <a:p>
+                      <a:pPr algn="l"/>
                       <a:r>
-                        <a:rPr lang="zh-TW" altLang="en-US" dirty="0" b="1" sz="1800">
+                        <a:rPr lang="en-US" altLang="zh-TW" sz="1400" dirty="0">
                           <a:solidFill>
-                            <a:srgbClr val="B03A2E"/>
+                            <a:srgbClr val="000000"/>
                           </a:solidFill>
                         </a:rPr>
-                        <a:t>無效</a:t>
+                        <a:t>DreamZero, Flex-π</a:t>
                       </a:r>
                     </a:p>
                   </a:txBody>
-                  <a:tcPr marL="91440" marR="91440" marT="64008" marB="64008" anchor="ctr">
-                    <a:solidFill>
-                      <a:schemeClr val="bg1"/>
-                    </a:solidFill>
+                  <a:tcPr marL="68580" marR="68580" marT="27432" marB="27432" anchor="ctr">
+                    <a:lnL w="0">
+                      <a:noFill/>
+                    </a:lnL>
+                    <a:lnR w="0">
+                      <a:noFill/>
+                    </a:lnR>
+                    <a:lnT w="0">
+                      <a:noFill/>
+                    </a:lnT>
+                    <a:lnB w="0">
+                      <a:noFill/>
+                    </a:lnB>
+                    <a:noFill/>
                   </a:tcPr>
                 </a:tc>
                 <a:tc>
@@ -7587,38 +6526,65 @@
                     <a:bodyPr/>
                     <a:lstStyle/>
                     <a:p>
+                      <a:pPr algn="l"/>
                       <a:r>
-                        <a:rPr lang="zh-TW" altLang="en-US" dirty="0" sz="1800"/>
-                        <a:t>一台機器人一次只有一個請求</a:t>
+                        <a:rPr lang="en-US" altLang="zh-TW" sz="1400" dirty="0">
+                          <a:solidFill>
+                            <a:srgbClr val="000000"/>
+                          </a:solidFill>
+                        </a:rPr>
+                        <a:t>Video and action tokens denoised jointly</a:t>
                       </a:r>
                     </a:p>
                   </a:txBody>
-                  <a:tcPr marL="91440" marR="91440" marT="64008" marB="64008" anchor="ctr">
-                    <a:solidFill>
-                      <a:schemeClr val="bg1"/>
-                    </a:solidFill>
+                  <a:tcPr marL="68580" marR="68580" marT="27432" marB="27432" anchor="ctr">
+                    <a:lnL w="0">
+                      <a:noFill/>
+                    </a:lnL>
+                    <a:lnR w="0">
+                      <a:noFill/>
+                    </a:lnR>
+                    <a:lnT w="0">
+                      <a:noFill/>
+                    </a:lnT>
+                    <a:lnB w="0">
+                      <a:noFill/>
+                    </a:lnB>
+                    <a:noFill/>
                   </a:tcPr>
                 </a:tc>
               </a:tr>
-              <a:tr h="457200">
+              <a:tr h="310896">
                 <a:tc>
                   <a:txBody>
                     <a:bodyPr/>
                     <a:lstStyle/>
                     <a:p>
+                      <a:pPr algn="l"/>
                       <a:r>
-                        <a:rPr lang="zh-TW" altLang="en-US" dirty="0" sz="1800"/>
-                        <a:t>投機解碼</a:t>
+                        <a:rPr lang="en-US" altLang="zh-TW" sz="1400" dirty="0">
+                          <a:solidFill>
+                            <a:srgbClr val="000000"/>
+                          </a:solidFill>
+                        </a:rPr>
+                        <a:t>Latent-space MPC</a:t>
                       </a:r>
                     </a:p>
                   </a:txBody>
-                  <a:tcPr marL="91440" marR="91440" marT="64008" marB="64008" anchor="ctr">
-                    <a:solidFill>
-                      <a:schemeClr val="accent1">
-                        <a:lumMod val="20000"/>
-                        <a:lumOff val="80000"/>
-                      </a:schemeClr>
-                    </a:solidFill>
+                  <a:tcPr marL="68580" marR="68580" marT="27432" marB="27432" anchor="ctr">
+                    <a:lnL w="0">
+                      <a:noFill/>
+                    </a:lnL>
+                    <a:lnR w="0">
+                      <a:noFill/>
+                    </a:lnR>
+                    <a:lnT w="0">
+                      <a:noFill/>
+                    </a:lnT>
+                    <a:lnB w="0">
+                      <a:noFill/>
+                    </a:lnB>
+                    <a:noFill/>
                   </a:tcPr>
                 </a:tc>
                 <a:tc>
@@ -7626,23 +6592,31 @@
                     <a:bodyPr/>
                     <a:lstStyle/>
                     <a:p>
+                      <a:pPr algn="l"/>
                       <a:r>
-                        <a:rPr lang="zh-TW" altLang="en-US" dirty="0" b="1" sz="1800">
+                        <a:rPr lang="en-US" altLang="zh-TW" sz="1400" dirty="0">
                           <a:solidFill>
-                            <a:srgbClr val="B03A2E"/>
+                            <a:srgbClr val="000000"/>
                           </a:solidFill>
                         </a:rPr>
-                        <a:t>無效</a:t>
+                        <a:t>V-JEPA 2-AC, TD-MPC2</a:t>
                       </a:r>
                     </a:p>
                   </a:txBody>
-                  <a:tcPr marL="91440" marR="91440" marT="64008" marB="64008" anchor="ctr">
-                    <a:solidFill>
-                      <a:schemeClr val="accent1">
-                        <a:lumMod val="20000"/>
-                        <a:lumOff val="80000"/>
-                      </a:schemeClr>
-                    </a:solidFill>
+                  <a:tcPr marL="68580" marR="68580" marT="27432" marB="27432" anchor="ctr">
+                    <a:lnL w="0">
+                      <a:noFill/>
+                    </a:lnL>
+                    <a:lnR w="0">
+                      <a:noFill/>
+                    </a:lnR>
+                    <a:lnT w="0">
+                      <a:noFill/>
+                    </a:lnT>
+                    <a:lnB w="0">
+                      <a:noFill/>
+                    </a:lnB>
+                    <a:noFill/>
                   </a:tcPr>
                 </a:tc>
                 <a:tc>
@@ -7650,38 +6624,67 @@
                     <a:bodyPr/>
                     <a:lstStyle/>
                     <a:p>
+                      <a:pPr algn="l"/>
                       <a:r>
-                        <a:rPr lang="zh-TW" altLang="en-US" dirty="0" sz="1800"/>
-                        <a:t>只有少數幾步的連續積分</a:t>
+                        <a:rPr lang="en-US" altLang="zh-TW" sz="1400" dirty="0">
+                          <a:solidFill>
+                            <a:srgbClr val="000000"/>
+                          </a:solidFill>
+                        </a:rPr>
+                        <a:t>Encode once, roll out hundreds of candidates</a:t>
                       </a:r>
                     </a:p>
                   </a:txBody>
-                  <a:tcPr marL="91440" marR="91440" marT="64008" marB="64008" anchor="ctr">
-                    <a:solidFill>
-                      <a:schemeClr val="accent1">
-                        <a:lumMod val="20000"/>
-                        <a:lumOff val="80000"/>
-                      </a:schemeClr>
-                    </a:solidFill>
+                  <a:tcPr marL="68580" marR="68580" marT="27432" marB="27432" anchor="ctr">
+                    <a:lnL w="0">
+                      <a:noFill/>
+                    </a:lnL>
+                    <a:lnR w="0">
+                      <a:noFill/>
+                    </a:lnR>
+                    <a:lnT w="0">
+                      <a:noFill/>
+                    </a:lnT>
+                    <a:lnB w="0">
+                      <a:noFill/>
+                    </a:lnB>
+                    <a:noFill/>
                   </a:tcPr>
                 </a:tc>
               </a:tr>
-              <a:tr h="457200">
+              <a:tr h="310896">
                 <a:tc>
                   <a:txBody>
                     <a:bodyPr/>
                     <a:lstStyle/>
                     <a:p>
+                      <a:pPr algn="l"/>
                       <a:r>
-                        <a:rPr lang="zh-TW" altLang="en-US" dirty="0" sz="1800"/>
-                        <a:t>專算向量的引擎</a:t>
+                        <a:rPr lang="en-US" altLang="zh-TW" sz="1400" dirty="0">
+                          <a:solidFill>
+                            <a:srgbClr val="000000"/>
+                          </a:solidFill>
+                        </a:rPr>
+                        <a:t>Baseline</a:t>
                       </a:r>
                     </a:p>
                   </a:txBody>
-                  <a:tcPr marL="91440" marR="91440" marT="64008" marB="64008" anchor="ctr">
-                    <a:solidFill>
-                      <a:schemeClr val="bg1"/>
-                    </a:solidFill>
+                  <a:tcPr marL="68580" marR="68580" marT="27432" marB="27432" anchor="ctr">
+                    <a:lnL w="0">
+                      <a:noFill/>
+                    </a:lnL>
+                    <a:lnR w="0">
+                      <a:noFill/>
+                    </a:lnR>
+                    <a:lnT w="0">
+                      <a:noFill/>
+                    </a:lnT>
+                    <a:lnB w="19050">
+                      <a:solidFill>
+                        <a:srgbClr val="000000"/>
+                      </a:solidFill>
+                    </a:lnB>
+                    <a:noFill/>
                   </a:tcPr>
                 </a:tc>
                 <a:tc>
@@ -7689,20 +6692,33 @@
                     <a:bodyPr/>
                     <a:lstStyle/>
                     <a:p>
+                      <a:pPr algn="l"/>
                       <a:r>
-                        <a:rPr lang="zh-TW" altLang="en-US" dirty="0" b="1" sz="1800">
+                        <a:rPr lang="en-US" altLang="zh-TW" sz="1400" dirty="0">
                           <a:solidFill>
-                            <a:srgbClr val="B03A2E"/>
+                            <a:srgbClr val="000000"/>
                           </a:solidFill>
                         </a:rPr>
-                        <a:t>方向錯</a:t>
+                        <a:t>Llama-3.1-8B</a:t>
                       </a:r>
                     </a:p>
                   </a:txBody>
-                  <a:tcPr marL="91440" marR="91440" marT="64008" marB="64008" anchor="ctr">
-                    <a:solidFill>
-                      <a:schemeClr val="bg1"/>
-                    </a:solidFill>
+                  <a:tcPr marL="68580" marR="68580" marT="27432" marB="27432" anchor="ctr">
+                    <a:lnL w="0">
+                      <a:noFill/>
+                    </a:lnL>
+                    <a:lnR w="0">
+                      <a:noFill/>
+                    </a:lnR>
+                    <a:lnT w="0">
+                      <a:noFill/>
+                    </a:lnT>
+                    <a:lnB w="19050">
+                      <a:solidFill>
+                        <a:srgbClr val="000000"/>
+                      </a:solidFill>
+                    </a:lnB>
+                    <a:noFill/>
                   </a:tcPr>
                 </a:tc>
                 <a:tc>
@@ -7710,16 +6726,33 @@
                     <a:bodyPr/>
                     <a:lstStyle/>
                     <a:p>
+                      <a:pPr algn="l"/>
                       <a:r>
-                        <a:rPr lang="zh-TW" altLang="en-US" dirty="0" sz="1800"/>
-                        <a:t>主要運算是中等大小的矩陣</a:t>
+                        <a:rPr lang="en-US" altLang="zh-TW" sz="1400" dirty="0">
+                          <a:solidFill>
+                            <a:srgbClr val="000000"/>
+                          </a:solidFill>
+                        </a:rPr>
+                        <a:t>LLM prefill / decode</a:t>
                       </a:r>
                     </a:p>
                   </a:txBody>
-                  <a:tcPr marL="91440" marR="91440" marT="64008" marB="64008" anchor="ctr">
-                    <a:solidFill>
-                      <a:schemeClr val="bg1"/>
-                    </a:solidFill>
+                  <a:tcPr marL="68580" marR="68580" marT="27432" marB="27432" anchor="ctr">
+                    <a:lnL w="0">
+                      <a:noFill/>
+                    </a:lnL>
+                    <a:lnR w="0">
+                      <a:noFill/>
+                    </a:lnR>
+                    <a:lnT w="0">
+                      <a:noFill/>
+                    </a:lnT>
+                    <a:lnB w="19050">
+                      <a:solidFill>
+                        <a:srgbClr val="000000"/>
+                      </a:solidFill>
+                    </a:lnB>
+                    <a:noFill/>
                   </a:tcPr>
                 </a:tc>
               </a:tr>
@@ -7730,7 +6763,7 @@
     </p:spTree>
     <p:extLst>
       <p:ext uri="{BB962C8B-B14F-4D97-AF65-F5344CB8AC3E}">
-        <p14:creationId xmlns:p14="http://schemas.microsoft.com/office/powerpoint/2010/main" val="1325503144"/>
+        <p14:creationId xmlns:p14="http://schemas.microsoft.com/office/powerpoint/2010/main" val="340821465"/>
       </p:ext>
     </p:extLst>
   </p:cSld>
@@ -7780,7 +6813,7 @@
         <p:spPr bwMode="auto">
           <a:xfrm>
             <a:off x="609600" y="1175657"/>
-            <a:ext cx="10972800" cy="4950509"/>
+            <a:ext cx="10972800" cy="1737360"/>
           </a:xfrm>
           <a:prstGeom prst="rect">
             <a:avLst/>
@@ -7963,8 +6996,8 @@
               </a:spcAft>
             </a:pPr>
             <a:r>
-              <a:rPr lang="zh-TW" altLang="en-US" dirty="0" b="1"/>
-              <a:t>單一大陣列（LLM 式）</a:t>
+              <a:rPr lang="en-US" altLang="zh-TW" sz="2400" dirty="0"/>
+              <a:t>Roofline of every inference stage</a:t>
             </a:r>
           </a:p>
           <a:p>
@@ -7974,8 +7007,30 @@
               </a:spcAft>
             </a:pPr>
             <a:r>
-              <a:rPr lang="zh-TW" altLang="en-US" dirty="0"/>
-              <a:t>中等矩陣只填滿一小角，大部分運算單元閒置</a:t>
+              <a:rPr lang="en-US" altLang="zh-TW" sz="2000" dirty="0"/>
+              <a:t>Arithmetic intensity differs by more than 10× between stages of the same model</a:t>
+            </a:r>
+          </a:p>
+          <a:p>
+            <a:pPr lvl="1">
+              <a:spcAft>
+                <a:spcPts val="0"/>
+              </a:spcAft>
+            </a:pPr>
+            <a:r>
+              <a:rPr lang="en-US" altLang="zh-TW" sz="2000" dirty="0"/>
+              <a:t>The same stage can be compute-bound on H100 but memory-bound on an edge SoC</a:t>
+            </a:r>
+          </a:p>
+          <a:p>
+            <a:pPr lvl="1">
+              <a:spcAft>
+                <a:spcPts val="0"/>
+              </a:spcAft>
+            </a:pPr>
+            <a:r>
+              <a:rPr lang="en-US" altLang="zh-TW" sz="2000" dirty="0"/>
+              <a:t>Flow-matching action experts sit near LLM decode; video DiTs sit far to the right</a:t>
             </a:r>
           </a:p>
           <a:p>
@@ -7985,52 +7040,8 @@
               </a:spcAft>
             </a:pPr>
             <a:r>
-              <a:rPr lang="zh-TW" altLang="en-US" dirty="0" b="1"/>
-              <a:t>多個小陣列＋每個矩陣自選資料流</a:t>
-            </a:r>
-          </a:p>
-          <a:p>
-            <a:pPr lvl="1">
-              <a:spcAft>
-                <a:spcPts val="0"/>
-              </a:spcAft>
-            </a:pPr>
-            <a:r>
-              <a:rPr lang="zh-TW" altLang="en-US" dirty="0"/>
-              <a:t>中等矩陣也能填滿，跑大矩陣時不會變差</a:t>
-            </a:r>
-          </a:p>
-          <a:p>
-            <a:pPr>
-              <a:spcAft>
-                <a:spcPts val="0"/>
-              </a:spcAft>
-            </a:pPr>
-            <a:r>
-              <a:rPr lang="zh-TW" altLang="en-US" dirty="0" b="1"/>
-              <a:t>只做其中一項，瓶頸只會換個地方</a:t>
-            </a:r>
-          </a:p>
-          <a:p>
-            <a:pPr lvl="1">
-              <a:spcAft>
-                <a:spcPts val="0"/>
-              </a:spcAft>
-            </a:pPr>
-            <a:r>
-              <a:rPr lang="zh-TW" altLang="en-US" dirty="0"/>
-              <a:t>權重放晶片內、陣列仍太大 → 卡在利用率</a:t>
-            </a:r>
-          </a:p>
-          <a:p>
-            <a:pPr lvl="1">
-              <a:spcAft>
-                <a:spcPts val="0"/>
-              </a:spcAft>
-            </a:pPr>
-            <a:r>
-              <a:rPr lang="zh-TW" altLang="en-US" dirty="0"/>
-              <a:t>陣列變小、權重仍從外部讀 → 卡在頻寬</a:t>
+              <a:rPr lang="en-US" altLang="zh-TW" sz="2400" dirty="0"/>
+              <a:t>Decompose models into stages before choosing an architecture</a:t>
             </a:r>
           </a:p>
         </p:txBody>
@@ -8065,7 +7076,7 @@
           <a:p>
             <a:r>
               <a:rPr lang="en-US" altLang="zh-TW" dirty="0"/>
-              <a:t>小陣列與權重放晶片內，必須一起做</a:t>
+              <a:t>Bottleneck = Stage × Hardware</a:t>
             </a:r>
             <a:endParaRPr lang="en-US" altLang="zh-TW" dirty="0">
               <a:latin typeface="+mn-ea"/>
@@ -8103,6 +7114,30 @@
           </a:p>
         </p:txBody>
       </p:sp>
+      <p:pic>
+        <p:nvPicPr>
+          <p:cNvPr id="40" name="Figure 40" descr="roofline figure"/>
+          <p:cNvPicPr>
+            <a:picLocks noChangeAspect="1"/>
+          </p:cNvPicPr>
+          <p:nvPr/>
+        </p:nvPicPr>
+        <p:blipFill>
+          <a:blip r:embed="rId50"/>
+          <a:stretch>
+            <a:fillRect/>
+          </a:stretch>
+        </p:blipFill>
+        <p:spPr>
+          <a:xfrm>
+            <a:off x="3234813" y="2926080"/>
+            <a:ext cx="5722374" cy="3547872"/>
+          </a:xfrm>
+          <a:prstGeom prst="rect">
+            <a:avLst/>
+          </a:prstGeom>
+        </p:spPr>
+      </p:pic>
     </p:spTree>
     <p:extLst>
       <p:ext uri="{BB962C8B-B14F-4D97-AF65-F5344CB8AC3E}">
@@ -8124,7 +7159,7 @@
         <p:cNvPr id="1" name="">
           <a:extLst>
             <a:ext uri="{FF2B5EF4-FFF2-40B4-BE49-F238E27FC236}">
-              <a16:creationId xmlns:a16="http://schemas.microsoft.com/office/drawing/2014/main" id="{899712D3-450B-8A9B-004C-BA15EF779FC3}"/>
+              <a16:creationId xmlns:a16="http://schemas.microsoft.com/office/drawing/2014/main" id="{D3360C21-ECAB-84A5-87AC-3F78426689AE}"/>
             </a:ext>
           </a:extLst>
         </p:cNvPr>
@@ -8141,73 +7176,10 @@
       </p:grpSpPr>
       <p:sp>
         <p:nvSpPr>
-          <p:cNvPr id="16" name="標題 15">
+          <p:cNvPr id="12" name="內容版面配置區 5">
             <a:extLst>
               <a:ext uri="{FF2B5EF4-FFF2-40B4-BE49-F238E27FC236}">
-                <a16:creationId xmlns:a16="http://schemas.microsoft.com/office/drawing/2014/main" id="{8F81C2D5-EE54-2187-DAF1-8E01970B299D}"/>
-              </a:ext>
-            </a:extLst>
-          </p:cNvPr>
-          <p:cNvSpPr>
-            <a:spLocks noGrp="1"/>
-          </p:cNvSpPr>
-          <p:nvPr>
-            <p:ph type="title"/>
-          </p:nvPr>
-        </p:nvSpPr>
-        <p:spPr>
-          <a:xfrm>
-            <a:off x="609600" y="307296"/>
-            <a:ext cx="10972800" cy="582594"/>
-          </a:xfrm>
-        </p:spPr>
-        <p:txBody>
-          <a:bodyPr/>
-          <a:lstStyle/>
-          <a:p>
-            <a:r>
-              <a:rPr lang="en-US" altLang="zh-TW" sz="3600" dirty="0"/>
-              <a:t>深入案例：Flex-π</a:t>
-            </a:r>
-            <a:endParaRPr lang="zh-TW" altLang="en-US" sz="3600" dirty="0"/>
-          </a:p>
-        </p:txBody>
-      </p:sp>
-      <p:sp>
-        <p:nvSpPr>
-          <p:cNvPr id="2" name="投影片編號版面配置區 1">
-            <a:extLst>
-              <a:ext uri="{FF2B5EF4-FFF2-40B4-BE49-F238E27FC236}">
-                <a16:creationId xmlns:a16="http://schemas.microsoft.com/office/drawing/2014/main" id="{7EB00882-1F9D-F272-09CD-90F6F8458DB3}"/>
-              </a:ext>
-            </a:extLst>
-          </p:cNvPr>
-          <p:cNvSpPr>
-            <a:spLocks noGrp="1"/>
-          </p:cNvSpPr>
-          <p:nvPr>
-            <p:ph type="sldNum" sz="quarter" idx="12"/>
-          </p:nvPr>
-        </p:nvSpPr>
-        <p:spPr/>
-        <p:txBody>
-          <a:bodyPr/>
-          <a:lstStyle/>
-          <a:p>
-            <a:fld id="{E61F77C1-B770-47FB-877F-E631DD26508E}" type="slidenum">
-              <a:rPr lang="zh-TW" altLang="en-US" smtClean="0"/>
-              <a:t>3</a:t>
-            </a:fld>
-            <a:endParaRPr lang="zh-TW" altLang="en-US"/>
-          </a:p>
-        </p:txBody>
-      </p:sp>
-      <p:sp>
-        <p:nvSpPr>
-          <p:cNvPr id="5" name="內容版面配置區 5">
-            <a:extLst>
-              <a:ext uri="{FF2B5EF4-FFF2-40B4-BE49-F238E27FC236}">
-                <a16:creationId xmlns:a16="http://schemas.microsoft.com/office/drawing/2014/main" id="{C963857C-37A3-2A6F-5230-B3DAA1E1C89C}"/>
+                <a16:creationId xmlns:a16="http://schemas.microsoft.com/office/drawing/2014/main" id="{98A79EE8-057B-9F45-406A-BCEA24834930}"/>
               </a:ext>
             </a:extLst>
           </p:cNvPr>
@@ -8218,8 +7190,8 @@
         </p:nvSpPr>
         <p:spPr bwMode="auto">
           <a:xfrm>
-            <a:off x="609599" y="1175657"/>
-            <a:ext cx="10972800" cy="594360"/>
+            <a:off x="609600" y="1175657"/>
+            <a:ext cx="10972800" cy="1737360"/>
           </a:xfrm>
           <a:prstGeom prst="rect">
             <a:avLst/>
@@ -8402,343 +7374,152 @@
               </a:spcAft>
             </a:pPr>
             <a:r>
-              <a:rPr lang="zh-TW" altLang="en-US" dirty="0"/>
-              <a:t>每次推論＝大主幹看一次＋動作網路修正四次</a:t>
+              <a:rPr lang="en-US" altLang="zh-TW" sz="2400" dirty="0"/>
+              <a:t>Flow-matching VLA (π0, GR00T, SmolVLA)</a:t>
+            </a:r>
+          </a:p>
+          <a:p>
+            <a:pPr lvl="1">
+              <a:spcAft>
+                <a:spcPts val="0"/>
+              </a:spcAft>
+            </a:pPr>
+            <a:r>
+              <a:rPr lang="en-US" altLang="zh-TW" sz="2000" dirty="0"/>
+              <a:t>VLM prefix runs once; a small action expert integrates an ODE over 4–10 steps</a:t>
+            </a:r>
+          </a:p>
+          <a:p>
+            <a:pPr lvl="1">
+              <a:spcAft>
+                <a:spcPts val="0"/>
+              </a:spcAft>
+            </a:pPr>
+            <a:r>
+              <a:rPr lang="en-US" altLang="zh-TW" sz="2000" dirty="0"/>
+              <a:t>π0 on Thor: expert is 9% of FLOPs but 56% of latency (M = 51 GEMMs, ~60 FLOP/B)</a:t>
+            </a:r>
+          </a:p>
+          <a:p>
+            <a:pPr lvl="1">
+              <a:spcAft>
+                <a:spcPts val="0"/>
+              </a:spcAft>
+            </a:pPr>
+            <a:r>
+              <a:rPr lang="en-US" altLang="zh-TW" sz="2000" dirty="0"/>
+              <a:t>Expert weights are only 97–415 MB in FP8 — small enough to consider on-chip</a:t>
+            </a:r>
+          </a:p>
+          <a:p>
+            <a:pPr>
+              <a:spcAft>
+                <a:spcPts val="0"/>
+              </a:spcAft>
+            </a:pPr>
+            <a:r>
+              <a:rPr lang="en-US" altLang="zh-TW" sz="2400" dirty="0"/>
+              <a:t>Not GEMV: each step is a 40–51-row GEMM, unlike LLM decode</a:t>
             </a:r>
           </a:p>
         </p:txBody>
       </p:sp>
       <p:sp>
         <p:nvSpPr>
-          <p:cNvPr id="40" name="流程 1"/>
-          <p:cNvSpPr/>
-          <p:nvPr/>
+          <p:cNvPr id="3" name="副標題 2">
+            <a:extLst>
+              <a:ext uri="{FF2B5EF4-FFF2-40B4-BE49-F238E27FC236}">
+                <a16:creationId xmlns:a16="http://schemas.microsoft.com/office/drawing/2014/main" id="{0D642BDC-5B19-506B-CC3D-CAF272E3FB6A}"/>
+              </a:ext>
+            </a:extLst>
+          </p:cNvPr>
+          <p:cNvSpPr>
+            <a:spLocks noGrp="1"/>
+          </p:cNvSpPr>
+          <p:nvPr>
+            <p:ph type="title"/>
+          </p:nvPr>
         </p:nvSpPr>
         <p:spPr>
           <a:xfrm>
-            <a:off x="609600" y="2011680"/>
-            <a:ext cx="2103120" cy="868680"/>
+            <a:off x="609600" y="317155"/>
+            <a:ext cx="10972800" cy="582594"/>
           </a:xfrm>
-          <a:prstGeom prst="roundRect">
-            <a:avLst/>
-          </a:prstGeom>
-          <a:solidFill>
-            <a:schemeClr val="accent1">
-              <a:lumMod val="20000"/>
-              <a:lumOff val="80000"/>
-            </a:schemeClr>
-          </a:solidFill>
-          <a:ln>
-            <a:noFill/>
-          </a:ln>
         </p:spPr>
         <p:txBody>
-          <a:bodyPr wrap="square" lIns="91440" rIns="91440" anchor="ctr">
-            <a:normAutofit/>
+          <a:bodyPr wrap="square" anchor="ctr">
+            <a:normAutofit fontScale="90000"/>
           </a:bodyPr>
           <a:lstStyle/>
           <a:p>
-            <a:pPr algn="ctr"/>
-            <a:r>
-              <a:rPr lang="zh-TW" altLang="en-US" dirty="0" b="1" sz="1800">
-                <a:solidFill>
-                  <a:schemeClr val="tx1"/>
-                </a:solidFill>
-              </a:rPr>
-              <a:t>編碼畫面</a:t>
-            </a:r>
+            <a:r>
+              <a:rPr lang="en-US" altLang="zh-TW" dirty="0"/>
+              <a:t>VLA: The Action Expert Is Re-read Every Step</a:t>
+            </a:r>
+            <a:endParaRPr lang="en-US" altLang="zh-TW" dirty="0">
+              <a:latin typeface="+mn-ea"/>
+              <a:cs typeface="Times New Roman" panose="02020603050405020304" pitchFamily="18" charset="0"/>
+            </a:endParaRPr>
           </a:p>
         </p:txBody>
       </p:sp>
       <p:sp>
         <p:nvSpPr>
-          <p:cNvPr id="50" name="箭頭 1"/>
-          <p:cNvSpPr/>
+          <p:cNvPr id="2" name="投影片編號版面配置區 1">
+            <a:extLst>
+              <a:ext uri="{FF2B5EF4-FFF2-40B4-BE49-F238E27FC236}">
+                <a16:creationId xmlns:a16="http://schemas.microsoft.com/office/drawing/2014/main" id="{9B73AECC-E727-FB48-3345-1117D9DF8296}"/>
+              </a:ext>
+            </a:extLst>
+          </p:cNvPr>
+          <p:cNvSpPr>
+            <a:spLocks noGrp="1"/>
+          </p:cNvSpPr>
+          <p:nvPr>
+            <p:ph type="sldNum" sz="quarter" idx="12"/>
+          </p:nvPr>
+        </p:nvSpPr>
+        <p:spPr/>
+        <p:txBody>
+          <a:bodyPr/>
+          <a:lstStyle/>
+          <a:p>
+            <a:fld id="{E61F77C1-B770-47FB-877F-E631DD26508E}" type="slidenum">
+              <a:rPr lang="zh-TW" altLang="en-US" smtClean="0"/>
+              <a:t>2</a:t>
+            </a:fld>
+            <a:endParaRPr lang="zh-TW" altLang="en-US" dirty="0"/>
+          </a:p>
+        </p:txBody>
+      </p:sp>
+      <p:pic>
+        <p:nvPicPr>
+          <p:cNvPr id="40" name="Figure 40" descr="pi0 figure"/>
+          <p:cNvPicPr>
+            <a:picLocks noChangeAspect="1"/>
+          </p:cNvPicPr>
           <p:nvPr/>
-        </p:nvSpPr>
+        </p:nvPicPr>
+        <p:blipFill>
+          <a:blip r:embed="rId50"/>
+          <a:stretch>
+            <a:fillRect/>
+          </a:stretch>
+        </p:blipFill>
         <p:spPr>
           <a:xfrm>
-            <a:off x="2804160" y="2308860"/>
-            <a:ext cx="365760" cy="274320"/>
-          </a:xfrm>
-          <a:prstGeom prst="rightArrow">
-            <a:avLst/>
-          </a:prstGeom>
-          <a:solidFill>
-            <a:srgbClr val="A6A6A6"/>
-          </a:solidFill>
-          <a:ln>
-            <a:noFill/>
-          </a:ln>
-        </p:spPr>
-      </p:sp>
-      <p:sp>
-        <p:nvSpPr>
-          <p:cNvPr id="41" name="流程 2"/>
-          <p:cNvSpPr/>
-          <p:nvPr/>
-        </p:nvSpPr>
-        <p:spPr>
-          <a:xfrm>
-            <a:off x="3261360" y="2011680"/>
-            <a:ext cx="2103120" cy="868680"/>
-          </a:xfrm>
-          <a:prstGeom prst="roundRect">
-            <a:avLst/>
-          </a:prstGeom>
-          <a:solidFill>
-            <a:schemeClr val="accent1">
-              <a:lumMod val="20000"/>
-              <a:lumOff val="80000"/>
-            </a:schemeClr>
-          </a:solidFill>
-          <a:ln>
-            <a:noFill/>
-          </a:ln>
-        </p:spPr>
-        <p:txBody>
-          <a:bodyPr wrap="square" lIns="91440" rIns="91440" anchor="ctr">
-            <a:normAutofit/>
-          </a:bodyPr>
-          <a:lstStyle/>
-          <a:p>
-            <a:pPr algn="ctr"/>
-            <a:r>
-              <a:rPr lang="zh-TW" altLang="en-US" dirty="0" b="1" sz="1800">
-                <a:solidFill>
-                  <a:schemeClr val="tx1"/>
-                </a:solidFill>
-              </a:rPr>
-              <a:t>大主幹看一次</a:t>
-            </a:r>
-          </a:p>
-          <a:p>
-            <a:pPr algn="ctr"/>
-            <a:r>
-              <a:rPr lang="zh-TW" altLang="en-US" dirty="0" sz="1800">
-                <a:solidFill>
-                  <a:schemeClr val="tx1"/>
-                </a:solidFill>
-              </a:rPr>
-              <a:t>存下注意力資料</a:t>
-            </a:r>
-          </a:p>
-        </p:txBody>
-      </p:sp>
-      <p:sp>
-        <p:nvSpPr>
-          <p:cNvPr id="51" name="箭頭 2"/>
-          <p:cNvSpPr/>
-          <p:nvPr/>
-        </p:nvSpPr>
-        <p:spPr>
-          <a:xfrm>
-            <a:off x="5455920" y="2308860"/>
-            <a:ext cx="365760" cy="274320"/>
-          </a:xfrm>
-          <a:prstGeom prst="rightArrow">
-            <a:avLst/>
-          </a:prstGeom>
-          <a:solidFill>
-            <a:srgbClr val="A6A6A6"/>
-          </a:solidFill>
-          <a:ln>
-            <a:noFill/>
-          </a:ln>
-        </p:spPr>
-      </p:sp>
-      <p:sp>
-        <p:nvSpPr>
-          <p:cNvPr id="42" name="流程 3"/>
-          <p:cNvSpPr/>
-          <p:nvPr/>
-        </p:nvSpPr>
-        <p:spPr>
-          <a:xfrm>
-            <a:off x="5913120" y="2011680"/>
-            <a:ext cx="2103120" cy="868680"/>
-          </a:xfrm>
-          <a:prstGeom prst="roundRect">
-            <a:avLst/>
-          </a:prstGeom>
-          <a:solidFill>
-            <a:schemeClr val="accent1"/>
-          </a:solidFill>
-          <a:ln>
-            <a:noFill/>
-          </a:ln>
-        </p:spPr>
-        <p:txBody>
-          <a:bodyPr wrap="square" lIns="91440" rIns="91440" anchor="ctr">
-            <a:normAutofit/>
-          </a:bodyPr>
-          <a:lstStyle/>
-          <a:p>
-            <a:pPr algn="ctr"/>
-            <a:r>
-              <a:rPr lang="zh-TW" altLang="en-US" dirty="0" b="1" sz="1800">
-                <a:solidFill>
-                  <a:schemeClr val="bg1"/>
-                </a:solidFill>
-              </a:rPr>
-              <a:t>動作修正四次</a:t>
-            </a:r>
-          </a:p>
-          <a:p>
-            <a:pPr algn="ctr"/>
-            <a:r>
-              <a:rPr lang="zh-TW" altLang="en-US" dirty="0" sz="1800">
-                <a:solidFill>
-                  <a:schemeClr val="bg1"/>
-                </a:solidFill>
-              </a:rPr>
-              <a:t>每次讀存下的資料</a:t>
-            </a:r>
-          </a:p>
-        </p:txBody>
-      </p:sp>
-      <p:sp>
-        <p:nvSpPr>
-          <p:cNvPr id="52" name="箭頭 3"/>
-          <p:cNvSpPr/>
-          <p:nvPr/>
-        </p:nvSpPr>
-        <p:spPr>
-          <a:xfrm>
-            <a:off x="8107680" y="2308860"/>
-            <a:ext cx="365760" cy="274320"/>
-          </a:xfrm>
-          <a:prstGeom prst="rightArrow">
-            <a:avLst/>
-          </a:prstGeom>
-          <a:solidFill>
-            <a:srgbClr val="A6A6A6"/>
-          </a:solidFill>
-          <a:ln>
-            <a:noFill/>
-          </a:ln>
-        </p:spPr>
-      </p:sp>
-      <p:sp>
-        <p:nvSpPr>
-          <p:cNvPr id="43" name="流程 4"/>
-          <p:cNvSpPr/>
-          <p:nvPr/>
-        </p:nvSpPr>
-        <p:spPr>
-          <a:xfrm>
-            <a:off x="8564880" y="2011680"/>
-            <a:ext cx="2103120" cy="868680"/>
-          </a:xfrm>
-          <a:prstGeom prst="roundRect">
-            <a:avLst/>
-          </a:prstGeom>
-          <a:solidFill>
-            <a:schemeClr val="accent1">
-              <a:lumMod val="20000"/>
-              <a:lumOff val="80000"/>
-            </a:schemeClr>
-          </a:solidFill>
-          <a:ln>
-            <a:noFill/>
-          </a:ln>
-        </p:spPr>
-        <p:txBody>
-          <a:bodyPr wrap="square" lIns="91440" rIns="91440" anchor="ctr">
-            <a:normAutofit/>
-          </a:bodyPr>
-          <a:lstStyle/>
-          <a:p>
-            <a:pPr algn="ctr"/>
-            <a:r>
-              <a:rPr lang="zh-TW" altLang="en-US" dirty="0" b="1" sz="1800">
-                <a:solidFill>
-                  <a:schemeClr val="tx1"/>
-                </a:solidFill>
-              </a:rPr>
-              <a:t>輸出一段動作</a:t>
-            </a:r>
-          </a:p>
-        </p:txBody>
-      </p:sp>
-      <p:sp>
-        <p:nvSpPr>
-          <p:cNvPr id="60" name="重點 60"/>
-          <p:cNvSpPr txBox="1"/>
-          <p:nvPr/>
-        </p:nvSpPr>
-        <p:spPr>
-          <a:xfrm>
-            <a:off x="609600" y="3291840"/>
-            <a:ext cx="10972800" cy="2286000"/>
+            <a:off x="3261360" y="2926080"/>
+            <a:ext cx="5669280" cy="3401568"/>
           </a:xfrm>
           <a:prstGeom prst="rect">
             <a:avLst/>
           </a:prstGeom>
-          <a:noFill/>
         </p:spPr>
-        <p:txBody>
-          <a:bodyPr wrap="square" lIns="91440" tIns="45720" rIns="91440" bIns="45720">
-            <a:normAutofit/>
-          </a:bodyPr>
-          <a:lstStyle/>
-          <a:p>
-            <a:pPr marL="342900" indent="-342900">
-              <a:spcBef>
-                <a:spcPts val="900"/>
-              </a:spcBef>
-              <a:buFont typeface="Arial"/>
-              <a:buChar char="•"/>
-            </a:pPr>
-            <a:r>
-              <a:rPr lang="zh-TW" altLang="en-US" dirty="0" b="1" sz="2200"/>
-              <a:t>成本在前段：</a:t>
-            </a:r>
-            <a:r>
-              <a:rPr lang="zh-TW" altLang="en-US" dirty="0" sz="2200"/>
-              <a:t>每次推論都要重做，無法像語言模型那樣攤提</a:t>
-            </a:r>
-          </a:p>
-          <a:p>
-            <a:pPr marL="342900" indent="-342900">
-              <a:spcBef>
-                <a:spcPts val="900"/>
-              </a:spcBef>
-              <a:buFont typeface="Arial"/>
-              <a:buChar char="•"/>
-            </a:pPr>
-            <a:r>
-              <a:rPr lang="zh-TW" altLang="en-US" dirty="0" b="1" sz="2200"/>
-              <a:t>重用率兩極：</a:t>
-            </a:r>
-            <a:r>
-              <a:rPr lang="zh-TW" altLang="en-US" dirty="0" sz="2200"/>
-              <a:t>大主幹讀一次，小網路讀好幾次</a:t>
-            </a:r>
-          </a:p>
-          <a:p>
-            <a:pPr marL="342900" indent="-342900">
-              <a:spcBef>
-                <a:spcPts val="900"/>
-              </a:spcBef>
-              <a:buFont typeface="Arial"/>
-              <a:buChar char="•"/>
-            </a:pPr>
-            <a:r>
-              <a:rPr lang="zh-TW" altLang="en-US" dirty="0" b="1" sz="2200"/>
-              <a:t>不是快取：</a:t>
-            </a:r>
-            <a:r>
-              <a:rPr lang="zh-TW" altLang="en-US" dirty="0" sz="2200"/>
-              <a:t>存下的資料跨推論不能重用，只在修正步之間有用</a:t>
-            </a:r>
-          </a:p>
-        </p:txBody>
-      </p:sp>
+      </p:pic>
     </p:spTree>
     <p:extLst>
       <p:ext uri="{BB962C8B-B14F-4D97-AF65-F5344CB8AC3E}">
-        <p14:creationId xmlns:p14="http://schemas.microsoft.com/office/powerpoint/2010/main" val="1325503144"/>
+        <p14:creationId xmlns:p14="http://schemas.microsoft.com/office/powerpoint/2010/main" val="340821465"/>
       </p:ext>
     </p:extLst>
   </p:cSld>
@@ -8788,7 +7569,7 @@
         <p:spPr bwMode="auto">
           <a:xfrm>
             <a:off x="609600" y="1175657"/>
-            <a:ext cx="10972800" cy="4950509"/>
+            <a:ext cx="10972800" cy="1874520"/>
           </a:xfrm>
           <a:prstGeom prst="rect">
             <a:avLst/>
@@ -8971,12 +7752,41 @@
               </a:spcAft>
             </a:pPr>
             <a:r>
-              <a:rPr lang="zh-TW" altLang="en-US" dirty="0" b="1"/>
-              <a:t>多個小陣列：</a:t>
-            </a:r>
-            <a:r>
-              <a:rPr lang="zh-TW" altLang="en-US" dirty="0"/>
-              <a:t>取代單一大陣列，不做專算向量的引擎</a:t>
+              <a:rPr lang="en-US" altLang="zh-TW" sz="2400" dirty="0"/>
+              <a:t>State kept between steps (KV cache / features)</a:t>
+            </a:r>
+          </a:p>
+          <a:p>
+            <a:pPr lvl="1">
+              <a:spcAft>
+                <a:spcPts val="0"/>
+              </a:spcAft>
+            </a:pPr>
+            <a:r>
+              <a:rPr lang="en-US" altLang="zh-TW" sz="2000" dirty="0"/>
+              <a:t>VLA: 0.7–18 MB, fixed by sensor configuration, discarded at every replan</a:t>
+            </a:r>
+          </a:p>
+          <a:p>
+            <a:pPr lvl="1">
+              <a:spcAft>
+                <a:spcPts val="0"/>
+              </a:spcAft>
+            </a:pPr>
+            <a:r>
+              <a:rPr lang="en-US" altLang="zh-TW" sz="2000" dirty="0"/>
+              <a:t>LLM: grows with context and batch (1 GB at 8K → 17 GB at 128K)</a:t>
+            </a:r>
+          </a:p>
+          <a:p>
+            <a:pPr lvl="1">
+              <a:spcAft>
+                <a:spcPts val="0"/>
+              </a:spcAft>
+            </a:pPr>
+            <a:r>
+              <a:rPr lang="en-US" altLang="zh-TW" sz="2000" dirty="0"/>
+              <a:t>Only AR video models (Matrix-Game 2.0, DreamZero) keep a GB-scale window</a:t>
             </a:r>
           </a:p>
           <a:p>
@@ -8986,68 +7796,8 @@
               </a:spcAft>
             </a:pPr>
             <a:r>
-              <a:rPr lang="zh-TW" altLang="en-US" dirty="0" b="1"/>
-              <a:t>權重分兩路：</a:t>
-            </a:r>
-            <a:r>
-              <a:rPr lang="zh-TW" altLang="en-US" dirty="0"/>
-              <a:t>小網路放晶片內，大主幹低精度串流</a:t>
-            </a:r>
-          </a:p>
-          <a:p>
-            <a:pPr lvl="1">
-              <a:spcAft>
-                <a:spcPts val="0"/>
-              </a:spcAft>
-            </a:pPr>
-            <a:r>
-              <a:rPr lang="zh-TW" altLang="en-US" dirty="0"/>
-              <a:t>外部記憶體以頻寬為優先，而不是容量</a:t>
-            </a:r>
-          </a:p>
-          <a:p>
-            <a:pPr>
-              <a:spcAft>
-                <a:spcPts val="0"/>
-              </a:spcAft>
-            </a:pPr>
-            <a:r>
-              <a:rPr lang="zh-TW" altLang="en-US" dirty="0" b="1"/>
-              <a:t>狀態管理簡化：</a:t>
-            </a:r>
-            <a:r>
-              <a:rPr lang="zh-TW" altLang="en-US" dirty="0"/>
-              <a:t>大小在編譯時已知，不需動態管理</a:t>
-            </a:r>
-          </a:p>
-          <a:p>
-            <a:pPr>
-              <a:spcAft>
-                <a:spcPts val="0"/>
-              </a:spcAft>
-            </a:pPr>
-            <a:r>
-              <a:rPr lang="zh-TW" altLang="en-US" dirty="0" b="1"/>
-              <a:t>固定排程編譯器：</a:t>
-            </a:r>
-            <a:r>
-              <a:rPr lang="zh-TW" altLang="en-US" dirty="0"/>
-              <a:t>刪除冗餘計算，保證最壞延遲</a:t>
-            </a:r>
-          </a:p>
-          <a:p>
-            <a:pPr>
-              <a:spcAft>
-                <a:spcPts val="0"/>
-              </a:spcAft>
-            </a:pPr>
-            <a:r>
-              <a:rPr lang="zh-TW" altLang="en-US" dirty="0" b="1"/>
-              <a:t>卷積前端：</a:t>
-            </a:r>
-            <a:r>
-              <a:rPr lang="zh-TW" altLang="en-US" dirty="0"/>
-              <a:t>支援三維卷積；注意力只需小單元</a:t>
+              <a:rPr lang="en-US" altLang="zh-TW" sz="2400" dirty="0"/>
+              <a:t>No paged KV management needed: sizes are known at compile time</a:t>
             </a:r>
           </a:p>
         </p:txBody>
@@ -9082,7 +7832,7 @@
           <a:p>
             <a:r>
               <a:rPr lang="en-US" altLang="zh-TW" dirty="0"/>
-              <a:t>建議：五個與 LLM 加速器不同的設計</a:t>
+              <a:t>Persistent State Is Small and Fixed</a:t>
             </a:r>
             <a:endParaRPr lang="en-US" altLang="zh-TW" dirty="0">
               <a:latin typeface="+mn-ea"/>
@@ -9120,6 +7870,30 @@
           </a:p>
         </p:txBody>
       </p:sp>
+      <p:pic>
+        <p:nvPicPr>
+          <p:cNvPr id="40" name="Figure 40" descr="state figure"/>
+          <p:cNvPicPr>
+            <a:picLocks noChangeAspect="1"/>
+          </p:cNvPicPr>
+          <p:nvPr/>
+        </p:nvPicPr>
+        <p:blipFill>
+          <a:blip r:embed="rId50"/>
+          <a:stretch>
+            <a:fillRect/>
+          </a:stretch>
+        </p:blipFill>
+        <p:spPr>
+          <a:xfrm>
+            <a:off x="3169920" y="3063240"/>
+            <a:ext cx="5852160" cy="3218688"/>
+          </a:xfrm>
+          <a:prstGeom prst="rect">
+            <a:avLst/>
+          </a:prstGeom>
+        </p:spPr>
+      </p:pic>
     </p:spTree>
     <p:extLst>
       <p:ext uri="{BB962C8B-B14F-4D97-AF65-F5344CB8AC3E}">
@@ -9173,7 +7947,7 @@
         <p:spPr bwMode="auto">
           <a:xfrm>
             <a:off x="609600" y="1175657"/>
-            <a:ext cx="10972800" cy="4950509"/>
+            <a:ext cx="10972800" cy="1965960"/>
           </a:xfrm>
           <a:prstGeom prst="rect">
             <a:avLst/>
@@ -9356,8 +8130,8 @@
               </a:spcAft>
             </a:pPr>
             <a:r>
-              <a:rPr lang="zh-TW" altLang="en-US" dirty="0" b="1"/>
-              <a:t>要不要支援需要大量歷史記憶的影片模型？</a:t>
+              <a:rPr lang="en-US" altLang="zh-TW" sz="2400" dirty="0"/>
+              <a:t>Decision cost ≈ encoder + I × K × H × C_transition</a:t>
             </a:r>
           </a:p>
           <a:p>
@@ -9367,8 +8141,19 @@
               </a:spcAft>
             </a:pPr>
             <a:r>
-              <a:rPr lang="zh-TW" altLang="en-US" dirty="0"/>
-              <a:t>支援，就要預留大量記憶體頻寬</a:t>
+              <a:rPr lang="en-US" altLang="zh-TW" sz="2000" dirty="0"/>
+              <a:t>Same “latent world model” label, but per-transition cost differs by 2,400–90,000×</a:t>
+            </a:r>
+          </a:p>
+          <a:p>
+            <a:pPr lvl="1">
+              <a:spcAft>
+                <a:spcPts val="0"/>
+              </a:spcAft>
+            </a:pPr>
+            <a:r>
+              <a:rPr lang="en-US" altLang="zh-TW" sz="2000" dirty="0"/>
+              <a:t>The only robot workload that fills hardware with parallel candidates</a:t>
             </a:r>
           </a:p>
           <a:p>
@@ -9378,8 +8163,8 @@
               </a:spcAft>
             </a:pPr>
             <a:r>
-              <a:rPr lang="zh-TW" altLang="en-US" dirty="0" b="1"/>
-              <a:t>小網路放晶片內，還是多產生候選來分攤讀取？</a:t>
+              <a:rPr lang="en-US" altLang="zh-TW" sz="2400" dirty="0"/>
+              <a:t>Policy proposes, world model scores</a:t>
             </a:r>
           </a:p>
           <a:p>
@@ -9389,30 +8174,8 @@
               </a:spcAft>
             </a:pPr>
             <a:r>
-              <a:rPr lang="zh-TW" altLang="en-US" dirty="0"/>
-              <a:t>前者要大 SRAM，後者不增加面積</a:t>
-            </a:r>
-          </a:p>
-          <a:p>
-            <a:pPr>
-              <a:spcAft>
-                <a:spcPts val="0"/>
-              </a:spcAft>
-            </a:pPr>
-            <a:r>
-              <a:rPr lang="zh-TW" altLang="en-US" dirty="0" b="1"/>
-              <a:t>大主幹的精度要壓到多低？</a:t>
-            </a:r>
-          </a:p>
-          <a:p>
-            <a:pPr lvl="1">
-              <a:spcAft>
-                <a:spcPts val="0"/>
-              </a:spcAft>
-            </a:pPr>
-            <a:r>
-              <a:rPr lang="zh-TW" altLang="en-US" dirty="0"/>
-              <a:t>精度越低，越能擺脫頻寬限制</a:t>
+              <a:rPr lang="en-US" altLang="zh-TW" sz="2000" dirty="0"/>
+              <a:t>Best-of-16 action chunks add only ~25% policy time on Thor</a:t>
             </a:r>
           </a:p>
         </p:txBody>
@@ -9447,7 +8210,7 @@
           <a:p>
             <a:r>
               <a:rPr lang="en-US" altLang="zh-TW" dirty="0"/>
-              <a:t>規格上要先決定的三個取捨</a:t>
+              <a:t>Latent Planning: State Representation Comes First</a:t>
             </a:r>
             <a:endParaRPr lang="en-US" altLang="zh-TW" dirty="0">
               <a:latin typeface="+mn-ea"/>
@@ -9485,6 +8248,539 @@
           </a:p>
         </p:txBody>
       </p:sp>
+      <p:graphicFrame>
+        <p:nvGraphicFramePr>
+          <p:cNvPr id="40" name="Table 40"/>
+          <p:cNvGraphicFramePr>
+            <a:graphicFrameLocks noGrp="1"/>
+          </p:cNvGraphicFramePr>
+          <p:nvPr/>
+        </p:nvGraphicFramePr>
+        <p:xfrm>
+          <a:off x="1066800" y="3154680"/>
+          <a:ext cx="10058400" cy="1554480"/>
+        </p:xfrm>
+        <a:graphic>
+          <a:graphicData uri="http://schemas.openxmlformats.org/drawingml/2006/table">
+            <a:tbl>
+              <a:tblPr firstRow="1"/>
+              <a:tblGrid>
+                <a:gridCol w="2743200"/>
+                <a:gridCol w="3291840"/>
+                <a:gridCol w="4023360"/>
+              </a:tblGrid>
+              <a:tr h="310896">
+                <a:tc>
+                  <a:txBody>
+                    <a:bodyPr/>
+                    <a:lstStyle/>
+                    <a:p>
+                      <a:pPr algn="l"/>
+                      <a:r>
+                        <a:rPr lang="en-US" altLang="zh-TW" sz="1400" b="1" dirty="0">
+                          <a:solidFill>
+                            <a:srgbClr val="000000"/>
+                          </a:solidFill>
+                        </a:rPr>
+                        <a:t/>
+                      </a:r>
+                    </a:p>
+                  </a:txBody>
+                  <a:tcPr marL="68580" marR="68580" marT="27432" marB="27432" anchor="ctr">
+                    <a:lnL w="0">
+                      <a:noFill/>
+                    </a:lnL>
+                    <a:lnR w="0">
+                      <a:noFill/>
+                    </a:lnR>
+                    <a:lnT w="19050">
+                      <a:solidFill>
+                        <a:srgbClr val="000000"/>
+                      </a:solidFill>
+                    </a:lnT>
+                    <a:lnB w="9525">
+                      <a:solidFill>
+                        <a:srgbClr val="000000"/>
+                      </a:solidFill>
+                    </a:lnB>
+                    <a:noFill/>
+                  </a:tcPr>
+                </a:tc>
+                <a:tc>
+                  <a:txBody>
+                    <a:bodyPr/>
+                    <a:lstStyle/>
+                    <a:p>
+                      <a:pPr algn="l"/>
+                      <a:r>
+                        <a:rPr lang="en-US" altLang="zh-TW" sz="1400" b="1" dirty="0">
+                          <a:solidFill>
+                            <a:srgbClr val="000000"/>
+                          </a:solidFill>
+                        </a:rPr>
+                        <a:t>TD-MPC2</a:t>
+                      </a:r>
+                    </a:p>
+                  </a:txBody>
+                  <a:tcPr marL="68580" marR="68580" marT="27432" marB="27432" anchor="ctr">
+                    <a:lnL w="0">
+                      <a:noFill/>
+                    </a:lnL>
+                    <a:lnR w="0">
+                      <a:noFill/>
+                    </a:lnR>
+                    <a:lnT w="19050">
+                      <a:solidFill>
+                        <a:srgbClr val="000000"/>
+                      </a:solidFill>
+                    </a:lnT>
+                    <a:lnB w="9525">
+                      <a:solidFill>
+                        <a:srgbClr val="000000"/>
+                      </a:solidFill>
+                    </a:lnB>
+                    <a:noFill/>
+                  </a:tcPr>
+                </a:tc>
+                <a:tc>
+                  <a:txBody>
+                    <a:bodyPr/>
+                    <a:lstStyle/>
+                    <a:p>
+                      <a:pPr algn="l"/>
+                      <a:r>
+                        <a:rPr lang="en-US" altLang="zh-TW" sz="1400" b="1" dirty="0">
+                          <a:solidFill>
+                            <a:srgbClr val="000000"/>
+                          </a:solidFill>
+                        </a:rPr>
+                        <a:t>V-JEPA 2-AC</a:t>
+                      </a:r>
+                    </a:p>
+                  </a:txBody>
+                  <a:tcPr marL="68580" marR="68580" marT="27432" marB="27432" anchor="ctr">
+                    <a:lnL w="0">
+                      <a:noFill/>
+                    </a:lnL>
+                    <a:lnR w="0">
+                      <a:noFill/>
+                    </a:lnR>
+                    <a:lnT w="19050">
+                      <a:solidFill>
+                        <a:srgbClr val="000000"/>
+                      </a:solidFill>
+                    </a:lnT>
+                    <a:lnB w="9525">
+                      <a:solidFill>
+                        <a:srgbClr val="000000"/>
+                      </a:solidFill>
+                    </a:lnB>
+                    <a:noFill/>
+                  </a:tcPr>
+                </a:tc>
+              </a:tr>
+              <a:tr h="310896">
+                <a:tc>
+                  <a:txBody>
+                    <a:bodyPr/>
+                    <a:lstStyle/>
+                    <a:p>
+                      <a:pPr algn="l"/>
+                      <a:r>
+                        <a:rPr lang="en-US" altLang="zh-TW" sz="1400" b="1" dirty="0">
+                          <a:solidFill>
+                            <a:srgbClr val="000000"/>
+                          </a:solidFill>
+                        </a:rPr>
+                        <a:t>State</a:t>
+                      </a:r>
+                    </a:p>
+                  </a:txBody>
+                  <a:tcPr marL="68580" marR="68580" marT="27432" marB="27432" anchor="ctr">
+                    <a:lnL w="0">
+                      <a:noFill/>
+                    </a:lnL>
+                    <a:lnR w="0">
+                      <a:noFill/>
+                    </a:lnR>
+                    <a:lnT w="0">
+                      <a:noFill/>
+                    </a:lnT>
+                    <a:lnB w="0">
+                      <a:noFill/>
+                    </a:lnB>
+                    <a:noFill/>
+                  </a:tcPr>
+                </a:tc>
+                <a:tc>
+                  <a:txBody>
+                    <a:bodyPr/>
+                    <a:lstStyle/>
+                    <a:p>
+                      <a:pPr algn="l"/>
+                      <a:r>
+                        <a:rPr lang="en-US" altLang="zh-TW" sz="1400" dirty="0">
+                          <a:solidFill>
+                            <a:srgbClr val="000000"/>
+                          </a:solidFill>
+                        </a:rPr>
+                        <a:t>Compact latent vector</a:t>
+                      </a:r>
+                    </a:p>
+                  </a:txBody>
+                  <a:tcPr marL="68580" marR="68580" marT="27432" marB="27432" anchor="ctr">
+                    <a:lnL w="0">
+                      <a:noFill/>
+                    </a:lnL>
+                    <a:lnR w="0">
+                      <a:noFill/>
+                    </a:lnR>
+                    <a:lnT w="0">
+                      <a:noFill/>
+                    </a:lnT>
+                    <a:lnB w="0">
+                      <a:noFill/>
+                    </a:lnB>
+                    <a:noFill/>
+                  </a:tcPr>
+                </a:tc>
+                <a:tc>
+                  <a:txBody>
+                    <a:bodyPr/>
+                    <a:lstStyle/>
+                    <a:p>
+                      <a:pPr algn="l"/>
+                      <a:r>
+                        <a:rPr lang="en-US" altLang="zh-TW" sz="1400" dirty="0">
+                          <a:solidFill>
+                            <a:srgbClr val="000000"/>
+                          </a:solidFill>
+                        </a:rPr>
+                        <a:t>256 tokens × 1024-d per frame</a:t>
+                      </a:r>
+                    </a:p>
+                  </a:txBody>
+                  <a:tcPr marL="68580" marR="68580" marT="27432" marB="27432" anchor="ctr">
+                    <a:lnL w="0">
+                      <a:noFill/>
+                    </a:lnL>
+                    <a:lnR w="0">
+                      <a:noFill/>
+                    </a:lnR>
+                    <a:lnT w="0">
+                      <a:noFill/>
+                    </a:lnT>
+                    <a:lnB w="0">
+                      <a:noFill/>
+                    </a:lnB>
+                    <a:noFill/>
+                  </a:tcPr>
+                </a:tc>
+              </a:tr>
+              <a:tr h="310896">
+                <a:tc>
+                  <a:txBody>
+                    <a:bodyPr/>
+                    <a:lstStyle/>
+                    <a:p>
+                      <a:pPr algn="l"/>
+                      <a:r>
+                        <a:rPr lang="en-US" altLang="zh-TW" sz="1400" b="1" dirty="0">
+                          <a:solidFill>
+                            <a:srgbClr val="000000"/>
+                          </a:solidFill>
+                        </a:rPr>
+                        <a:t>Transition model</a:t>
+                      </a:r>
+                    </a:p>
+                  </a:txBody>
+                  <a:tcPr marL="68580" marR="68580" marT="27432" marB="27432" anchor="ctr">
+                    <a:lnL w="0">
+                      <a:noFill/>
+                    </a:lnL>
+                    <a:lnR w="0">
+                      <a:noFill/>
+                    </a:lnR>
+                    <a:lnT w="0">
+                      <a:noFill/>
+                    </a:lnT>
+                    <a:lnB w="0">
+                      <a:noFill/>
+                    </a:lnB>
+                    <a:noFill/>
+                  </a:tcPr>
+                </a:tc>
+                <a:tc>
+                  <a:txBody>
+                    <a:bodyPr/>
+                    <a:lstStyle/>
+                    <a:p>
+                      <a:pPr algn="l"/>
+                      <a:r>
+                        <a:rPr lang="en-US" altLang="zh-TW" sz="1400" dirty="0">
+                          <a:solidFill>
+                            <a:srgbClr val="000000"/>
+                          </a:solidFill>
+                        </a:rPr>
+                        <a:t>MLP</a:t>
+                      </a:r>
+                    </a:p>
+                  </a:txBody>
+                  <a:tcPr marL="68580" marR="68580" marT="27432" marB="27432" anchor="ctr">
+                    <a:lnL w="0">
+                      <a:noFill/>
+                    </a:lnL>
+                    <a:lnR w="0">
+                      <a:noFill/>
+                    </a:lnR>
+                    <a:lnT w="0">
+                      <a:noFill/>
+                    </a:lnT>
+                    <a:lnB w="0">
+                      <a:noFill/>
+                    </a:lnB>
+                    <a:noFill/>
+                  </a:tcPr>
+                </a:tc>
+                <a:tc>
+                  <a:txBody>
+                    <a:bodyPr/>
+                    <a:lstStyle/>
+                    <a:p>
+                      <a:pPr algn="l"/>
+                      <a:r>
+                        <a:rPr lang="en-US" altLang="zh-TW" sz="1400" dirty="0">
+                          <a:solidFill>
+                            <a:srgbClr val="000000"/>
+                          </a:solidFill>
+                        </a:rPr>
+                        <a:t>Transformer predictor</a:t>
+                      </a:r>
+                    </a:p>
+                  </a:txBody>
+                  <a:tcPr marL="68580" marR="68580" marT="27432" marB="27432" anchor="ctr">
+                    <a:lnL w="0">
+                      <a:noFill/>
+                    </a:lnL>
+                    <a:lnR w="0">
+                      <a:noFill/>
+                    </a:lnR>
+                    <a:lnT w="0">
+                      <a:noFill/>
+                    </a:lnT>
+                    <a:lnB w="0">
+                      <a:noFill/>
+                    </a:lnB>
+                    <a:noFill/>
+                  </a:tcPr>
+                </a:tc>
+              </a:tr>
+              <a:tr h="310896">
+                <a:tc>
+                  <a:txBody>
+                    <a:bodyPr/>
+                    <a:lstStyle/>
+                    <a:p>
+                      <a:pPr algn="l"/>
+                      <a:r>
+                        <a:rPr lang="en-US" altLang="zh-TW" sz="1400" b="1" dirty="0">
+                          <a:solidFill>
+                            <a:srgbClr val="000000"/>
+                          </a:solidFill>
+                        </a:rPr>
+                        <a:t>Planner</a:t>
+                      </a:r>
+                    </a:p>
+                  </a:txBody>
+                  <a:tcPr marL="68580" marR="68580" marT="27432" marB="27432" anchor="ctr">
+                    <a:lnL w="0">
+                      <a:noFill/>
+                    </a:lnL>
+                    <a:lnR w="0">
+                      <a:noFill/>
+                    </a:lnR>
+                    <a:lnT w="0">
+                      <a:noFill/>
+                    </a:lnT>
+                    <a:lnB w="0">
+                      <a:noFill/>
+                    </a:lnB>
+                    <a:noFill/>
+                  </a:tcPr>
+                </a:tc>
+                <a:tc>
+                  <a:txBody>
+                    <a:bodyPr/>
+                    <a:lstStyle/>
+                    <a:p>
+                      <a:pPr algn="l"/>
+                      <a:r>
+                        <a:rPr lang="en-US" altLang="zh-TW" sz="1400" dirty="0">
+                          <a:solidFill>
+                            <a:srgbClr val="000000"/>
+                          </a:solidFill>
+                        </a:rPr>
+                        <a:t>MPPI: 6 iters × 512 cand. × 3 steps</a:t>
+                      </a:r>
+                    </a:p>
+                  </a:txBody>
+                  <a:tcPr marL="68580" marR="68580" marT="27432" marB="27432" anchor="ctr">
+                    <a:lnL w="0">
+                      <a:noFill/>
+                    </a:lnL>
+                    <a:lnR w="0">
+                      <a:noFill/>
+                    </a:lnR>
+                    <a:lnT w="0">
+                      <a:noFill/>
+                    </a:lnT>
+                    <a:lnB w="0">
+                      <a:noFill/>
+                    </a:lnB>
+                    <a:noFill/>
+                  </a:tcPr>
+                </a:tc>
+                <a:tc>
+                  <a:txBody>
+                    <a:bodyPr/>
+                    <a:lstStyle/>
+                    <a:p>
+                      <a:pPr algn="l"/>
+                      <a:r>
+                        <a:rPr lang="en-US" altLang="zh-TW" sz="1400" dirty="0">
+                          <a:solidFill>
+                            <a:srgbClr val="000000"/>
+                          </a:solidFill>
+                        </a:rPr>
+                        <a:t>CEM: 10 iters × 400 cand. × 2 steps</a:t>
+                      </a:r>
+                    </a:p>
+                  </a:txBody>
+                  <a:tcPr marL="68580" marR="68580" marT="27432" marB="27432" anchor="ctr">
+                    <a:lnL w="0">
+                      <a:noFill/>
+                    </a:lnL>
+                    <a:lnR w="0">
+                      <a:noFill/>
+                    </a:lnR>
+                    <a:lnT w="0">
+                      <a:noFill/>
+                    </a:lnT>
+                    <a:lnB w="0">
+                      <a:noFill/>
+                    </a:lnB>
+                    <a:noFill/>
+                  </a:tcPr>
+                </a:tc>
+              </a:tr>
+              <a:tr h="310896">
+                <a:tc>
+                  <a:txBody>
+                    <a:bodyPr/>
+                    <a:lstStyle/>
+                    <a:p>
+                      <a:pPr algn="l"/>
+                      <a:r>
+                        <a:rPr lang="en-US" altLang="zh-TW" sz="1400" b="1" dirty="0">
+                          <a:solidFill>
+                            <a:srgbClr val="000000"/>
+                          </a:solidFill>
+                        </a:rPr>
+                        <a:t>Relative transition cost</a:t>
+                      </a:r>
+                    </a:p>
+                  </a:txBody>
+                  <a:tcPr marL="68580" marR="68580" marT="27432" marB="27432" anchor="ctr">
+                    <a:lnL w="0">
+                      <a:noFill/>
+                    </a:lnL>
+                    <a:lnR w="0">
+                      <a:noFill/>
+                    </a:lnR>
+                    <a:lnT w="0">
+                      <a:noFill/>
+                    </a:lnT>
+                    <a:lnB w="19050">
+                      <a:solidFill>
+                        <a:srgbClr val="000000"/>
+                      </a:solidFill>
+                    </a:lnB>
+                    <a:noFill/>
+                  </a:tcPr>
+                </a:tc>
+                <a:tc>
+                  <a:txBody>
+                    <a:bodyPr/>
+                    <a:lstStyle/>
+                    <a:p>
+                      <a:pPr algn="l"/>
+                      <a:r>
+                        <a:rPr lang="en-US" altLang="zh-TW" sz="1400" dirty="0">
+                          <a:solidFill>
+                            <a:srgbClr val="000000"/>
+                          </a:solidFill>
+                        </a:rPr>
+                        <a:t>1×</a:t>
+                      </a:r>
+                    </a:p>
+                  </a:txBody>
+                  <a:tcPr marL="68580" marR="68580" marT="27432" marB="27432" anchor="ctr">
+                    <a:lnL w="0">
+                      <a:noFill/>
+                    </a:lnL>
+                    <a:lnR w="0">
+                      <a:noFill/>
+                    </a:lnR>
+                    <a:lnT w="0">
+                      <a:noFill/>
+                    </a:lnT>
+                    <a:lnB w="19050">
+                      <a:solidFill>
+                        <a:srgbClr val="000000"/>
+                      </a:solidFill>
+                    </a:lnB>
+                    <a:noFill/>
+                  </a:tcPr>
+                </a:tc>
+                <a:tc>
+                  <a:txBody>
+                    <a:bodyPr/>
+                    <a:lstStyle/>
+                    <a:p>
+                      <a:pPr algn="l"/>
+                      <a:r>
+                        <a:rPr lang="en-US" altLang="zh-TW" sz="1400" dirty="0">
+                          <a:solidFill>
+                            <a:srgbClr val="000000"/>
+                          </a:solidFill>
+                        </a:rPr>
+                        <a:t>2,400–90,000×</a:t>
+                      </a:r>
+                    </a:p>
+                  </a:txBody>
+                  <a:tcPr marL="68580" marR="68580" marT="27432" marB="27432" anchor="ctr">
+                    <a:lnL w="0">
+                      <a:noFill/>
+                    </a:lnL>
+                    <a:lnR w="0">
+                      <a:noFill/>
+                    </a:lnR>
+                    <a:lnT w="0">
+                      <a:noFill/>
+                    </a:lnT>
+                    <a:lnB w="19050">
+                      <a:solidFill>
+                        <a:srgbClr val="000000"/>
+                      </a:solidFill>
+                    </a:lnB>
+                    <a:noFill/>
+                  </a:tcPr>
+                </a:tc>
+              </a:tr>
+            </a:tbl>
+          </a:graphicData>
+        </a:graphic>
+      </p:graphicFrame>
     </p:spTree>
     <p:extLst>
       <p:ext uri="{BB962C8B-B14F-4D97-AF65-F5344CB8AC3E}">
@@ -9538,7 +8834,7 @@
         <p:spPr bwMode="auto">
           <a:xfrm>
             <a:off x="609600" y="1175657"/>
-            <a:ext cx="10972800" cy="4950509"/>
+            <a:ext cx="10972800" cy="1737360"/>
           </a:xfrm>
           <a:prstGeom prst="rect">
             <a:avLst/>
@@ -9721,8 +9017,8 @@
               </a:spcAft>
             </a:pPr>
             <a:r>
-              <a:rPr lang="zh-TW" altLang="en-US" dirty="0" b="1"/>
-              <a:t>目前的證據</a:t>
+              <a:rPr lang="en-US" altLang="zh-TW" sz="2400" dirty="0"/>
+              <a:t>~60 pre-2026 LLM techniques quantified per model family</a:t>
             </a:r>
           </a:p>
           <a:p>
@@ -9732,8 +9028,8 @@
               </a:spcAft>
             </a:pPr>
             <a:r>
-              <a:rPr lang="zh-TW" altLang="en-US" dirty="0"/>
-              <a:t>原始碼計數、理論估算與模擬；尚無晶片實測</a:t>
+              <a:rPr lang="en-US" altLang="zh-TW" sz="2000" dirty="0"/>
+              <a:t>Low precision (FP8 / FP4) helps every family</a:t>
             </a:r>
           </a:p>
           <a:p>
@@ -9743,8 +9039,8 @@
               </a:spcAft>
             </a:pPr>
             <a:r>
-              <a:rPr lang="zh-TW" altLang="en-US" dirty="0"/>
-              <a:t>互審後撤回一項加速宣稱，並修正陣列排程假設</a:t>
+              <a:rPr lang="en-US" altLang="zh-TW" sz="2000" dirty="0"/>
+              <a:t>LLM-serving staples (paged KV, continuous batching, speculative decoding) barely help VLA</a:t>
             </a:r>
           </a:p>
           <a:p>
@@ -9754,52 +9050,19 @@
               </a:spcAft>
             </a:pPr>
             <a:r>
-              <a:rPr lang="zh-TW" altLang="en-US" dirty="0"/>
-              <a:t>非矩陣運算可能成為新瓶頸，尚未量化</a:t>
-            </a:r>
-          </a:p>
-          <a:p>
-            <a:pPr>
+              <a:rPr lang="en-US" altLang="zh-TW" sz="2000" dirty="0"/>
+              <a:t>Weight-bandwidth techniques help VLA but not video world models</a:t>
+            </a:r>
+          </a:p>
+          <a:p>
+            <a:pPr lvl="1">
               <a:spcAft>
                 <a:spcPts val="0"/>
               </a:spcAft>
             </a:pPr>
             <a:r>
-              <a:rPr lang="zh-TW" altLang="en-US" dirty="0" b="1"/>
-              <a:t>下一步：GPU 實測</a:t>
-            </a:r>
-          </a:p>
-          <a:p>
-            <a:pPr lvl="1">
-              <a:spcAft>
-                <a:spcPts val="0"/>
-              </a:spcAft>
-            </a:pPr>
-            <a:r>
-              <a:rPr lang="zh-TW" altLang="en-US" dirty="0"/>
-              <a:t>多產生候選是否真的幾乎不增加時間</a:t>
-            </a:r>
-          </a:p>
-          <a:p>
-            <a:pPr lvl="1">
-              <a:spcAft>
-                <a:spcPts val="0"/>
-              </a:spcAft>
-            </a:pPr>
-            <a:r>
-              <a:rPr lang="zh-TW" altLang="en-US" dirty="0"/>
-              <a:t>刪除冗餘計算的實際效益</a:t>
-            </a:r>
-          </a:p>
-          <a:p>
-            <a:pPr lvl="1">
-              <a:spcAft>
-                <a:spcPts val="0"/>
-              </a:spcAft>
-            </a:pPr>
-            <a:r>
-              <a:rPr lang="zh-TW" altLang="en-US" dirty="0"/>
-              <a:t>若前者不成立，撤回「動作網路受頻寬限制」</a:t>
+              <a:rPr lang="en-US" altLang="zh-TW" sz="2000" dirty="0"/>
+              <a:t>Video world models gain most from step distillation and cross-step reuse</a:t>
             </a:r>
           </a:p>
         </p:txBody>
@@ -9834,7 +9097,7 @@
           <a:p>
             <a:r>
               <a:rPr lang="en-US" altLang="zh-TW" dirty="0"/>
-              <a:t>限制與下一步</a:t>
+              <a:t>Do LLM Acceleration Techniques Transfer?</a:t>
             </a:r>
             <a:endParaRPr lang="en-US" altLang="zh-TW" dirty="0">
               <a:latin typeface="+mn-ea"/>
@@ -9872,6 +9135,30 @@
           </a:p>
         </p:txBody>
       </p:sp>
+      <p:pic>
+        <p:nvPicPr>
+          <p:cNvPr id="40" name="Figure 40" descr="heat figure"/>
+          <p:cNvPicPr>
+            <a:picLocks noChangeAspect="1"/>
+          </p:cNvPicPr>
+          <p:nvPr/>
+        </p:nvPicPr>
+        <p:blipFill>
+          <a:blip r:embed="rId50"/>
+          <a:stretch>
+            <a:fillRect/>
+          </a:stretch>
+        </p:blipFill>
+        <p:spPr>
+          <a:xfrm>
+            <a:off x="3215640" y="2926080"/>
+            <a:ext cx="5760720" cy="3318175"/>
+          </a:xfrm>
+          <a:prstGeom prst="rect">
+            <a:avLst/>
+          </a:prstGeom>
+        </p:spPr>
+      </p:pic>
     </p:spTree>
     <p:extLst>
       <p:ext uri="{BB962C8B-B14F-4D97-AF65-F5344CB8AC3E}">
@@ -9925,6 +9212,2766 @@
         <p:spPr bwMode="auto">
           <a:xfrm>
             <a:off x="609600" y="1175657"/>
+            <a:ext cx="10972800" cy="1737360"/>
+          </a:xfrm>
+          <a:prstGeom prst="rect">
+            <a:avLst/>
+          </a:prstGeom>
+          <a:noFill/>
+          <a:ln w="9525">
+            <a:noFill/>
+            <a:miter lim="800000"/>
+            <a:headEnd/>
+            <a:tailEnd/>
+          </a:ln>
+        </p:spPr>
+        <p:txBody>
+          <a:bodyPr vert="horz" wrap="square" lIns="91440" tIns="45720" rIns="91440" bIns="45720" numCol="1" anchor="t" anchorCtr="0" compatLnSpc="1">
+            <a:prstTxWarp prst="textNoShape">
+              <a:avLst/>
+            </a:prstTxWarp>
+            <a:normAutofit/>
+          </a:bodyPr>
+          <a:lstStyle>
+            <a:lvl1pPr marL="342891" indent="-342891" algn="l" rtl="0" eaLnBrk="1" fontAlgn="base" hangingPunct="1">
+              <a:spcBef>
+                <a:spcPct val="20000"/>
+              </a:spcBef>
+              <a:spcAft>
+                <a:spcPct val="0"/>
+              </a:spcAft>
+              <a:buFont typeface="Arial" charset="0"/>
+              <a:buChar char="•"/>
+              <a:defRPr sz="2800" kern="1200">
+                <a:solidFill>
+                  <a:schemeClr val="tx1"/>
+                </a:solidFill>
+                <a:latin typeface="+mn-lt"/>
+                <a:ea typeface="+mn-ea"/>
+                <a:cs typeface="+mn-cs"/>
+              </a:defRPr>
+            </a:lvl1pPr>
+            <a:lvl2pPr marL="742932" indent="-285744" algn="l" rtl="0" eaLnBrk="1" fontAlgn="base" hangingPunct="1">
+              <a:spcBef>
+                <a:spcPct val="20000"/>
+              </a:spcBef>
+              <a:spcAft>
+                <a:spcPct val="0"/>
+              </a:spcAft>
+              <a:buFont typeface="Arial" charset="0"/>
+              <a:buChar char="–"/>
+              <a:defRPr sz="2400" kern="1200">
+                <a:solidFill>
+                  <a:schemeClr val="accent1">
+                    <a:lumMod val="75000"/>
+                  </a:schemeClr>
+                </a:solidFill>
+                <a:latin typeface="+mn-lt"/>
+                <a:ea typeface="+mn-ea"/>
+                <a:cs typeface="+mn-cs"/>
+              </a:defRPr>
+            </a:lvl2pPr>
+            <a:lvl3pPr marL="1142971" indent="-228594" algn="l" rtl="0" eaLnBrk="1" fontAlgn="base" hangingPunct="1">
+              <a:spcBef>
+                <a:spcPct val="20000"/>
+              </a:spcBef>
+              <a:spcAft>
+                <a:spcPct val="0"/>
+              </a:spcAft>
+              <a:buFont typeface="Arial" charset="0"/>
+              <a:buChar char="•"/>
+              <a:defRPr sz="2000" kern="1200">
+                <a:solidFill>
+                  <a:schemeClr val="accent1"/>
+                </a:solidFill>
+                <a:latin typeface="+mn-lt"/>
+                <a:ea typeface="+mn-ea"/>
+                <a:cs typeface="+mn-cs"/>
+              </a:defRPr>
+            </a:lvl3pPr>
+            <a:lvl4pPr marL="1600160" indent="-228594" algn="l" rtl="0" eaLnBrk="1" fontAlgn="base" hangingPunct="1">
+              <a:spcBef>
+                <a:spcPct val="20000"/>
+              </a:spcBef>
+              <a:spcAft>
+                <a:spcPct val="0"/>
+              </a:spcAft>
+              <a:buFont typeface="Arial" charset="0"/>
+              <a:buChar char="–"/>
+              <a:defRPr sz="1800" kern="1200">
+                <a:solidFill>
+                  <a:schemeClr val="accent6">
+                    <a:lumMod val="75000"/>
+                  </a:schemeClr>
+                </a:solidFill>
+                <a:latin typeface="+mn-lt"/>
+                <a:ea typeface="+mn-ea"/>
+                <a:cs typeface="+mn-cs"/>
+              </a:defRPr>
+            </a:lvl4pPr>
+            <a:lvl5pPr marL="2057349" indent="-228594" algn="l" rtl="0" eaLnBrk="1" fontAlgn="base" hangingPunct="1">
+              <a:spcBef>
+                <a:spcPct val="20000"/>
+              </a:spcBef>
+              <a:spcAft>
+                <a:spcPct val="0"/>
+              </a:spcAft>
+              <a:buFont typeface="Arial" charset="0"/>
+              <a:buChar char="»"/>
+              <a:defRPr sz="1800" kern="1200">
+                <a:solidFill>
+                  <a:schemeClr val="accent6"/>
+                </a:solidFill>
+                <a:latin typeface="+mn-lt"/>
+                <a:ea typeface="+mn-ea"/>
+                <a:cs typeface="+mn-cs"/>
+              </a:defRPr>
+            </a:lvl5pPr>
+            <a:lvl6pPr marL="2514537" indent="-228594" algn="l" defTabSz="914377" rtl="0" eaLnBrk="1" latinLnBrk="0" hangingPunct="1">
+              <a:spcBef>
+                <a:spcPct val="20000"/>
+              </a:spcBef>
+              <a:buFont typeface="Arial" pitchFamily="34" charset="0"/>
+              <a:buChar char="•"/>
+              <a:defRPr sz="2000" kern="1200">
+                <a:solidFill>
+                  <a:schemeClr val="tx1"/>
+                </a:solidFill>
+                <a:latin typeface="+mn-lt"/>
+                <a:ea typeface="+mn-ea"/>
+                <a:cs typeface="+mn-cs"/>
+              </a:defRPr>
+            </a:lvl6pPr>
+            <a:lvl7pPr marL="2971726" indent="-228594" algn="l" defTabSz="914377" rtl="0" eaLnBrk="1" latinLnBrk="0" hangingPunct="1">
+              <a:spcBef>
+                <a:spcPct val="20000"/>
+              </a:spcBef>
+              <a:buFont typeface="Arial" pitchFamily="34" charset="0"/>
+              <a:buChar char="•"/>
+              <a:defRPr sz="2000" kern="1200">
+                <a:solidFill>
+                  <a:schemeClr val="tx1"/>
+                </a:solidFill>
+                <a:latin typeface="+mn-lt"/>
+                <a:ea typeface="+mn-ea"/>
+                <a:cs typeface="+mn-cs"/>
+              </a:defRPr>
+            </a:lvl7pPr>
+            <a:lvl8pPr marL="3428914" indent="-228594" algn="l" defTabSz="914377" rtl="0" eaLnBrk="1" latinLnBrk="0" hangingPunct="1">
+              <a:spcBef>
+                <a:spcPct val="20000"/>
+              </a:spcBef>
+              <a:buFont typeface="Arial" pitchFamily="34" charset="0"/>
+              <a:buChar char="•"/>
+              <a:defRPr sz="2000" kern="1200">
+                <a:solidFill>
+                  <a:schemeClr val="tx1"/>
+                </a:solidFill>
+                <a:latin typeface="+mn-lt"/>
+                <a:ea typeface="+mn-ea"/>
+                <a:cs typeface="+mn-cs"/>
+              </a:defRPr>
+            </a:lvl8pPr>
+            <a:lvl9pPr marL="3886103" indent="-228594" algn="l" defTabSz="914377" rtl="0" eaLnBrk="1" latinLnBrk="0" hangingPunct="1">
+              <a:spcBef>
+                <a:spcPct val="20000"/>
+              </a:spcBef>
+              <a:buFont typeface="Arial" pitchFamily="34" charset="0"/>
+              <a:buChar char="•"/>
+              <a:defRPr sz="2000" kern="1200">
+                <a:solidFill>
+                  <a:schemeClr val="tx1"/>
+                </a:solidFill>
+                <a:latin typeface="+mn-lt"/>
+                <a:ea typeface="+mn-ea"/>
+                <a:cs typeface="+mn-cs"/>
+              </a:defRPr>
+            </a:lvl9pPr>
+          </a:lstStyle>
+          <a:p>
+            <a:pPr>
+              <a:spcAft>
+                <a:spcPts val="0"/>
+              </a:spcAft>
+            </a:pPr>
+            <a:r>
+              <a:rPr lang="en-US" altLang="zh-TW" sz="2400" dirty="0"/>
+              <a:t>16,384 MACs: one 128×128 WS array vs. 16 × 32×32 arrays with per-GEMM dataflow</a:t>
+            </a:r>
+          </a:p>
+          <a:p>
+            <a:pPr lvl="1">
+              <a:spcAft>
+                <a:spcPts val="0"/>
+              </a:spcAft>
+            </a:pPr>
+            <a:r>
+              <a:rPr lang="en-US" altLang="zh-TW" sz="2000" dirty="0"/>
+              <a:t>VLA action loop (M = 41–51): 9–12% → 59–77% utilization</a:t>
+            </a:r>
+          </a:p>
+          <a:p>
+            <a:pPr lvl="1">
+              <a:spcAft>
+                <a:spcPts val="0"/>
+              </a:spcAft>
+            </a:pPr>
+            <a:r>
+              <a:rPr lang="en-US" altLang="zh-TW" sz="2000" dirty="0"/>
+              <a:t>Video DiT, latent MPC and VLM prefill stay at 88–98% on small arrays</a:t>
+            </a:r>
+          </a:p>
+          <a:p>
+            <a:pPr lvl="1">
+              <a:spcAft>
+                <a:spcPts val="0"/>
+              </a:spcAft>
+            </a:pPr>
+            <a:r>
+              <a:rPr lang="en-US" altLang="zh-TW" sz="2000" dirty="0"/>
+              <a:t>LLM decode: 0–8% on any systolic array — why LLM accelerators moved to GEMV / PIM</a:t>
+            </a:r>
+          </a:p>
+          <a:p>
+            <a:pPr>
+              <a:spcAft>
+                <a:spcPts val="0"/>
+              </a:spcAft>
+            </a:pPr>
+            <a:r>
+              <a:rPr lang="en-US" altLang="zh-TW" sz="2400" dirty="0"/>
+              <a:t>Weight residency pays off only with small arrays (π0 chunk 38.0 → 22.9 ms on Thor)</a:t>
+            </a:r>
+          </a:p>
+        </p:txBody>
+      </p:sp>
+      <p:sp>
+        <p:nvSpPr>
+          <p:cNvPr id="3" name="副標題 2">
+            <a:extLst>
+              <a:ext uri="{FF2B5EF4-FFF2-40B4-BE49-F238E27FC236}">
+                <a16:creationId xmlns:a16="http://schemas.microsoft.com/office/drawing/2014/main" id="{0D642BDC-5B19-506B-CC3D-CAF272E3FB6A}"/>
+              </a:ext>
+            </a:extLst>
+          </p:cNvPr>
+          <p:cNvSpPr>
+            <a:spLocks noGrp="1"/>
+          </p:cNvSpPr>
+          <p:nvPr>
+            <p:ph type="title"/>
+          </p:nvPr>
+        </p:nvSpPr>
+        <p:spPr>
+          <a:xfrm>
+            <a:off x="609600" y="317155"/>
+            <a:ext cx="10972800" cy="582594"/>
+          </a:xfrm>
+        </p:spPr>
+        <p:txBody>
+          <a:bodyPr wrap="square" anchor="ctr">
+            <a:normAutofit fontScale="90000"/>
+          </a:bodyPr>
+          <a:lstStyle/>
+          <a:p>
+            <a:r>
+              <a:rPr lang="en-US" altLang="zh-TW" dirty="0"/>
+              <a:t>Systolic-Array Simulation</a:t>
+            </a:r>
+            <a:endParaRPr lang="en-US" altLang="zh-TW" dirty="0">
+              <a:latin typeface="+mn-ea"/>
+              <a:cs typeface="Times New Roman" panose="02020603050405020304" pitchFamily="18" charset="0"/>
+            </a:endParaRPr>
+          </a:p>
+        </p:txBody>
+      </p:sp>
+      <p:sp>
+        <p:nvSpPr>
+          <p:cNvPr id="2" name="投影片編號版面配置區 1">
+            <a:extLst>
+              <a:ext uri="{FF2B5EF4-FFF2-40B4-BE49-F238E27FC236}">
+                <a16:creationId xmlns:a16="http://schemas.microsoft.com/office/drawing/2014/main" id="{9B73AECC-E727-FB48-3345-1117D9DF8296}"/>
+              </a:ext>
+            </a:extLst>
+          </p:cNvPr>
+          <p:cNvSpPr>
+            <a:spLocks noGrp="1"/>
+          </p:cNvSpPr>
+          <p:nvPr>
+            <p:ph type="sldNum" sz="quarter" idx="12"/>
+          </p:nvPr>
+        </p:nvSpPr>
+        <p:spPr/>
+        <p:txBody>
+          <a:bodyPr/>
+          <a:lstStyle/>
+          <a:p>
+            <a:fld id="{E61F77C1-B770-47FB-877F-E631DD26508E}" type="slidenum">
+              <a:rPr lang="zh-TW" altLang="en-US" smtClean="0"/>
+              <a:t>2</a:t>
+            </a:fld>
+            <a:endParaRPr lang="zh-TW" altLang="en-US" dirty="0"/>
+          </a:p>
+        </p:txBody>
+      </p:sp>
+      <p:pic>
+        <p:nvPicPr>
+          <p:cNvPr id="40" name="Figure 40" descr="systolic figure"/>
+          <p:cNvPicPr>
+            <a:picLocks noChangeAspect="1"/>
+          </p:cNvPicPr>
+          <p:nvPr/>
+        </p:nvPicPr>
+        <p:blipFill>
+          <a:blip r:embed="rId50"/>
+          <a:stretch>
+            <a:fillRect/>
+          </a:stretch>
+        </p:blipFill>
+        <p:spPr>
+          <a:xfrm>
+            <a:off x="3169920" y="2926080"/>
+            <a:ext cx="5852160" cy="3256854"/>
+          </a:xfrm>
+          <a:prstGeom prst="rect">
+            <a:avLst/>
+          </a:prstGeom>
+        </p:spPr>
+      </p:pic>
+    </p:spTree>
+    <p:extLst>
+      <p:ext uri="{BB962C8B-B14F-4D97-AF65-F5344CB8AC3E}">
+        <p14:creationId xmlns:p14="http://schemas.microsoft.com/office/powerpoint/2010/main" val="340821465"/>
+      </p:ext>
+    </p:extLst>
+  </p:cSld>
+  <p:clrMapOvr>
+    <a:masterClrMapping/>
+  </p:clrMapOvr>
+</p:sld>
+</file>
+
+<file path=ppt/slides/slide22.xml><?xml version="1.0" encoding="utf-8"?>
+<p:sld xmlns:a="http://schemas.openxmlformats.org/drawingml/2006/main" xmlns:r="http://schemas.openxmlformats.org/officeDocument/2006/relationships" xmlns:p="http://schemas.openxmlformats.org/presentationml/2006/main">
+  <p:cSld>
+    <p:spTree>
+      <p:nvGrpSpPr>
+        <p:cNvPr id="1" name="">
+          <a:extLst>
+            <a:ext uri="{FF2B5EF4-FFF2-40B4-BE49-F238E27FC236}">
+              <a16:creationId xmlns:a16="http://schemas.microsoft.com/office/drawing/2014/main" id="{D3360C21-ECAB-84A5-87AC-3F78426689AE}"/>
+            </a:ext>
+          </a:extLst>
+        </p:cNvPr>
+        <p:cNvGrpSpPr/>
+        <p:nvPr/>
+      </p:nvGrpSpPr>
+      <p:grpSpPr>
+        <a:xfrm>
+          <a:off x="0" y="0"/>
+          <a:ext cx="0" cy="0"/>
+          <a:chOff x="0" y="0"/>
+          <a:chExt cx="0" cy="0"/>
+        </a:xfrm>
+      </p:grpSpPr>
+      <p:sp>
+        <p:nvSpPr>
+          <p:cNvPr id="12" name="內容版面配置區 5">
+            <a:extLst>
+              <a:ext uri="{FF2B5EF4-FFF2-40B4-BE49-F238E27FC236}">
+                <a16:creationId xmlns:a16="http://schemas.microsoft.com/office/drawing/2014/main" id="{98A79EE8-057B-9F45-406A-BCEA24834930}"/>
+              </a:ext>
+            </a:extLst>
+          </p:cNvPr>
+          <p:cNvSpPr txBox="1">
+            <a:spLocks/>
+          </p:cNvSpPr>
+          <p:nvPr/>
+        </p:nvSpPr>
+        <p:spPr bwMode="auto">
+          <a:xfrm>
+            <a:off x="609600" y="1175657"/>
+            <a:ext cx="10972800" cy="1783080"/>
+          </a:xfrm>
+          <a:prstGeom prst="rect">
+            <a:avLst/>
+          </a:prstGeom>
+          <a:noFill/>
+          <a:ln w="9525">
+            <a:noFill/>
+            <a:miter lim="800000"/>
+            <a:headEnd/>
+            <a:tailEnd/>
+          </a:ln>
+        </p:spPr>
+        <p:txBody>
+          <a:bodyPr vert="horz" wrap="square" lIns="91440" tIns="45720" rIns="91440" bIns="45720" numCol="1" anchor="t" anchorCtr="0" compatLnSpc="1">
+            <a:prstTxWarp prst="textNoShape">
+              <a:avLst/>
+            </a:prstTxWarp>
+            <a:normAutofit/>
+          </a:bodyPr>
+          <a:lstStyle>
+            <a:lvl1pPr marL="342891" indent="-342891" algn="l" rtl="0" eaLnBrk="1" fontAlgn="base" hangingPunct="1">
+              <a:spcBef>
+                <a:spcPct val="20000"/>
+              </a:spcBef>
+              <a:spcAft>
+                <a:spcPct val="0"/>
+              </a:spcAft>
+              <a:buFont typeface="Arial" charset="0"/>
+              <a:buChar char="•"/>
+              <a:defRPr sz="2800" kern="1200">
+                <a:solidFill>
+                  <a:schemeClr val="tx1"/>
+                </a:solidFill>
+                <a:latin typeface="+mn-lt"/>
+                <a:ea typeface="+mn-ea"/>
+                <a:cs typeface="+mn-cs"/>
+              </a:defRPr>
+            </a:lvl1pPr>
+            <a:lvl2pPr marL="742932" indent="-285744" algn="l" rtl="0" eaLnBrk="1" fontAlgn="base" hangingPunct="1">
+              <a:spcBef>
+                <a:spcPct val="20000"/>
+              </a:spcBef>
+              <a:spcAft>
+                <a:spcPct val="0"/>
+              </a:spcAft>
+              <a:buFont typeface="Arial" charset="0"/>
+              <a:buChar char="–"/>
+              <a:defRPr sz="2400" kern="1200">
+                <a:solidFill>
+                  <a:schemeClr val="accent1">
+                    <a:lumMod val="75000"/>
+                  </a:schemeClr>
+                </a:solidFill>
+                <a:latin typeface="+mn-lt"/>
+                <a:ea typeface="+mn-ea"/>
+                <a:cs typeface="+mn-cs"/>
+              </a:defRPr>
+            </a:lvl2pPr>
+            <a:lvl3pPr marL="1142971" indent="-228594" algn="l" rtl="0" eaLnBrk="1" fontAlgn="base" hangingPunct="1">
+              <a:spcBef>
+                <a:spcPct val="20000"/>
+              </a:spcBef>
+              <a:spcAft>
+                <a:spcPct val="0"/>
+              </a:spcAft>
+              <a:buFont typeface="Arial" charset="0"/>
+              <a:buChar char="•"/>
+              <a:defRPr sz="2000" kern="1200">
+                <a:solidFill>
+                  <a:schemeClr val="accent1"/>
+                </a:solidFill>
+                <a:latin typeface="+mn-lt"/>
+                <a:ea typeface="+mn-ea"/>
+                <a:cs typeface="+mn-cs"/>
+              </a:defRPr>
+            </a:lvl3pPr>
+            <a:lvl4pPr marL="1600160" indent="-228594" algn="l" rtl="0" eaLnBrk="1" fontAlgn="base" hangingPunct="1">
+              <a:spcBef>
+                <a:spcPct val="20000"/>
+              </a:spcBef>
+              <a:spcAft>
+                <a:spcPct val="0"/>
+              </a:spcAft>
+              <a:buFont typeface="Arial" charset="0"/>
+              <a:buChar char="–"/>
+              <a:defRPr sz="1800" kern="1200">
+                <a:solidFill>
+                  <a:schemeClr val="accent6">
+                    <a:lumMod val="75000"/>
+                  </a:schemeClr>
+                </a:solidFill>
+                <a:latin typeface="+mn-lt"/>
+                <a:ea typeface="+mn-ea"/>
+                <a:cs typeface="+mn-cs"/>
+              </a:defRPr>
+            </a:lvl4pPr>
+            <a:lvl5pPr marL="2057349" indent="-228594" algn="l" rtl="0" eaLnBrk="1" fontAlgn="base" hangingPunct="1">
+              <a:spcBef>
+                <a:spcPct val="20000"/>
+              </a:spcBef>
+              <a:spcAft>
+                <a:spcPct val="0"/>
+              </a:spcAft>
+              <a:buFont typeface="Arial" charset="0"/>
+              <a:buChar char="»"/>
+              <a:defRPr sz="1800" kern="1200">
+                <a:solidFill>
+                  <a:schemeClr val="accent6"/>
+                </a:solidFill>
+                <a:latin typeface="+mn-lt"/>
+                <a:ea typeface="+mn-ea"/>
+                <a:cs typeface="+mn-cs"/>
+              </a:defRPr>
+            </a:lvl5pPr>
+            <a:lvl6pPr marL="2514537" indent="-228594" algn="l" defTabSz="914377" rtl="0" eaLnBrk="1" latinLnBrk="0" hangingPunct="1">
+              <a:spcBef>
+                <a:spcPct val="20000"/>
+              </a:spcBef>
+              <a:buFont typeface="Arial" pitchFamily="34" charset="0"/>
+              <a:buChar char="•"/>
+              <a:defRPr sz="2000" kern="1200">
+                <a:solidFill>
+                  <a:schemeClr val="tx1"/>
+                </a:solidFill>
+                <a:latin typeface="+mn-lt"/>
+                <a:ea typeface="+mn-ea"/>
+                <a:cs typeface="+mn-cs"/>
+              </a:defRPr>
+            </a:lvl6pPr>
+            <a:lvl7pPr marL="2971726" indent="-228594" algn="l" defTabSz="914377" rtl="0" eaLnBrk="1" latinLnBrk="0" hangingPunct="1">
+              <a:spcBef>
+                <a:spcPct val="20000"/>
+              </a:spcBef>
+              <a:buFont typeface="Arial" pitchFamily="34" charset="0"/>
+              <a:buChar char="•"/>
+              <a:defRPr sz="2000" kern="1200">
+                <a:solidFill>
+                  <a:schemeClr val="tx1"/>
+                </a:solidFill>
+                <a:latin typeface="+mn-lt"/>
+                <a:ea typeface="+mn-ea"/>
+                <a:cs typeface="+mn-cs"/>
+              </a:defRPr>
+            </a:lvl7pPr>
+            <a:lvl8pPr marL="3428914" indent="-228594" algn="l" defTabSz="914377" rtl="0" eaLnBrk="1" latinLnBrk="0" hangingPunct="1">
+              <a:spcBef>
+                <a:spcPct val="20000"/>
+              </a:spcBef>
+              <a:buFont typeface="Arial" pitchFamily="34" charset="0"/>
+              <a:buChar char="•"/>
+              <a:defRPr sz="2000" kern="1200">
+                <a:solidFill>
+                  <a:schemeClr val="tx1"/>
+                </a:solidFill>
+                <a:latin typeface="+mn-lt"/>
+                <a:ea typeface="+mn-ea"/>
+                <a:cs typeface="+mn-cs"/>
+              </a:defRPr>
+            </a:lvl8pPr>
+            <a:lvl9pPr marL="3886103" indent="-228594" algn="l" defTabSz="914377" rtl="0" eaLnBrk="1" latinLnBrk="0" hangingPunct="1">
+              <a:spcBef>
+                <a:spcPct val="20000"/>
+              </a:spcBef>
+              <a:buFont typeface="Arial" pitchFamily="34" charset="0"/>
+              <a:buChar char="•"/>
+              <a:defRPr sz="2000" kern="1200">
+                <a:solidFill>
+                  <a:schemeClr val="tx1"/>
+                </a:solidFill>
+                <a:latin typeface="+mn-lt"/>
+                <a:ea typeface="+mn-ea"/>
+                <a:cs typeface="+mn-cs"/>
+              </a:defRPr>
+            </a:lvl9pPr>
+          </a:lstStyle>
+          <a:p>
+            <a:pPr>
+              <a:spcAft>
+                <a:spcPts val="0"/>
+              </a:spcAft>
+            </a:pPr>
+            <a:r>
+              <a:rPr lang="en-US" altLang="zh-TW" sz="2400" dirty="0"/>
+              <a:t>Wan2.2-5B video trunk + 1B action expert; four streams denoised jointly</a:t>
+            </a:r>
+          </a:p>
+          <a:p>
+            <a:pPr lvl="1">
+              <a:spcAft>
+                <a:spcPts val="0"/>
+              </a:spcAft>
+            </a:pPr>
+            <a:r>
+              <a:rPr lang="en-US" altLang="zh-TW" sz="2000" dirty="0"/>
+              <a:t>Prefill: 387 observed anchor tokens pass through the 5B trunk once per call</a:t>
+            </a:r>
+          </a:p>
+          <a:p>
+            <a:pPr lvl="1">
+              <a:spcAft>
+                <a:spcPts val="0"/>
+              </a:spcAft>
+            </a:pPr>
+            <a:r>
+              <a:rPr lang="en-US" altLang="zh-TW" sz="2000" dirty="0"/>
+              <a:t>Decode: 4 Euler steps; action-only (32 tokens) or full joint (806 tokens)</a:t>
+            </a:r>
+          </a:p>
+          <a:p>
+            <a:pPr lvl="1">
+              <a:spcAft>
+                <a:spcPts val="0"/>
+              </a:spcAft>
+            </a:pPr>
+            <a:r>
+              <a:rPr lang="en-US" altLang="zh-TW" sz="2000" dirty="0"/>
+              <a:t>Counted FLOPs match official RTX 5090 latency at 85–93% in joint modes</a:t>
+            </a:r>
+          </a:p>
+          <a:p>
+            <a:pPr>
+              <a:spcAft>
+                <a:spcPts val="0"/>
+              </a:spcAft>
+            </a:pPr>
+            <a:r>
+              <a:rPr lang="en-US" altLang="zh-TW" sz="2400" dirty="0"/>
+              <a:t>Prefill, not decode, dominates action-only latency on edge hardware</a:t>
+            </a:r>
+          </a:p>
+        </p:txBody>
+      </p:sp>
+      <p:sp>
+        <p:nvSpPr>
+          <p:cNvPr id="3" name="副標題 2">
+            <a:extLst>
+              <a:ext uri="{FF2B5EF4-FFF2-40B4-BE49-F238E27FC236}">
+                <a16:creationId xmlns:a16="http://schemas.microsoft.com/office/drawing/2014/main" id="{0D642BDC-5B19-506B-CC3D-CAF272E3FB6A}"/>
+              </a:ext>
+            </a:extLst>
+          </p:cNvPr>
+          <p:cNvSpPr>
+            <a:spLocks noGrp="1"/>
+          </p:cNvSpPr>
+          <p:nvPr>
+            <p:ph type="title"/>
+          </p:nvPr>
+        </p:nvSpPr>
+        <p:spPr>
+          <a:xfrm>
+            <a:off x="609600" y="317155"/>
+            <a:ext cx="10972800" cy="582594"/>
+          </a:xfrm>
+        </p:spPr>
+        <p:txBody>
+          <a:bodyPr wrap="square" anchor="ctr">
+            <a:normAutofit fontScale="90000"/>
+          </a:bodyPr>
+          <a:lstStyle/>
+          <a:p>
+            <a:r>
+              <a:rPr lang="en-US" altLang="zh-TW" dirty="0"/>
+              <a:t>Case Study: Flex-π (6B World-Action Model)</a:t>
+            </a:r>
+            <a:endParaRPr lang="en-US" altLang="zh-TW" dirty="0">
+              <a:latin typeface="+mn-ea"/>
+              <a:cs typeface="Times New Roman" panose="02020603050405020304" pitchFamily="18" charset="0"/>
+            </a:endParaRPr>
+          </a:p>
+        </p:txBody>
+      </p:sp>
+      <p:sp>
+        <p:nvSpPr>
+          <p:cNvPr id="2" name="投影片編號版面配置區 1">
+            <a:extLst>
+              <a:ext uri="{FF2B5EF4-FFF2-40B4-BE49-F238E27FC236}">
+                <a16:creationId xmlns:a16="http://schemas.microsoft.com/office/drawing/2014/main" id="{9B73AECC-E727-FB48-3345-1117D9DF8296}"/>
+              </a:ext>
+            </a:extLst>
+          </p:cNvPr>
+          <p:cNvSpPr>
+            <a:spLocks noGrp="1"/>
+          </p:cNvSpPr>
+          <p:nvPr>
+            <p:ph type="sldNum" sz="quarter" idx="12"/>
+          </p:nvPr>
+        </p:nvSpPr>
+        <p:spPr/>
+        <p:txBody>
+          <a:bodyPr/>
+          <a:lstStyle/>
+          <a:p>
+            <a:fld id="{E61F77C1-B770-47FB-877F-E631DD26508E}" type="slidenum">
+              <a:rPr lang="zh-TW" altLang="en-US" smtClean="0"/>
+              <a:t>2</a:t>
+            </a:fld>
+            <a:endParaRPr lang="zh-TW" altLang="en-US" dirty="0"/>
+          </a:p>
+        </p:txBody>
+      </p:sp>
+      <p:pic>
+        <p:nvPicPr>
+          <p:cNvPr id="40" name="Figure 40" descr="flexpi figure"/>
+          <p:cNvPicPr>
+            <a:picLocks noChangeAspect="1"/>
+          </p:cNvPicPr>
+          <p:nvPr/>
+        </p:nvPicPr>
+        <p:blipFill>
+          <a:blip r:embed="rId50"/>
+          <a:stretch>
+            <a:fillRect/>
+          </a:stretch>
+        </p:blipFill>
+        <p:spPr>
+          <a:xfrm>
+            <a:off x="1706880" y="2971800"/>
+            <a:ext cx="8778240" cy="3385893"/>
+          </a:xfrm>
+          <a:prstGeom prst="rect">
+            <a:avLst/>
+          </a:prstGeom>
+        </p:spPr>
+      </p:pic>
+    </p:spTree>
+    <p:extLst>
+      <p:ext uri="{BB962C8B-B14F-4D97-AF65-F5344CB8AC3E}">
+        <p14:creationId xmlns:p14="http://schemas.microsoft.com/office/powerpoint/2010/main" val="340821465"/>
+      </p:ext>
+    </p:extLst>
+  </p:cSld>
+  <p:clrMapOvr>
+    <a:masterClrMapping/>
+  </p:clrMapOvr>
+</p:sld>
+</file>
+
+<file path=ppt/slides/slide23.xml><?xml version="1.0" encoding="utf-8"?>
+<p:sld xmlns:a="http://schemas.openxmlformats.org/drawingml/2006/main" xmlns:r="http://schemas.openxmlformats.org/officeDocument/2006/relationships" xmlns:p="http://schemas.openxmlformats.org/presentationml/2006/main">
+  <p:cSld>
+    <p:spTree>
+      <p:nvGrpSpPr>
+        <p:cNvPr id="1" name="">
+          <a:extLst>
+            <a:ext uri="{FF2B5EF4-FFF2-40B4-BE49-F238E27FC236}">
+              <a16:creationId xmlns:a16="http://schemas.microsoft.com/office/drawing/2014/main" id="{D3360C21-ECAB-84A5-87AC-3F78426689AE}"/>
+            </a:ext>
+          </a:extLst>
+        </p:cNvPr>
+        <p:cNvGrpSpPr/>
+        <p:nvPr/>
+      </p:nvGrpSpPr>
+      <p:grpSpPr>
+        <a:xfrm>
+          <a:off x="0" y="0"/>
+          <a:ext cx="0" cy="0"/>
+          <a:chOff x="0" y="0"/>
+          <a:chExt cx="0" cy="0"/>
+        </a:xfrm>
+      </p:grpSpPr>
+      <p:sp>
+        <p:nvSpPr>
+          <p:cNvPr id="12" name="內容版面配置區 5">
+            <a:extLst>
+              <a:ext uri="{FF2B5EF4-FFF2-40B4-BE49-F238E27FC236}">
+                <a16:creationId xmlns:a16="http://schemas.microsoft.com/office/drawing/2014/main" id="{98A79EE8-057B-9F45-406A-BCEA24834930}"/>
+              </a:ext>
+            </a:extLst>
+          </p:cNvPr>
+          <p:cNvSpPr txBox="1">
+            <a:spLocks/>
+          </p:cNvSpPr>
+          <p:nvPr/>
+        </p:nvSpPr>
+        <p:spPr bwMode="auto">
+          <a:xfrm>
+            <a:off x="609600" y="1175657"/>
+            <a:ext cx="10972800" cy="1600200"/>
+          </a:xfrm>
+          <a:prstGeom prst="rect">
+            <a:avLst/>
+          </a:prstGeom>
+          <a:noFill/>
+          <a:ln w="9525">
+            <a:noFill/>
+            <a:miter lim="800000"/>
+            <a:headEnd/>
+            <a:tailEnd/>
+          </a:ln>
+        </p:spPr>
+        <p:txBody>
+          <a:bodyPr vert="horz" wrap="square" lIns="91440" tIns="45720" rIns="91440" bIns="45720" numCol="1" anchor="t" anchorCtr="0" compatLnSpc="1">
+            <a:prstTxWarp prst="textNoShape">
+              <a:avLst/>
+            </a:prstTxWarp>
+            <a:normAutofit/>
+          </a:bodyPr>
+          <a:lstStyle>
+            <a:lvl1pPr marL="342891" indent="-342891" algn="l" rtl="0" eaLnBrk="1" fontAlgn="base" hangingPunct="1">
+              <a:spcBef>
+                <a:spcPct val="20000"/>
+              </a:spcBef>
+              <a:spcAft>
+                <a:spcPct val="0"/>
+              </a:spcAft>
+              <a:buFont typeface="Arial" charset="0"/>
+              <a:buChar char="•"/>
+              <a:defRPr sz="2800" kern="1200">
+                <a:solidFill>
+                  <a:schemeClr val="tx1"/>
+                </a:solidFill>
+                <a:latin typeface="+mn-lt"/>
+                <a:ea typeface="+mn-ea"/>
+                <a:cs typeface="+mn-cs"/>
+              </a:defRPr>
+            </a:lvl1pPr>
+            <a:lvl2pPr marL="742932" indent="-285744" algn="l" rtl="0" eaLnBrk="1" fontAlgn="base" hangingPunct="1">
+              <a:spcBef>
+                <a:spcPct val="20000"/>
+              </a:spcBef>
+              <a:spcAft>
+                <a:spcPct val="0"/>
+              </a:spcAft>
+              <a:buFont typeface="Arial" charset="0"/>
+              <a:buChar char="–"/>
+              <a:defRPr sz="2400" kern="1200">
+                <a:solidFill>
+                  <a:schemeClr val="accent1">
+                    <a:lumMod val="75000"/>
+                  </a:schemeClr>
+                </a:solidFill>
+                <a:latin typeface="+mn-lt"/>
+                <a:ea typeface="+mn-ea"/>
+                <a:cs typeface="+mn-cs"/>
+              </a:defRPr>
+            </a:lvl2pPr>
+            <a:lvl3pPr marL="1142971" indent="-228594" algn="l" rtl="0" eaLnBrk="1" fontAlgn="base" hangingPunct="1">
+              <a:spcBef>
+                <a:spcPct val="20000"/>
+              </a:spcBef>
+              <a:spcAft>
+                <a:spcPct val="0"/>
+              </a:spcAft>
+              <a:buFont typeface="Arial" charset="0"/>
+              <a:buChar char="•"/>
+              <a:defRPr sz="2000" kern="1200">
+                <a:solidFill>
+                  <a:schemeClr val="accent1"/>
+                </a:solidFill>
+                <a:latin typeface="+mn-lt"/>
+                <a:ea typeface="+mn-ea"/>
+                <a:cs typeface="+mn-cs"/>
+              </a:defRPr>
+            </a:lvl3pPr>
+            <a:lvl4pPr marL="1600160" indent="-228594" algn="l" rtl="0" eaLnBrk="1" fontAlgn="base" hangingPunct="1">
+              <a:spcBef>
+                <a:spcPct val="20000"/>
+              </a:spcBef>
+              <a:spcAft>
+                <a:spcPct val="0"/>
+              </a:spcAft>
+              <a:buFont typeface="Arial" charset="0"/>
+              <a:buChar char="–"/>
+              <a:defRPr sz="1800" kern="1200">
+                <a:solidFill>
+                  <a:schemeClr val="accent6">
+                    <a:lumMod val="75000"/>
+                  </a:schemeClr>
+                </a:solidFill>
+                <a:latin typeface="+mn-lt"/>
+                <a:ea typeface="+mn-ea"/>
+                <a:cs typeface="+mn-cs"/>
+              </a:defRPr>
+            </a:lvl4pPr>
+            <a:lvl5pPr marL="2057349" indent="-228594" algn="l" rtl="0" eaLnBrk="1" fontAlgn="base" hangingPunct="1">
+              <a:spcBef>
+                <a:spcPct val="20000"/>
+              </a:spcBef>
+              <a:spcAft>
+                <a:spcPct val="0"/>
+              </a:spcAft>
+              <a:buFont typeface="Arial" charset="0"/>
+              <a:buChar char="»"/>
+              <a:defRPr sz="1800" kern="1200">
+                <a:solidFill>
+                  <a:schemeClr val="accent6"/>
+                </a:solidFill>
+                <a:latin typeface="+mn-lt"/>
+                <a:ea typeface="+mn-ea"/>
+                <a:cs typeface="+mn-cs"/>
+              </a:defRPr>
+            </a:lvl5pPr>
+            <a:lvl6pPr marL="2514537" indent="-228594" algn="l" defTabSz="914377" rtl="0" eaLnBrk="1" latinLnBrk="0" hangingPunct="1">
+              <a:spcBef>
+                <a:spcPct val="20000"/>
+              </a:spcBef>
+              <a:buFont typeface="Arial" pitchFamily="34" charset="0"/>
+              <a:buChar char="•"/>
+              <a:defRPr sz="2000" kern="1200">
+                <a:solidFill>
+                  <a:schemeClr val="tx1"/>
+                </a:solidFill>
+                <a:latin typeface="+mn-lt"/>
+                <a:ea typeface="+mn-ea"/>
+                <a:cs typeface="+mn-cs"/>
+              </a:defRPr>
+            </a:lvl6pPr>
+            <a:lvl7pPr marL="2971726" indent="-228594" algn="l" defTabSz="914377" rtl="0" eaLnBrk="1" latinLnBrk="0" hangingPunct="1">
+              <a:spcBef>
+                <a:spcPct val="20000"/>
+              </a:spcBef>
+              <a:buFont typeface="Arial" pitchFamily="34" charset="0"/>
+              <a:buChar char="•"/>
+              <a:defRPr sz="2000" kern="1200">
+                <a:solidFill>
+                  <a:schemeClr val="tx1"/>
+                </a:solidFill>
+                <a:latin typeface="+mn-lt"/>
+                <a:ea typeface="+mn-ea"/>
+                <a:cs typeface="+mn-cs"/>
+              </a:defRPr>
+            </a:lvl7pPr>
+            <a:lvl8pPr marL="3428914" indent="-228594" algn="l" defTabSz="914377" rtl="0" eaLnBrk="1" latinLnBrk="0" hangingPunct="1">
+              <a:spcBef>
+                <a:spcPct val="20000"/>
+              </a:spcBef>
+              <a:buFont typeface="Arial" pitchFamily="34" charset="0"/>
+              <a:buChar char="•"/>
+              <a:defRPr sz="2000" kern="1200">
+                <a:solidFill>
+                  <a:schemeClr val="tx1"/>
+                </a:solidFill>
+                <a:latin typeface="+mn-lt"/>
+                <a:ea typeface="+mn-ea"/>
+                <a:cs typeface="+mn-cs"/>
+              </a:defRPr>
+            </a:lvl8pPr>
+            <a:lvl9pPr marL="3886103" indent="-228594" algn="l" defTabSz="914377" rtl="0" eaLnBrk="1" latinLnBrk="0" hangingPunct="1">
+              <a:spcBef>
+                <a:spcPct val="20000"/>
+              </a:spcBef>
+              <a:buFont typeface="Arial" pitchFamily="34" charset="0"/>
+              <a:buChar char="•"/>
+              <a:defRPr sz="2000" kern="1200">
+                <a:solidFill>
+                  <a:schemeClr val="tx1"/>
+                </a:solidFill>
+                <a:latin typeface="+mn-lt"/>
+                <a:ea typeface="+mn-ea"/>
+                <a:cs typeface="+mn-cs"/>
+              </a:defRPr>
+            </a:lvl9pPr>
+          </a:lstStyle>
+          <a:p>
+            <a:pPr>
+              <a:spcAft>
+                <a:spcPts val="0"/>
+              </a:spcAft>
+            </a:pPr>
+            <a:r>
+              <a:rPr lang="en-US" altLang="zh-TW" sz="2400" dirty="0"/>
+              <a:t>Exact-equivalence optimizations found in the official code</a:t>
+            </a:r>
+          </a:p>
+          <a:p>
+            <a:pPr lvl="1">
+              <a:spcAft>
+                <a:spcPts val="0"/>
+              </a:spcAft>
+            </a:pPr>
+            <a:r>
+              <a:rPr lang="en-US" altLang="zh-TW" sz="2000" dirty="0"/>
+              <a:t>Action-only prefill: top 7 of 30 trunk layers are dead code (26% of prefill)</a:t>
+            </a:r>
+          </a:p>
+          <a:p>
+            <a:pPr lvl="1">
+              <a:spcAft>
+                <a:spcPts val="0"/>
+              </a:spcAft>
+            </a:pPr>
+            <a:r>
+              <a:rPr lang="en-US" altLang="zh-TW" sz="2000" dirty="0"/>
+              <a:t>Text cross-attention K/V recomputed every step, though constant per episode</a:t>
+            </a:r>
+          </a:p>
+          <a:p>
+            <a:pPr lvl="1">
+              <a:spcAft>
+                <a:spcPts val="0"/>
+              </a:spcAft>
+            </a:pPr>
+            <a:r>
+              <a:rPr lang="en-US" altLang="zh-TW" sz="2000" dirty="0"/>
+              <a:t>Anchor K/V (143 MB) is a per-call step invariant, not a cross-call cache</a:t>
+            </a:r>
+          </a:p>
+        </p:txBody>
+      </p:sp>
+      <p:sp>
+        <p:nvSpPr>
+          <p:cNvPr id="3" name="副標題 2">
+            <a:extLst>
+              <a:ext uri="{FF2B5EF4-FFF2-40B4-BE49-F238E27FC236}">
+                <a16:creationId xmlns:a16="http://schemas.microsoft.com/office/drawing/2014/main" id="{0D642BDC-5B19-506B-CC3D-CAF272E3FB6A}"/>
+              </a:ext>
+            </a:extLst>
+          </p:cNvPr>
+          <p:cNvSpPr>
+            <a:spLocks noGrp="1"/>
+          </p:cNvSpPr>
+          <p:nvPr>
+            <p:ph type="title"/>
+          </p:nvPr>
+        </p:nvSpPr>
+        <p:spPr>
+          <a:xfrm>
+            <a:off x="609600" y="317155"/>
+            <a:ext cx="10972800" cy="582594"/>
+          </a:xfrm>
+        </p:spPr>
+        <p:txBody>
+          <a:bodyPr wrap="square" anchor="ctr">
+            <a:normAutofit fontScale="90000"/>
+          </a:bodyPr>
+          <a:lstStyle/>
+          <a:p>
+            <a:r>
+              <a:rPr lang="en-US" altLang="zh-TW" dirty="0"/>
+              <a:t>Case Study: Flex-π Design Space (Thor-class)</a:t>
+            </a:r>
+            <a:endParaRPr lang="en-US" altLang="zh-TW" dirty="0">
+              <a:latin typeface="+mn-ea"/>
+              <a:cs typeface="Times New Roman" panose="02020603050405020304" pitchFamily="18" charset="0"/>
+            </a:endParaRPr>
+          </a:p>
+        </p:txBody>
+      </p:sp>
+      <p:sp>
+        <p:nvSpPr>
+          <p:cNvPr id="2" name="投影片編號版面配置區 1">
+            <a:extLst>
+              <a:ext uri="{FF2B5EF4-FFF2-40B4-BE49-F238E27FC236}">
+                <a16:creationId xmlns:a16="http://schemas.microsoft.com/office/drawing/2014/main" id="{9B73AECC-E727-FB48-3345-1117D9DF8296}"/>
+              </a:ext>
+            </a:extLst>
+          </p:cNvPr>
+          <p:cNvSpPr>
+            <a:spLocks noGrp="1"/>
+          </p:cNvSpPr>
+          <p:nvPr>
+            <p:ph type="sldNum" sz="quarter" idx="12"/>
+          </p:nvPr>
+        </p:nvSpPr>
+        <p:spPr/>
+        <p:txBody>
+          <a:bodyPr/>
+          <a:lstStyle/>
+          <a:p>
+            <a:fld id="{E61F77C1-B770-47FB-877F-E631DD26508E}" type="slidenum">
+              <a:rPr lang="zh-TW" altLang="en-US" smtClean="0"/>
+              <a:t>2</a:t>
+            </a:fld>
+            <a:endParaRPr lang="zh-TW" altLang="en-US" dirty="0"/>
+          </a:p>
+        </p:txBody>
+      </p:sp>
+      <p:graphicFrame>
+        <p:nvGraphicFramePr>
+          <p:cNvPr id="40" name="Table 40"/>
+          <p:cNvGraphicFramePr>
+            <a:graphicFrameLocks noGrp="1"/>
+          </p:cNvGraphicFramePr>
+          <p:nvPr/>
+        </p:nvGraphicFramePr>
+        <p:xfrm>
+          <a:off x="1066800" y="2788920"/>
+          <a:ext cx="10058400" cy="1865376"/>
+        </p:xfrm>
+        <a:graphic>
+          <a:graphicData uri="http://schemas.openxmlformats.org/drawingml/2006/table">
+            <a:tbl>
+              <a:tblPr firstRow="1"/>
+              <a:tblGrid>
+                <a:gridCol w="4937760"/>
+                <a:gridCol w="1691640"/>
+                <a:gridCol w="1691640"/>
+                <a:gridCol w="1737360"/>
+              </a:tblGrid>
+              <a:tr h="310896">
+                <a:tc>
+                  <a:txBody>
+                    <a:bodyPr/>
+                    <a:lstStyle/>
+                    <a:p>
+                      <a:pPr algn="l"/>
+                      <a:r>
+                        <a:rPr lang="en-US" altLang="zh-TW" sz="1400" b="1" dirty="0">
+                          <a:solidFill>
+                            <a:srgbClr val="000000"/>
+                          </a:solidFill>
+                        </a:rPr>
+                        <a:t>Design (action-only mode, ms)</a:t>
+                      </a:r>
+                    </a:p>
+                  </a:txBody>
+                  <a:tcPr marL="68580" marR="68580" marT="27432" marB="27432" anchor="ctr">
+                    <a:lnL w="0">
+                      <a:noFill/>
+                    </a:lnL>
+                    <a:lnR w="0">
+                      <a:noFill/>
+                    </a:lnR>
+                    <a:lnT w="19050">
+                      <a:solidFill>
+                        <a:srgbClr val="000000"/>
+                      </a:solidFill>
+                    </a:lnT>
+                    <a:lnB w="9525">
+                      <a:solidFill>
+                        <a:srgbClr val="000000"/>
+                      </a:solidFill>
+                    </a:lnB>
+                    <a:noFill/>
+                  </a:tcPr>
+                </a:tc>
+                <a:tc>
+                  <a:txBody>
+                    <a:bodyPr/>
+                    <a:lstStyle/>
+                    <a:p>
+                      <a:pPr algn="ctr"/>
+                      <a:r>
+                        <a:rPr lang="en-US" altLang="zh-TW" sz="1400" b="1" dirty="0">
+                          <a:solidFill>
+                            <a:srgbClr val="000000"/>
+                          </a:solidFill>
+                        </a:rPr>
+                        <a:t>Prefill</a:t>
+                      </a:r>
+                    </a:p>
+                  </a:txBody>
+                  <a:tcPr marL="68580" marR="68580" marT="27432" marB="27432" anchor="ctr">
+                    <a:lnL w="0">
+                      <a:noFill/>
+                    </a:lnL>
+                    <a:lnR w="0">
+                      <a:noFill/>
+                    </a:lnR>
+                    <a:lnT w="19050">
+                      <a:solidFill>
+                        <a:srgbClr val="000000"/>
+                      </a:solidFill>
+                    </a:lnT>
+                    <a:lnB w="9525">
+                      <a:solidFill>
+                        <a:srgbClr val="000000"/>
+                      </a:solidFill>
+                    </a:lnB>
+                    <a:noFill/>
+                  </a:tcPr>
+                </a:tc>
+                <a:tc>
+                  <a:txBody>
+                    <a:bodyPr/>
+                    <a:lstStyle/>
+                    <a:p>
+                      <a:pPr algn="ctr"/>
+                      <a:r>
+                        <a:rPr lang="en-US" altLang="zh-TW" sz="1400" b="1" dirty="0">
+                          <a:solidFill>
+                            <a:srgbClr val="000000"/>
+                          </a:solidFill>
+                        </a:rPr>
+                        <a:t>Decode ×4</a:t>
+                      </a:r>
+                    </a:p>
+                  </a:txBody>
+                  <a:tcPr marL="68580" marR="68580" marT="27432" marB="27432" anchor="ctr">
+                    <a:lnL w="0">
+                      <a:noFill/>
+                    </a:lnL>
+                    <a:lnR w="0">
+                      <a:noFill/>
+                    </a:lnR>
+                    <a:lnT w="19050">
+                      <a:solidFill>
+                        <a:srgbClr val="000000"/>
+                      </a:solidFill>
+                    </a:lnT>
+                    <a:lnB w="9525">
+                      <a:solidFill>
+                        <a:srgbClr val="000000"/>
+                      </a:solidFill>
+                    </a:lnB>
+                    <a:noFill/>
+                  </a:tcPr>
+                </a:tc>
+                <a:tc>
+                  <a:txBody>
+                    <a:bodyPr/>
+                    <a:lstStyle/>
+                    <a:p>
+                      <a:pPr algn="ctr"/>
+                      <a:r>
+                        <a:rPr lang="en-US" altLang="zh-TW" sz="1400" b="1" dirty="0">
+                          <a:solidFill>
+                            <a:srgbClr val="000000"/>
+                          </a:solidFill>
+                        </a:rPr>
+                        <a:t>Total*</a:t>
+                      </a:r>
+                    </a:p>
+                  </a:txBody>
+                  <a:tcPr marL="68580" marR="68580" marT="27432" marB="27432" anchor="ctr">
+                    <a:lnL w="0">
+                      <a:noFill/>
+                    </a:lnL>
+                    <a:lnR w="0">
+                      <a:noFill/>
+                    </a:lnR>
+                    <a:lnT w="19050">
+                      <a:solidFill>
+                        <a:srgbClr val="000000"/>
+                      </a:solidFill>
+                    </a:lnT>
+                    <a:lnB w="9525">
+                      <a:solidFill>
+                        <a:srgbClr val="000000"/>
+                      </a:solidFill>
+                    </a:lnB>
+                    <a:noFill/>
+                  </a:tcPr>
+                </a:tc>
+              </a:tr>
+              <a:tr h="310896">
+                <a:tc>
+                  <a:txBody>
+                    <a:bodyPr/>
+                    <a:lstStyle/>
+                    <a:p>
+                      <a:pPr algn="l"/>
+                      <a:r>
+                        <a:rPr lang="en-US" altLang="zh-TW" sz="1400" dirty="0">
+                          <a:solidFill>
+                            <a:srgbClr val="000000"/>
+                          </a:solidFill>
+                        </a:rPr>
+                        <a:t>BF16 ideal (baseline)</a:t>
+                      </a:r>
+                    </a:p>
+                  </a:txBody>
+                  <a:tcPr marL="68580" marR="68580" marT="27432" marB="27432" anchor="ctr">
+                    <a:lnL w="0">
+                      <a:noFill/>
+                    </a:lnL>
+                    <a:lnR w="0">
+                      <a:noFill/>
+                    </a:lnR>
+                    <a:lnT w="0">
+                      <a:noFill/>
+                    </a:lnT>
+                    <a:lnB w="0">
+                      <a:noFill/>
+                    </a:lnB>
+                    <a:noFill/>
+                  </a:tcPr>
+                </a:tc>
+                <a:tc>
+                  <a:txBody>
+                    <a:bodyPr/>
+                    <a:lstStyle/>
+                    <a:p>
+                      <a:pPr algn="ctr"/>
+                      <a:r>
+                        <a:rPr lang="en-US" altLang="zh-TW" sz="1400" dirty="0">
+                          <a:solidFill>
+                            <a:srgbClr val="000000"/>
+                          </a:solidFill>
+                        </a:rPr>
+                        <a:t>36.5</a:t>
+                      </a:r>
+                    </a:p>
+                  </a:txBody>
+                  <a:tcPr marL="68580" marR="68580" marT="27432" marB="27432" anchor="ctr">
+                    <a:lnL w="0">
+                      <a:noFill/>
+                    </a:lnL>
+                    <a:lnR w="0">
+                      <a:noFill/>
+                    </a:lnR>
+                    <a:lnT w="0">
+                      <a:noFill/>
+                    </a:lnT>
+                    <a:lnB w="0">
+                      <a:noFill/>
+                    </a:lnB>
+                    <a:noFill/>
+                  </a:tcPr>
+                </a:tc>
+                <a:tc>
+                  <a:txBody>
+                    <a:bodyPr/>
+                    <a:lstStyle/>
+                    <a:p>
+                      <a:pPr algn="ctr"/>
+                      <a:r>
+                        <a:rPr lang="en-US" altLang="zh-TW" sz="1400" dirty="0">
+                          <a:solidFill>
+                            <a:srgbClr val="000000"/>
+                          </a:solidFill>
+                        </a:rPr>
+                        <a:t>30.7</a:t>
+                      </a:r>
+                    </a:p>
+                  </a:txBody>
+                  <a:tcPr marL="68580" marR="68580" marT="27432" marB="27432" anchor="ctr">
+                    <a:lnL w="0">
+                      <a:noFill/>
+                    </a:lnL>
+                    <a:lnR w="0">
+                      <a:noFill/>
+                    </a:lnR>
+                    <a:lnT w="0">
+                      <a:noFill/>
+                    </a:lnT>
+                    <a:lnB w="0">
+                      <a:noFill/>
+                    </a:lnB>
+                    <a:noFill/>
+                  </a:tcPr>
+                </a:tc>
+                <a:tc>
+                  <a:txBody>
+                    <a:bodyPr/>
+                    <a:lstStyle/>
+                    <a:p>
+                      <a:pPr algn="ctr"/>
+                      <a:r>
+                        <a:rPr lang="en-US" altLang="zh-TW" sz="1400" dirty="0">
+                          <a:solidFill>
+                            <a:srgbClr val="000000"/>
+                          </a:solidFill>
+                        </a:rPr>
+                        <a:t>72.0</a:t>
+                      </a:r>
+                    </a:p>
+                  </a:txBody>
+                  <a:tcPr marL="68580" marR="68580" marT="27432" marB="27432" anchor="ctr">
+                    <a:lnL w="0">
+                      <a:noFill/>
+                    </a:lnL>
+                    <a:lnR w="0">
+                      <a:noFill/>
+                    </a:lnR>
+                    <a:lnT w="0">
+                      <a:noFill/>
+                    </a:lnT>
+                    <a:lnB w="0">
+                      <a:noFill/>
+                    </a:lnB>
+                    <a:noFill/>
+                  </a:tcPr>
+                </a:tc>
+              </a:tr>
+              <a:tr h="310896">
+                <a:tc>
+                  <a:txBody>
+                    <a:bodyPr/>
+                    <a:lstStyle/>
+                    <a:p>
+                      <a:pPr algn="l"/>
+                      <a:r>
+                        <a:rPr lang="en-US" altLang="zh-TW" sz="1400" dirty="0">
+                          <a:solidFill>
+                            <a:srgbClr val="000000"/>
+                          </a:solidFill>
+                        </a:rPr>
+                        <a:t>LLM-style: FP8 + one 128×128 WS array</a:t>
+                      </a:r>
+                    </a:p>
+                  </a:txBody>
+                  <a:tcPr marL="68580" marR="68580" marT="27432" marB="27432" anchor="ctr">
+                    <a:lnL w="0">
+                      <a:noFill/>
+                    </a:lnL>
+                    <a:lnR w="0">
+                      <a:noFill/>
+                    </a:lnR>
+                    <a:lnT w="0">
+                      <a:noFill/>
+                    </a:lnT>
+                    <a:lnB w="0">
+                      <a:noFill/>
+                    </a:lnB>
+                    <a:noFill/>
+                  </a:tcPr>
+                </a:tc>
+                <a:tc>
+                  <a:txBody>
+                    <a:bodyPr/>
+                    <a:lstStyle/>
+                    <a:p>
+                      <a:pPr algn="ctr"/>
+                      <a:r>
+                        <a:rPr lang="en-US" altLang="zh-TW" sz="1400" dirty="0">
+                          <a:solidFill>
+                            <a:srgbClr val="000000"/>
+                          </a:solidFill>
+                        </a:rPr>
+                        <a:t>27.5</a:t>
+                      </a:r>
+                    </a:p>
+                  </a:txBody>
+                  <a:tcPr marL="68580" marR="68580" marT="27432" marB="27432" anchor="ctr">
+                    <a:lnL w="0">
+                      <a:noFill/>
+                    </a:lnL>
+                    <a:lnR w="0">
+                      <a:noFill/>
+                    </a:lnR>
+                    <a:lnT w="0">
+                      <a:noFill/>
+                    </a:lnT>
+                    <a:lnB w="0">
+                      <a:noFill/>
+                    </a:lnB>
+                    <a:noFill/>
+                  </a:tcPr>
+                </a:tc>
+                <a:tc>
+                  <a:txBody>
+                    <a:bodyPr/>
+                    <a:lstStyle/>
+                    <a:p>
+                      <a:pPr algn="ctr"/>
+                      <a:r>
+                        <a:rPr lang="en-US" altLang="zh-TW" sz="1400" dirty="0">
+                          <a:solidFill>
+                            <a:srgbClr val="000000"/>
+                          </a:solidFill>
+                        </a:rPr>
+                        <a:t>23.3</a:t>
+                      </a:r>
+                    </a:p>
+                  </a:txBody>
+                  <a:tcPr marL="68580" marR="68580" marT="27432" marB="27432" anchor="ctr">
+                    <a:lnL w="0">
+                      <a:noFill/>
+                    </a:lnL>
+                    <a:lnR w="0">
+                      <a:noFill/>
+                    </a:lnR>
+                    <a:lnT w="0">
+                      <a:noFill/>
+                    </a:lnT>
+                    <a:lnB w="0">
+                      <a:noFill/>
+                    </a:lnB>
+                    <a:noFill/>
+                  </a:tcPr>
+                </a:tc>
+                <a:tc>
+                  <a:txBody>
+                    <a:bodyPr/>
+                    <a:lstStyle/>
+                    <a:p>
+                      <a:pPr algn="ctr"/>
+                      <a:r>
+                        <a:rPr lang="en-US" altLang="zh-TW" sz="1400" dirty="0">
+                          <a:solidFill>
+                            <a:srgbClr val="000000"/>
+                          </a:solidFill>
+                        </a:rPr>
+                        <a:t>55.6</a:t>
+                      </a:r>
+                    </a:p>
+                  </a:txBody>
+                  <a:tcPr marL="68580" marR="68580" marT="27432" marB="27432" anchor="ctr">
+                    <a:lnL w="0">
+                      <a:noFill/>
+                    </a:lnL>
+                    <a:lnR w="0">
+                      <a:noFill/>
+                    </a:lnR>
+                    <a:lnT w="0">
+                      <a:noFill/>
+                    </a:lnT>
+                    <a:lnB w="0">
+                      <a:noFill/>
+                    </a:lnB>
+                    <a:noFill/>
+                  </a:tcPr>
+                </a:tc>
+              </a:tr>
+              <a:tr h="310896">
+                <a:tc>
+                  <a:txBody>
+                    <a:bodyPr/>
+                    <a:lstStyle/>
+                    <a:p>
+                      <a:pPr algn="l"/>
+                      <a:r>
+                        <a:rPr lang="en-US" altLang="zh-TW" sz="1400" dirty="0">
+                          <a:solidFill>
+                            <a:srgbClr val="000000"/>
+                          </a:solidFill>
+                        </a:rPr>
+                        <a:t>Small arrays + FP8</a:t>
+                      </a:r>
+                    </a:p>
+                  </a:txBody>
+                  <a:tcPr marL="68580" marR="68580" marT="27432" marB="27432" anchor="ctr">
+                    <a:lnL w="0">
+                      <a:noFill/>
+                    </a:lnL>
+                    <a:lnR w="0">
+                      <a:noFill/>
+                    </a:lnR>
+                    <a:lnT w="0">
+                      <a:noFill/>
+                    </a:lnT>
+                    <a:lnB w="0">
+                      <a:noFill/>
+                    </a:lnB>
+                    <a:noFill/>
+                  </a:tcPr>
+                </a:tc>
+                <a:tc>
+                  <a:txBody>
+                    <a:bodyPr/>
+                    <a:lstStyle/>
+                    <a:p>
+                      <a:pPr algn="ctr"/>
+                      <a:r>
+                        <a:rPr lang="en-US" altLang="zh-TW" sz="1400" dirty="0">
+                          <a:solidFill>
+                            <a:srgbClr val="000000"/>
+                          </a:solidFill>
+                        </a:rPr>
+                        <a:t>18.5</a:t>
+                      </a:r>
+                    </a:p>
+                  </a:txBody>
+                  <a:tcPr marL="68580" marR="68580" marT="27432" marB="27432" anchor="ctr">
+                    <a:lnL w="0">
+                      <a:noFill/>
+                    </a:lnL>
+                    <a:lnR w="0">
+                      <a:noFill/>
+                    </a:lnR>
+                    <a:lnT w="0">
+                      <a:noFill/>
+                    </a:lnT>
+                    <a:lnB w="0">
+                      <a:noFill/>
+                    </a:lnB>
+                    <a:noFill/>
+                  </a:tcPr>
+                </a:tc>
+                <a:tc>
+                  <a:txBody>
+                    <a:bodyPr/>
+                    <a:lstStyle/>
+                    <a:p>
+                      <a:pPr algn="ctr"/>
+                      <a:r>
+                        <a:rPr lang="en-US" altLang="zh-TW" sz="1400" dirty="0">
+                          <a:solidFill>
+                            <a:srgbClr val="000000"/>
+                          </a:solidFill>
+                        </a:rPr>
+                        <a:t>15.9</a:t>
+                      </a:r>
+                    </a:p>
+                  </a:txBody>
+                  <a:tcPr marL="68580" marR="68580" marT="27432" marB="27432" anchor="ctr">
+                    <a:lnL w="0">
+                      <a:noFill/>
+                    </a:lnL>
+                    <a:lnR w="0">
+                      <a:noFill/>
+                    </a:lnR>
+                    <a:lnT w="0">
+                      <a:noFill/>
+                    </a:lnT>
+                    <a:lnB w="0">
+                      <a:noFill/>
+                    </a:lnB>
+                    <a:noFill/>
+                  </a:tcPr>
+                </a:tc>
+                <a:tc>
+                  <a:txBody>
+                    <a:bodyPr/>
+                    <a:lstStyle/>
+                    <a:p>
+                      <a:pPr algn="ctr"/>
+                      <a:r>
+                        <a:rPr lang="en-US" altLang="zh-TW" sz="1400" dirty="0">
+                          <a:solidFill>
+                            <a:srgbClr val="000000"/>
+                          </a:solidFill>
+                        </a:rPr>
+                        <a:t>39.3</a:t>
+                      </a:r>
+                    </a:p>
+                  </a:txBody>
+                  <a:tcPr marL="68580" marR="68580" marT="27432" marB="27432" anchor="ctr">
+                    <a:lnL w="0">
+                      <a:noFill/>
+                    </a:lnL>
+                    <a:lnR w="0">
+                      <a:noFill/>
+                    </a:lnR>
+                    <a:lnT w="0">
+                      <a:noFill/>
+                    </a:lnT>
+                    <a:lnB w="0">
+                      <a:noFill/>
+                    </a:lnB>
+                    <a:noFill/>
+                  </a:tcPr>
+                </a:tc>
+              </a:tr>
+              <a:tr h="310896">
+                <a:tc>
+                  <a:txBody>
+                    <a:bodyPr/>
+                    <a:lstStyle/>
+                    <a:p>
+                      <a:pPr algn="l"/>
+                      <a:r>
+                        <a:rPr lang="en-US" altLang="zh-TW" sz="1400" dirty="0">
+                          <a:solidFill>
+                            <a:srgbClr val="000000"/>
+                          </a:solidFill>
+                        </a:rPr>
+                        <a:t>+ dead-layer removal + K/V hoisting</a:t>
+                      </a:r>
+                    </a:p>
+                  </a:txBody>
+                  <a:tcPr marL="68580" marR="68580" marT="27432" marB="27432" anchor="ctr">
+                    <a:lnL w="0">
+                      <a:noFill/>
+                    </a:lnL>
+                    <a:lnR w="0">
+                      <a:noFill/>
+                    </a:lnR>
+                    <a:lnT w="0">
+                      <a:noFill/>
+                    </a:lnT>
+                    <a:lnB w="0">
+                      <a:noFill/>
+                    </a:lnB>
+                    <a:noFill/>
+                  </a:tcPr>
+                </a:tc>
+                <a:tc>
+                  <a:txBody>
+                    <a:bodyPr/>
+                    <a:lstStyle/>
+                    <a:p>
+                      <a:pPr algn="ctr"/>
+                      <a:r>
+                        <a:rPr lang="en-US" altLang="zh-TW" sz="1400" dirty="0">
+                          <a:solidFill>
+                            <a:srgbClr val="000000"/>
+                          </a:solidFill>
+                        </a:rPr>
+                        <a:t>13.7</a:t>
+                      </a:r>
+                    </a:p>
+                  </a:txBody>
+                  <a:tcPr marL="68580" marR="68580" marT="27432" marB="27432" anchor="ctr">
+                    <a:lnL w="0">
+                      <a:noFill/>
+                    </a:lnL>
+                    <a:lnR w="0">
+                      <a:noFill/>
+                    </a:lnR>
+                    <a:lnT w="0">
+                      <a:noFill/>
+                    </a:lnT>
+                    <a:lnB w="0">
+                      <a:noFill/>
+                    </a:lnB>
+                    <a:noFill/>
+                  </a:tcPr>
+                </a:tc>
+                <a:tc>
+                  <a:txBody>
+                    <a:bodyPr/>
+                    <a:lstStyle/>
+                    <a:p>
+                      <a:pPr algn="ctr"/>
+                      <a:r>
+                        <a:rPr lang="en-US" altLang="zh-TW" sz="1400" dirty="0">
+                          <a:solidFill>
+                            <a:srgbClr val="000000"/>
+                          </a:solidFill>
+                        </a:rPr>
+                        <a:t>13.8</a:t>
+                      </a:r>
+                    </a:p>
+                  </a:txBody>
+                  <a:tcPr marL="68580" marR="68580" marT="27432" marB="27432" anchor="ctr">
+                    <a:lnL w="0">
+                      <a:noFill/>
+                    </a:lnL>
+                    <a:lnR w="0">
+                      <a:noFill/>
+                    </a:lnR>
+                    <a:lnT w="0">
+                      <a:noFill/>
+                    </a:lnT>
+                    <a:lnB w="0">
+                      <a:noFill/>
+                    </a:lnB>
+                    <a:noFill/>
+                  </a:tcPr>
+                </a:tc>
+                <a:tc>
+                  <a:txBody>
+                    <a:bodyPr/>
+                    <a:lstStyle/>
+                    <a:p>
+                      <a:pPr algn="ctr"/>
+                      <a:r>
+                        <a:rPr lang="en-US" altLang="zh-TW" sz="1400" dirty="0">
+                          <a:solidFill>
+                            <a:srgbClr val="000000"/>
+                          </a:solidFill>
+                        </a:rPr>
+                        <a:t>32.3</a:t>
+                      </a:r>
+                    </a:p>
+                  </a:txBody>
+                  <a:tcPr marL="68580" marR="68580" marT="27432" marB="27432" anchor="ctr">
+                    <a:lnL w="0">
+                      <a:noFill/>
+                    </a:lnL>
+                    <a:lnR w="0">
+                      <a:noFill/>
+                    </a:lnR>
+                    <a:lnT w="0">
+                      <a:noFill/>
+                    </a:lnT>
+                    <a:lnB w="0">
+                      <a:noFill/>
+                    </a:lnB>
+                    <a:noFill/>
+                  </a:tcPr>
+                </a:tc>
+              </a:tr>
+              <a:tr h="310896">
+                <a:tc>
+                  <a:txBody>
+                    <a:bodyPr/>
+                    <a:lstStyle/>
+                    <a:p>
+                      <a:pPr algn="l"/>
+                      <a:r>
+                        <a:rPr lang="en-US" altLang="zh-TW" sz="1400" b="1" dirty="0">
+                          <a:solidFill>
+                            <a:srgbClr val="000000"/>
+                          </a:solidFill>
+                        </a:rPr>
+                        <a:t>+ action expert resident on-chip</a:t>
+                      </a:r>
+                    </a:p>
+                  </a:txBody>
+                  <a:tcPr marL="68580" marR="68580" marT="27432" marB="27432" anchor="ctr">
+                    <a:lnL w="0">
+                      <a:noFill/>
+                    </a:lnL>
+                    <a:lnR w="0">
+                      <a:noFill/>
+                    </a:lnR>
+                    <a:lnT w="0">
+                      <a:noFill/>
+                    </a:lnT>
+                    <a:lnB w="19050">
+                      <a:solidFill>
+                        <a:srgbClr val="000000"/>
+                      </a:solidFill>
+                    </a:lnB>
+                    <a:noFill/>
+                  </a:tcPr>
+                </a:tc>
+                <a:tc>
+                  <a:txBody>
+                    <a:bodyPr/>
+                    <a:lstStyle/>
+                    <a:p>
+                      <a:pPr algn="ctr"/>
+                      <a:r>
+                        <a:rPr lang="en-US" altLang="zh-TW" sz="1400" b="1" dirty="0">
+                          <a:solidFill>
+                            <a:srgbClr val="000000"/>
+                          </a:solidFill>
+                        </a:rPr>
+                        <a:t>13.7</a:t>
+                      </a:r>
+                    </a:p>
+                  </a:txBody>
+                  <a:tcPr marL="68580" marR="68580" marT="27432" marB="27432" anchor="ctr">
+                    <a:lnL w="0">
+                      <a:noFill/>
+                    </a:lnL>
+                    <a:lnR w="0">
+                      <a:noFill/>
+                    </a:lnR>
+                    <a:lnT w="0">
+                      <a:noFill/>
+                    </a:lnT>
+                    <a:lnB w="19050">
+                      <a:solidFill>
+                        <a:srgbClr val="000000"/>
+                      </a:solidFill>
+                    </a:lnB>
+                    <a:noFill/>
+                  </a:tcPr>
+                </a:tc>
+                <a:tc>
+                  <a:txBody>
+                    <a:bodyPr/>
+                    <a:lstStyle/>
+                    <a:p>
+                      <a:pPr algn="ctr"/>
+                      <a:r>
+                        <a:rPr lang="en-US" altLang="zh-TW" sz="1400" b="1" dirty="0">
+                          <a:solidFill>
+                            <a:srgbClr val="000000"/>
+                          </a:solidFill>
+                        </a:rPr>
+                        <a:t>1.1</a:t>
+                      </a:r>
+                    </a:p>
+                  </a:txBody>
+                  <a:tcPr marL="68580" marR="68580" marT="27432" marB="27432" anchor="ctr">
+                    <a:lnL w="0">
+                      <a:noFill/>
+                    </a:lnL>
+                    <a:lnR w="0">
+                      <a:noFill/>
+                    </a:lnR>
+                    <a:lnT w="0">
+                      <a:noFill/>
+                    </a:lnT>
+                    <a:lnB w="19050">
+                      <a:solidFill>
+                        <a:srgbClr val="000000"/>
+                      </a:solidFill>
+                    </a:lnB>
+                    <a:noFill/>
+                  </a:tcPr>
+                </a:tc>
+                <a:tc>
+                  <a:txBody>
+                    <a:bodyPr/>
+                    <a:lstStyle/>
+                    <a:p>
+                      <a:pPr algn="ctr"/>
+                      <a:r>
+                        <a:rPr lang="en-US" altLang="zh-TW" sz="1400" b="1" dirty="0">
+                          <a:solidFill>
+                            <a:srgbClr val="000000"/>
+                          </a:solidFill>
+                        </a:rPr>
+                        <a:t>19.6</a:t>
+                      </a:r>
+                    </a:p>
+                  </a:txBody>
+                  <a:tcPr marL="68580" marR="68580" marT="27432" marB="27432" anchor="ctr">
+                    <a:lnL w="0">
+                      <a:noFill/>
+                    </a:lnL>
+                    <a:lnR w="0">
+                      <a:noFill/>
+                    </a:lnR>
+                    <a:lnT w="0">
+                      <a:noFill/>
+                    </a:lnT>
+                    <a:lnB w="19050">
+                      <a:solidFill>
+                        <a:srgbClr val="000000"/>
+                      </a:solidFill>
+                    </a:lnB>
+                    <a:noFill/>
+                  </a:tcPr>
+                </a:tc>
+              </a:tr>
+            </a:tbl>
+          </a:graphicData>
+        </a:graphic>
+      </p:graphicFrame>
+      <p:sp>
+        <p:nvSpPr>
+          <p:cNvPr id="41" name="Table note"/>
+          <p:cNvSpPr txBox="1"/>
+          <p:nvPr/>
+        </p:nvSpPr>
+        <p:spPr>
+          <a:xfrm>
+            <a:off x="1066800" y="4700016"/>
+            <a:ext cx="10058400" cy="320040"/>
+          </a:xfrm>
+          <a:prstGeom prst="rect">
+            <a:avLst/>
+          </a:prstGeom>
+          <a:noFill/>
+        </p:spPr>
+        <p:txBody>
+          <a:bodyPr wrap="square" lIns="0" rIns="0"/>
+          <a:lstStyle/>
+          <a:p>
+            <a:r>
+              <a:rPr lang="en-US" altLang="zh-TW" sz="1200" dirty="0">
+                <a:solidFill>
+                  <a:srgbClr val="595959"/>
+                </a:solidFill>
+              </a:rPr>
+              <a:t>* Totals include 4.8 ms of encoders. Ideal roofline lower bounds; Thor peak is a derived estimate.</a:t>
+            </a:r>
+          </a:p>
+        </p:txBody>
+      </p:sp>
+    </p:spTree>
+    <p:extLst>
+      <p:ext uri="{BB962C8B-B14F-4D97-AF65-F5344CB8AC3E}">
+        <p14:creationId xmlns:p14="http://schemas.microsoft.com/office/powerpoint/2010/main" val="340821465"/>
+      </p:ext>
+    </p:extLst>
+  </p:cSld>
+  <p:clrMapOvr>
+    <a:masterClrMapping/>
+  </p:clrMapOvr>
+</p:sld>
+</file>
+
+<file path=ppt/slides/slide24.xml><?xml version="1.0" encoding="utf-8"?>
+<p:sld xmlns:a="http://schemas.openxmlformats.org/drawingml/2006/main" xmlns:r="http://schemas.openxmlformats.org/officeDocument/2006/relationships" xmlns:p="http://schemas.openxmlformats.org/presentationml/2006/main">
+  <p:cSld>
+    <p:spTree>
+      <p:nvGrpSpPr>
+        <p:cNvPr id="1" name="">
+          <a:extLst>
+            <a:ext uri="{FF2B5EF4-FFF2-40B4-BE49-F238E27FC236}">
+              <a16:creationId xmlns:a16="http://schemas.microsoft.com/office/drawing/2014/main" id="{D3360C21-ECAB-84A5-87AC-3F78426689AE}"/>
+            </a:ext>
+          </a:extLst>
+        </p:cNvPr>
+        <p:cNvGrpSpPr/>
+        <p:nvPr/>
+      </p:nvGrpSpPr>
+      <p:grpSpPr>
+        <a:xfrm>
+          <a:off x="0" y="0"/>
+          <a:ext cx="0" cy="0"/>
+          <a:chOff x="0" y="0"/>
+          <a:chExt cx="0" cy="0"/>
+        </a:xfrm>
+      </p:grpSpPr>
+      <p:sp>
+        <p:nvSpPr>
+          <p:cNvPr id="12" name="內容版面配置區 5">
+            <a:extLst>
+              <a:ext uri="{FF2B5EF4-FFF2-40B4-BE49-F238E27FC236}">
+                <a16:creationId xmlns:a16="http://schemas.microsoft.com/office/drawing/2014/main" id="{98A79EE8-057B-9F45-406A-BCEA24834930}"/>
+              </a:ext>
+            </a:extLst>
+          </p:cNvPr>
+          <p:cNvSpPr txBox="1">
+            <a:spLocks/>
+          </p:cNvSpPr>
+          <p:nvPr/>
+        </p:nvSpPr>
+        <p:spPr bwMode="auto">
+          <a:xfrm>
+            <a:off x="609600" y="1175657"/>
+            <a:ext cx="10972800" cy="2743200"/>
+          </a:xfrm>
+          <a:prstGeom prst="rect">
+            <a:avLst/>
+          </a:prstGeom>
+          <a:noFill/>
+          <a:ln w="9525">
+            <a:noFill/>
+            <a:miter lim="800000"/>
+            <a:headEnd/>
+            <a:tailEnd/>
+          </a:ln>
+        </p:spPr>
+        <p:txBody>
+          <a:bodyPr vert="horz" wrap="square" lIns="91440" tIns="45720" rIns="91440" bIns="45720" numCol="1" anchor="t" anchorCtr="0" compatLnSpc="1">
+            <a:prstTxWarp prst="textNoShape">
+              <a:avLst/>
+            </a:prstTxWarp>
+            <a:normAutofit/>
+          </a:bodyPr>
+          <a:lstStyle>
+            <a:lvl1pPr marL="342891" indent="-342891" algn="l" rtl="0" eaLnBrk="1" fontAlgn="base" hangingPunct="1">
+              <a:spcBef>
+                <a:spcPct val="20000"/>
+              </a:spcBef>
+              <a:spcAft>
+                <a:spcPct val="0"/>
+              </a:spcAft>
+              <a:buFont typeface="Arial" charset="0"/>
+              <a:buChar char="•"/>
+              <a:defRPr sz="2800" kern="1200">
+                <a:solidFill>
+                  <a:schemeClr val="tx1"/>
+                </a:solidFill>
+                <a:latin typeface="+mn-lt"/>
+                <a:ea typeface="+mn-ea"/>
+                <a:cs typeface="+mn-cs"/>
+              </a:defRPr>
+            </a:lvl1pPr>
+            <a:lvl2pPr marL="742932" indent="-285744" algn="l" rtl="0" eaLnBrk="1" fontAlgn="base" hangingPunct="1">
+              <a:spcBef>
+                <a:spcPct val="20000"/>
+              </a:spcBef>
+              <a:spcAft>
+                <a:spcPct val="0"/>
+              </a:spcAft>
+              <a:buFont typeface="Arial" charset="0"/>
+              <a:buChar char="–"/>
+              <a:defRPr sz="2400" kern="1200">
+                <a:solidFill>
+                  <a:schemeClr val="accent1">
+                    <a:lumMod val="75000"/>
+                  </a:schemeClr>
+                </a:solidFill>
+                <a:latin typeface="+mn-lt"/>
+                <a:ea typeface="+mn-ea"/>
+                <a:cs typeface="+mn-cs"/>
+              </a:defRPr>
+            </a:lvl2pPr>
+            <a:lvl3pPr marL="1142971" indent="-228594" algn="l" rtl="0" eaLnBrk="1" fontAlgn="base" hangingPunct="1">
+              <a:spcBef>
+                <a:spcPct val="20000"/>
+              </a:spcBef>
+              <a:spcAft>
+                <a:spcPct val="0"/>
+              </a:spcAft>
+              <a:buFont typeface="Arial" charset="0"/>
+              <a:buChar char="•"/>
+              <a:defRPr sz="2000" kern="1200">
+                <a:solidFill>
+                  <a:schemeClr val="accent1"/>
+                </a:solidFill>
+                <a:latin typeface="+mn-lt"/>
+                <a:ea typeface="+mn-ea"/>
+                <a:cs typeface="+mn-cs"/>
+              </a:defRPr>
+            </a:lvl3pPr>
+            <a:lvl4pPr marL="1600160" indent="-228594" algn="l" rtl="0" eaLnBrk="1" fontAlgn="base" hangingPunct="1">
+              <a:spcBef>
+                <a:spcPct val="20000"/>
+              </a:spcBef>
+              <a:spcAft>
+                <a:spcPct val="0"/>
+              </a:spcAft>
+              <a:buFont typeface="Arial" charset="0"/>
+              <a:buChar char="–"/>
+              <a:defRPr sz="1800" kern="1200">
+                <a:solidFill>
+                  <a:schemeClr val="accent6">
+                    <a:lumMod val="75000"/>
+                  </a:schemeClr>
+                </a:solidFill>
+                <a:latin typeface="+mn-lt"/>
+                <a:ea typeface="+mn-ea"/>
+                <a:cs typeface="+mn-cs"/>
+              </a:defRPr>
+            </a:lvl4pPr>
+            <a:lvl5pPr marL="2057349" indent="-228594" algn="l" rtl="0" eaLnBrk="1" fontAlgn="base" hangingPunct="1">
+              <a:spcBef>
+                <a:spcPct val="20000"/>
+              </a:spcBef>
+              <a:spcAft>
+                <a:spcPct val="0"/>
+              </a:spcAft>
+              <a:buFont typeface="Arial" charset="0"/>
+              <a:buChar char="»"/>
+              <a:defRPr sz="1800" kern="1200">
+                <a:solidFill>
+                  <a:schemeClr val="accent6"/>
+                </a:solidFill>
+                <a:latin typeface="+mn-lt"/>
+                <a:ea typeface="+mn-ea"/>
+                <a:cs typeface="+mn-cs"/>
+              </a:defRPr>
+            </a:lvl5pPr>
+            <a:lvl6pPr marL="2514537" indent="-228594" algn="l" defTabSz="914377" rtl="0" eaLnBrk="1" latinLnBrk="0" hangingPunct="1">
+              <a:spcBef>
+                <a:spcPct val="20000"/>
+              </a:spcBef>
+              <a:buFont typeface="Arial" pitchFamily="34" charset="0"/>
+              <a:buChar char="•"/>
+              <a:defRPr sz="2000" kern="1200">
+                <a:solidFill>
+                  <a:schemeClr val="tx1"/>
+                </a:solidFill>
+                <a:latin typeface="+mn-lt"/>
+                <a:ea typeface="+mn-ea"/>
+                <a:cs typeface="+mn-cs"/>
+              </a:defRPr>
+            </a:lvl6pPr>
+            <a:lvl7pPr marL="2971726" indent="-228594" algn="l" defTabSz="914377" rtl="0" eaLnBrk="1" latinLnBrk="0" hangingPunct="1">
+              <a:spcBef>
+                <a:spcPct val="20000"/>
+              </a:spcBef>
+              <a:buFont typeface="Arial" pitchFamily="34" charset="0"/>
+              <a:buChar char="•"/>
+              <a:defRPr sz="2000" kern="1200">
+                <a:solidFill>
+                  <a:schemeClr val="tx1"/>
+                </a:solidFill>
+                <a:latin typeface="+mn-lt"/>
+                <a:ea typeface="+mn-ea"/>
+                <a:cs typeface="+mn-cs"/>
+              </a:defRPr>
+            </a:lvl7pPr>
+            <a:lvl8pPr marL="3428914" indent="-228594" algn="l" defTabSz="914377" rtl="0" eaLnBrk="1" latinLnBrk="0" hangingPunct="1">
+              <a:spcBef>
+                <a:spcPct val="20000"/>
+              </a:spcBef>
+              <a:buFont typeface="Arial" pitchFamily="34" charset="0"/>
+              <a:buChar char="•"/>
+              <a:defRPr sz="2000" kern="1200">
+                <a:solidFill>
+                  <a:schemeClr val="tx1"/>
+                </a:solidFill>
+                <a:latin typeface="+mn-lt"/>
+                <a:ea typeface="+mn-ea"/>
+                <a:cs typeface="+mn-cs"/>
+              </a:defRPr>
+            </a:lvl8pPr>
+            <a:lvl9pPr marL="3886103" indent="-228594" algn="l" defTabSz="914377" rtl="0" eaLnBrk="1" latinLnBrk="0" hangingPunct="1">
+              <a:spcBef>
+                <a:spcPct val="20000"/>
+              </a:spcBef>
+              <a:buFont typeface="Arial" pitchFamily="34" charset="0"/>
+              <a:buChar char="•"/>
+              <a:defRPr sz="2000" kern="1200">
+                <a:solidFill>
+                  <a:schemeClr val="tx1"/>
+                </a:solidFill>
+                <a:latin typeface="+mn-lt"/>
+                <a:ea typeface="+mn-ea"/>
+                <a:cs typeface="+mn-cs"/>
+              </a:defRPr>
+            </a:lvl9pPr>
+          </a:lstStyle>
+          <a:p>
+            <a:pPr>
+              <a:spcAft>
+                <a:spcPts val="0"/>
+              </a:spcAft>
+            </a:pPr>
+            <a:r>
+              <a:rPr lang="en-US" altLang="zh-TW" sz="2400" dirty="0"/>
+              <a:t>Compute: many 32×32 arrays, OS/WS switching; no GEMV engine / PIM</a:t>
+            </a:r>
+          </a:p>
+          <a:p>
+            <a:pPr>
+              <a:spcAft>
+                <a:spcPts val="0"/>
+              </a:spcAft>
+            </a:pPr>
+            <a:r>
+              <a:rPr lang="en-US" altLang="zh-TW" sz="2400" dirty="0"/>
+              <a:t>Memory: two-tier weights; expert on-chip, trunk streamed in FP8/FP4</a:t>
+            </a:r>
+          </a:p>
+          <a:p>
+            <a:pPr lvl="1">
+              <a:spcAft>
+                <a:spcPts val="0"/>
+              </a:spcAft>
+            </a:pPr>
+            <a:r>
+              <a:rPr lang="en-US" altLang="zh-TW" sz="2000" dirty="0"/>
+              <a:t>Provision DRAM for bandwidth, not capacity</a:t>
+            </a:r>
+          </a:p>
+          <a:p>
+            <a:pPr>
+              <a:spcAft>
+                <a:spcPts val="0"/>
+              </a:spcAft>
+            </a:pPr>
+            <a:r>
+              <a:rPr lang="en-US" altLang="zh-TW" sz="2400" dirty="0"/>
+              <a:t>State: statically allocated buffers; sizes known at compile time</a:t>
+            </a:r>
+          </a:p>
+          <a:p>
+            <a:pPr>
+              <a:spcAft>
+                <a:spcPts val="0"/>
+              </a:spcAft>
+            </a:pPr>
+            <a:r>
+              <a:rPr lang="en-US" altLang="zh-TW" sz="2400" dirty="0"/>
+              <a:t>Compiler: static schedule per mode; guaranteed worst-case latency</a:t>
+            </a:r>
+          </a:p>
+          <a:p>
+            <a:pPr>
+              <a:spcAft>
+                <a:spcPts val="0"/>
+              </a:spcAft>
+            </a:pPr>
+            <a:r>
+              <a:rPr lang="en-US" altLang="zh-TW" sz="2400" dirty="0"/>
+              <a:t>Front end: 3D-conv VAE; small attention unit with structured masks</a:t>
+            </a:r>
+          </a:p>
+        </p:txBody>
+      </p:sp>
+      <p:sp>
+        <p:nvSpPr>
+          <p:cNvPr id="3" name="副標題 2">
+            <a:extLst>
+              <a:ext uri="{FF2B5EF4-FFF2-40B4-BE49-F238E27FC236}">
+                <a16:creationId xmlns:a16="http://schemas.microsoft.com/office/drawing/2014/main" id="{0D642BDC-5B19-506B-CC3D-CAF272E3FB6A}"/>
+              </a:ext>
+            </a:extLst>
+          </p:cNvPr>
+          <p:cNvSpPr>
+            <a:spLocks noGrp="1"/>
+          </p:cNvSpPr>
+          <p:nvPr>
+            <p:ph type="title"/>
+          </p:nvPr>
+        </p:nvSpPr>
+        <p:spPr>
+          <a:xfrm>
+            <a:off x="609600" y="317155"/>
+            <a:ext cx="10972800" cy="582594"/>
+          </a:xfrm>
+        </p:spPr>
+        <p:txBody>
+          <a:bodyPr wrap="square" anchor="ctr">
+            <a:normAutofit fontScale="90000"/>
+          </a:bodyPr>
+          <a:lstStyle/>
+          <a:p>
+            <a:r>
+              <a:rPr lang="en-US" altLang="zh-TW" dirty="0"/>
+              <a:t>Design Implications</a:t>
+            </a:r>
+            <a:endParaRPr lang="en-US" altLang="zh-TW" dirty="0">
+              <a:latin typeface="+mn-ea"/>
+              <a:cs typeface="Times New Roman" panose="02020603050405020304" pitchFamily="18" charset="0"/>
+            </a:endParaRPr>
+          </a:p>
+        </p:txBody>
+      </p:sp>
+      <p:sp>
+        <p:nvSpPr>
+          <p:cNvPr id="2" name="投影片編號版面配置區 1">
+            <a:extLst>
+              <a:ext uri="{FF2B5EF4-FFF2-40B4-BE49-F238E27FC236}">
+                <a16:creationId xmlns:a16="http://schemas.microsoft.com/office/drawing/2014/main" id="{9B73AECC-E727-FB48-3345-1117D9DF8296}"/>
+              </a:ext>
+            </a:extLst>
+          </p:cNvPr>
+          <p:cNvSpPr>
+            <a:spLocks noGrp="1"/>
+          </p:cNvSpPr>
+          <p:nvPr>
+            <p:ph type="sldNum" sz="quarter" idx="12"/>
+          </p:nvPr>
+        </p:nvSpPr>
+        <p:spPr/>
+        <p:txBody>
+          <a:bodyPr/>
+          <a:lstStyle/>
+          <a:p>
+            <a:fld id="{E61F77C1-B770-47FB-877F-E631DD26508E}" type="slidenum">
+              <a:rPr lang="zh-TW" altLang="en-US" smtClean="0"/>
+              <a:t>2</a:t>
+            </a:fld>
+            <a:endParaRPr lang="zh-TW" altLang="en-US" dirty="0"/>
+          </a:p>
+        </p:txBody>
+      </p:sp>
+      <p:graphicFrame>
+        <p:nvGraphicFramePr>
+          <p:cNvPr id="40" name="Table 40"/>
+          <p:cNvGraphicFramePr>
+            <a:graphicFrameLocks noGrp="1"/>
+          </p:cNvGraphicFramePr>
+          <p:nvPr/>
+        </p:nvGraphicFramePr>
+        <p:xfrm>
+          <a:off x="1066800" y="3931920"/>
+          <a:ext cx="10058400" cy="1243584"/>
+        </p:xfrm>
+        <a:graphic>
+          <a:graphicData uri="http://schemas.openxmlformats.org/drawingml/2006/table">
+            <a:tbl>
+              <a:tblPr firstRow="1"/>
+              <a:tblGrid>
+                <a:gridCol w="3291840"/>
+                <a:gridCol w="3383280"/>
+                <a:gridCol w="3383280"/>
+              </a:tblGrid>
+              <a:tr h="310896">
+                <a:tc>
+                  <a:txBody>
+                    <a:bodyPr/>
+                    <a:lstStyle/>
+                    <a:p>
+                      <a:pPr algn="l"/>
+                      <a:r>
+                        <a:rPr lang="en-US" altLang="zh-TW" sz="1400" b="1" dirty="0">
+                          <a:solidFill>
+                            <a:srgbClr val="000000"/>
+                          </a:solidFill>
+                        </a:rPr>
+                        <a:t>Open spec decision</a:t>
+                      </a:r>
+                    </a:p>
+                  </a:txBody>
+                  <a:tcPr marL="68580" marR="68580" marT="27432" marB="27432" anchor="ctr">
+                    <a:lnL w="0">
+                      <a:noFill/>
+                    </a:lnL>
+                    <a:lnR w="0">
+                      <a:noFill/>
+                    </a:lnR>
+                    <a:lnT w="19050">
+                      <a:solidFill>
+                        <a:srgbClr val="000000"/>
+                      </a:solidFill>
+                    </a:lnT>
+                    <a:lnB w="9525">
+                      <a:solidFill>
+                        <a:srgbClr val="000000"/>
+                      </a:solidFill>
+                    </a:lnB>
+                    <a:noFill/>
+                  </a:tcPr>
+                </a:tc>
+                <a:tc>
+                  <a:txBody>
+                    <a:bodyPr/>
+                    <a:lstStyle/>
+                    <a:p>
+                      <a:pPr algn="l"/>
+                      <a:r>
+                        <a:rPr lang="en-US" altLang="zh-TW" sz="1400" b="1" dirty="0">
+                          <a:solidFill>
+                            <a:srgbClr val="000000"/>
+                          </a:solidFill>
+                        </a:rPr>
+                        <a:t>Option A</a:t>
+                      </a:r>
+                    </a:p>
+                  </a:txBody>
+                  <a:tcPr marL="68580" marR="68580" marT="27432" marB="27432" anchor="ctr">
+                    <a:lnL w="0">
+                      <a:noFill/>
+                    </a:lnL>
+                    <a:lnR w="0">
+                      <a:noFill/>
+                    </a:lnR>
+                    <a:lnT w="19050">
+                      <a:solidFill>
+                        <a:srgbClr val="000000"/>
+                      </a:solidFill>
+                    </a:lnT>
+                    <a:lnB w="9525">
+                      <a:solidFill>
+                        <a:srgbClr val="000000"/>
+                      </a:solidFill>
+                    </a:lnB>
+                    <a:noFill/>
+                  </a:tcPr>
+                </a:tc>
+                <a:tc>
+                  <a:txBody>
+                    <a:bodyPr/>
+                    <a:lstStyle/>
+                    <a:p>
+                      <a:pPr algn="l"/>
+                      <a:r>
+                        <a:rPr lang="en-US" altLang="zh-TW" sz="1400" b="1" dirty="0">
+                          <a:solidFill>
+                            <a:srgbClr val="000000"/>
+                          </a:solidFill>
+                        </a:rPr>
+                        <a:t>Option B</a:t>
+                      </a:r>
+                    </a:p>
+                  </a:txBody>
+                  <a:tcPr marL="68580" marR="68580" marT="27432" marB="27432" anchor="ctr">
+                    <a:lnL w="0">
+                      <a:noFill/>
+                    </a:lnL>
+                    <a:lnR w="0">
+                      <a:noFill/>
+                    </a:lnR>
+                    <a:lnT w="19050">
+                      <a:solidFill>
+                        <a:srgbClr val="000000"/>
+                      </a:solidFill>
+                    </a:lnT>
+                    <a:lnB w="9525">
+                      <a:solidFill>
+                        <a:srgbClr val="000000"/>
+                      </a:solidFill>
+                    </a:lnB>
+                    <a:noFill/>
+                  </a:tcPr>
+                </a:tc>
+              </a:tr>
+              <a:tr h="310896">
+                <a:tc>
+                  <a:txBody>
+                    <a:bodyPr/>
+                    <a:lstStyle/>
+                    <a:p>
+                      <a:pPr algn="l"/>
+                      <a:r>
+                        <a:rPr lang="en-US" altLang="zh-TW" sz="1400" dirty="0">
+                          <a:solidFill>
+                            <a:srgbClr val="000000"/>
+                          </a:solidFill>
+                        </a:rPr>
+                        <a:t>Support AR video world models?</a:t>
+                      </a:r>
+                    </a:p>
+                  </a:txBody>
+                  <a:tcPr marL="68580" marR="68580" marT="27432" marB="27432" anchor="ctr">
+                    <a:lnL w="0">
+                      <a:noFill/>
+                    </a:lnL>
+                    <a:lnR w="0">
+                      <a:noFill/>
+                    </a:lnR>
+                    <a:lnT w="0">
+                      <a:noFill/>
+                    </a:lnT>
+                    <a:lnB w="0">
+                      <a:noFill/>
+                    </a:lnB>
+                    <a:noFill/>
+                  </a:tcPr>
+                </a:tc>
+                <a:tc>
+                  <a:txBody>
+                    <a:bodyPr/>
+                    <a:lstStyle/>
+                    <a:p>
+                      <a:pPr algn="l"/>
+                      <a:r>
+                        <a:rPr lang="en-US" altLang="zh-TW" sz="1400" dirty="0">
+                          <a:solidFill>
+                            <a:srgbClr val="000000"/>
+                          </a:solidFill>
+                        </a:rPr>
+                        <a:t>Yes → GB-scale KV bandwidth</a:t>
+                      </a:r>
+                    </a:p>
+                  </a:txBody>
+                  <a:tcPr marL="68580" marR="68580" marT="27432" marB="27432" anchor="ctr">
+                    <a:lnL w="0">
+                      <a:noFill/>
+                    </a:lnL>
+                    <a:lnR w="0">
+                      <a:noFill/>
+                    </a:lnR>
+                    <a:lnT w="0">
+                      <a:noFill/>
+                    </a:lnT>
+                    <a:lnB w="0">
+                      <a:noFill/>
+                    </a:lnB>
+                    <a:noFill/>
+                  </a:tcPr>
+                </a:tc>
+                <a:tc>
+                  <a:txBody>
+                    <a:bodyPr/>
+                    <a:lstStyle/>
+                    <a:p>
+                      <a:pPr algn="l"/>
+                      <a:r>
+                        <a:rPr lang="en-US" altLang="zh-TW" sz="1400" dirty="0">
+                          <a:solidFill>
+                            <a:srgbClr val="000000"/>
+                          </a:solidFill>
+                        </a:rPr>
+                        <a:t>No → no KV memory needed</a:t>
+                      </a:r>
+                    </a:p>
+                  </a:txBody>
+                  <a:tcPr marL="68580" marR="68580" marT="27432" marB="27432" anchor="ctr">
+                    <a:lnL w="0">
+                      <a:noFill/>
+                    </a:lnL>
+                    <a:lnR w="0">
+                      <a:noFill/>
+                    </a:lnR>
+                    <a:lnT w="0">
+                      <a:noFill/>
+                    </a:lnT>
+                    <a:lnB w="0">
+                      <a:noFill/>
+                    </a:lnB>
+                    <a:noFill/>
+                  </a:tcPr>
+                </a:tc>
+              </a:tr>
+              <a:tr h="310896">
+                <a:tc>
+                  <a:txBody>
+                    <a:bodyPr/>
+                    <a:lstStyle/>
+                    <a:p>
+                      <a:pPr algn="l"/>
+                      <a:r>
+                        <a:rPr lang="en-US" altLang="zh-TW" sz="1400" dirty="0">
+                          <a:solidFill>
+                            <a:srgbClr val="000000"/>
+                          </a:solidFill>
+                        </a:rPr>
+                        <a:t>Action-expert weights</a:t>
+                      </a:r>
+                    </a:p>
+                  </a:txBody>
+                  <a:tcPr marL="68580" marR="68580" marT="27432" marB="27432" anchor="ctr">
+                    <a:lnL w="0">
+                      <a:noFill/>
+                    </a:lnL>
+                    <a:lnR w="0">
+                      <a:noFill/>
+                    </a:lnR>
+                    <a:lnT w="0">
+                      <a:noFill/>
+                    </a:lnT>
+                    <a:lnB w="0">
+                      <a:noFill/>
+                    </a:lnB>
+                    <a:noFill/>
+                  </a:tcPr>
+                </a:tc>
+                <a:tc>
+                  <a:txBody>
+                    <a:bodyPr/>
+                    <a:lstStyle/>
+                    <a:p>
+                      <a:pPr algn="l"/>
+                      <a:r>
+                        <a:rPr lang="en-US" altLang="zh-TW" sz="1400" dirty="0">
+                          <a:solidFill>
+                            <a:srgbClr val="000000"/>
+                          </a:solidFill>
+                        </a:rPr>
+                        <a:t>On-chip SRAM (≥ 0.4 GB)</a:t>
+                      </a:r>
+                    </a:p>
+                  </a:txBody>
+                  <a:tcPr marL="68580" marR="68580" marT="27432" marB="27432" anchor="ctr">
+                    <a:lnL w="0">
+                      <a:noFill/>
+                    </a:lnL>
+                    <a:lnR w="0">
+                      <a:noFill/>
+                    </a:lnR>
+                    <a:lnT w="0">
+                      <a:noFill/>
+                    </a:lnT>
+                    <a:lnB w="0">
+                      <a:noFill/>
+                    </a:lnB>
+                    <a:noFill/>
+                  </a:tcPr>
+                </a:tc>
+                <a:tc>
+                  <a:txBody>
+                    <a:bodyPr/>
+                    <a:lstStyle/>
+                    <a:p>
+                      <a:pPr algn="l"/>
+                      <a:r>
+                        <a:rPr lang="en-US" altLang="zh-TW" sz="1400" dirty="0">
+                          <a:solidFill>
+                            <a:srgbClr val="000000"/>
+                          </a:solidFill>
+                        </a:rPr>
+                        <a:t>Stream + batch candidates</a:t>
+                      </a:r>
+                    </a:p>
+                  </a:txBody>
+                  <a:tcPr marL="68580" marR="68580" marT="27432" marB="27432" anchor="ctr">
+                    <a:lnL w="0">
+                      <a:noFill/>
+                    </a:lnL>
+                    <a:lnR w="0">
+                      <a:noFill/>
+                    </a:lnR>
+                    <a:lnT w="0">
+                      <a:noFill/>
+                    </a:lnT>
+                    <a:lnB w="0">
+                      <a:noFill/>
+                    </a:lnB>
+                    <a:noFill/>
+                  </a:tcPr>
+                </a:tc>
+              </a:tr>
+              <a:tr h="310896">
+                <a:tc>
+                  <a:txBody>
+                    <a:bodyPr/>
+                    <a:lstStyle/>
+                    <a:p>
+                      <a:pPr algn="l"/>
+                      <a:r>
+                        <a:rPr lang="en-US" altLang="zh-TW" sz="1400" dirty="0">
+                          <a:solidFill>
+                            <a:srgbClr val="000000"/>
+                          </a:solidFill>
+                        </a:rPr>
+                        <a:t>Trunk precision</a:t>
+                      </a:r>
+                    </a:p>
+                  </a:txBody>
+                  <a:tcPr marL="68580" marR="68580" marT="27432" marB="27432" anchor="ctr">
+                    <a:lnL w="0">
+                      <a:noFill/>
+                    </a:lnL>
+                    <a:lnR w="0">
+                      <a:noFill/>
+                    </a:lnR>
+                    <a:lnT w="0">
+                      <a:noFill/>
+                    </a:lnT>
+                    <a:lnB w="19050">
+                      <a:solidFill>
+                        <a:srgbClr val="000000"/>
+                      </a:solidFill>
+                    </a:lnB>
+                    <a:noFill/>
+                  </a:tcPr>
+                </a:tc>
+                <a:tc>
+                  <a:txBody>
+                    <a:bodyPr/>
+                    <a:lstStyle/>
+                    <a:p>
+                      <a:pPr algn="l"/>
+                      <a:r>
+                        <a:rPr lang="en-US" altLang="zh-TW" sz="1400" dirty="0">
+                          <a:solidFill>
+                            <a:srgbClr val="000000"/>
+                          </a:solidFill>
+                        </a:rPr>
+                        <a:t>FP8 (still memory-bound)</a:t>
+                      </a:r>
+                    </a:p>
+                  </a:txBody>
+                  <a:tcPr marL="68580" marR="68580" marT="27432" marB="27432" anchor="ctr">
+                    <a:lnL w="0">
+                      <a:noFill/>
+                    </a:lnL>
+                    <a:lnR w="0">
+                      <a:noFill/>
+                    </a:lnR>
+                    <a:lnT w="0">
+                      <a:noFill/>
+                    </a:lnT>
+                    <a:lnB w="19050">
+                      <a:solidFill>
+                        <a:srgbClr val="000000"/>
+                      </a:solidFill>
+                    </a:lnB>
+                    <a:noFill/>
+                  </a:tcPr>
+                </a:tc>
+                <a:tc>
+                  <a:txBody>
+                    <a:bodyPr/>
+                    <a:lstStyle/>
+                    <a:p>
+                      <a:pPr algn="l"/>
+                      <a:r>
+                        <a:rPr lang="en-US" altLang="zh-TW" sz="1400" dirty="0">
+                          <a:solidFill>
+                            <a:srgbClr val="000000"/>
+                          </a:solidFill>
+                        </a:rPr>
+                        <a:t>FP4 (compute-bound prefill)</a:t>
+                      </a:r>
+                    </a:p>
+                  </a:txBody>
+                  <a:tcPr marL="68580" marR="68580" marT="27432" marB="27432" anchor="ctr">
+                    <a:lnL w="0">
+                      <a:noFill/>
+                    </a:lnL>
+                    <a:lnR w="0">
+                      <a:noFill/>
+                    </a:lnR>
+                    <a:lnT w="0">
+                      <a:noFill/>
+                    </a:lnT>
+                    <a:lnB w="19050">
+                      <a:solidFill>
+                        <a:srgbClr val="000000"/>
+                      </a:solidFill>
+                    </a:lnB>
+                    <a:noFill/>
+                  </a:tcPr>
+                </a:tc>
+              </a:tr>
+            </a:tbl>
+          </a:graphicData>
+        </a:graphic>
+      </p:graphicFrame>
+    </p:spTree>
+    <p:extLst>
+      <p:ext uri="{BB962C8B-B14F-4D97-AF65-F5344CB8AC3E}">
+        <p14:creationId xmlns:p14="http://schemas.microsoft.com/office/powerpoint/2010/main" val="340821465"/>
+      </p:ext>
+    </p:extLst>
+  </p:cSld>
+  <p:clrMapOvr>
+    <a:masterClrMapping/>
+  </p:clrMapOvr>
+</p:sld>
+</file>
+
+<file path=ppt/slides/slide25.xml><?xml version="1.0" encoding="utf-8"?>
+<p:sld xmlns:a="http://schemas.openxmlformats.org/drawingml/2006/main" xmlns:r="http://schemas.openxmlformats.org/officeDocument/2006/relationships" xmlns:p="http://schemas.openxmlformats.org/presentationml/2006/main">
+  <p:cSld>
+    <p:spTree>
+      <p:nvGrpSpPr>
+        <p:cNvPr id="1" name="">
+          <a:extLst>
+            <a:ext uri="{FF2B5EF4-FFF2-40B4-BE49-F238E27FC236}">
+              <a16:creationId xmlns:a16="http://schemas.microsoft.com/office/drawing/2014/main" id="{D3360C21-ECAB-84A5-87AC-3F78426689AE}"/>
+            </a:ext>
+          </a:extLst>
+        </p:cNvPr>
+        <p:cNvGrpSpPr/>
+        <p:nvPr/>
+      </p:nvGrpSpPr>
+      <p:grpSpPr>
+        <a:xfrm>
+          <a:off x="0" y="0"/>
+          <a:ext cx="0" cy="0"/>
+          <a:chOff x="0" y="0"/>
+          <a:chExt cx="0" cy="0"/>
+        </a:xfrm>
+      </p:grpSpPr>
+      <p:sp>
+        <p:nvSpPr>
+          <p:cNvPr id="12" name="內容版面配置區 5">
+            <a:extLst>
+              <a:ext uri="{FF2B5EF4-FFF2-40B4-BE49-F238E27FC236}">
+                <a16:creationId xmlns:a16="http://schemas.microsoft.com/office/drawing/2014/main" id="{98A79EE8-057B-9F45-406A-BCEA24834930}"/>
+              </a:ext>
+            </a:extLst>
+          </p:cNvPr>
+          <p:cNvSpPr txBox="1">
+            <a:spLocks/>
+          </p:cNvSpPr>
+          <p:nvPr/>
+        </p:nvSpPr>
+        <p:spPr bwMode="auto">
+          <a:xfrm>
+            <a:off x="609600" y="1175657"/>
             <a:ext cx="10972800" cy="4950509"/>
           </a:xfrm>
           <a:prstGeom prst="rect">
@@ -10108,8 +12155,41 @@
               </a:spcAft>
             </a:pPr>
             <a:r>
-              <a:rPr lang="zh-TW" altLang="en-US" dirty="0" b="1"/>
-              <a:t>差異化的方向不是更大，而是更貼合固定、短而中等的計算形狀</a:t>
+              <a:rPr lang="en-US" altLang="zh-TW" sz="2400" dirty="0"/>
+              <a:t>Limitations</a:t>
+            </a:r>
+          </a:p>
+          <a:p>
+            <a:pPr lvl="1">
+              <a:spcAft>
+                <a:spcPts val="0"/>
+              </a:spcAft>
+            </a:pPr>
+            <a:r>
+              <a:rPr lang="en-US" altLang="zh-TW" sz="2000" dirty="0"/>
+              <a:t>All latencies are ideal roofline / cycle-simulation lower bounds; no RTL or silicon</a:t>
+            </a:r>
+          </a:p>
+          <a:p>
+            <a:pPr lvl="1">
+              <a:spcAft>
+                <a:spcPts val="0"/>
+              </a:spcAft>
+            </a:pPr>
+            <a:r>
+              <a:rPr lang="en-US" altLang="zh-TW" sz="2000" dirty="0"/>
+              <a:t>Flex-π checkpoint not executed; non-GEMM ops and inter-core traffic not modeled</a:t>
+            </a:r>
+          </a:p>
+          <a:p>
+            <a:pPr lvl="1">
+              <a:spcAft>
+                <a:spcPts val="0"/>
+              </a:spcAft>
+            </a:pPr>
+            <a:r>
+              <a:rPr lang="en-US" altLang="zh-TW" sz="2000" dirty="0"/>
+              <a:t>Retracted after cross-review: Q-head pre-sampling speedup (equivalent, but no CPU speedup)</a:t>
             </a:r>
           </a:p>
           <a:p>
@@ -10119,8 +12199,8 @@
               </a:spcAft>
             </a:pPr>
             <a:r>
-              <a:rPr lang="zh-TW" altLang="en-US" dirty="0" b="1"/>
-              <a:t>想請教老師</a:t>
+              <a:rPr lang="en-US" altLang="zh-TW" sz="2400" dirty="0"/>
+              <a:t>Future work</a:t>
             </a:r>
           </a:p>
           <a:p>
@@ -10130,8 +12210,8 @@
               </a:spcAft>
             </a:pPr>
             <a:r>
-              <a:rPr lang="zh-TW" altLang="en-US" dirty="0"/>
-              <a:t>多個小陣列的互連與控制成本，會吃掉多少利用率好處？</a:t>
+              <a:rPr lang="en-US" altLang="zh-TW" sz="2000" dirty="0"/>
+              <a:t>GPU measurement of π0 best-of-K (retract the bandwidth claim if K = 16 takes &gt; 2× K = 1)</a:t>
             </a:r>
           </a:p>
           <a:p>
@@ -10141,8 +12221,8 @@
               </a:spcAft>
             </a:pPr>
             <a:r>
-              <a:rPr lang="zh-TW" altLang="en-US" dirty="0"/>
-              <a:t>小網路權重放進晶片需要大 SRAM，值得嗎？</a:t>
+              <a:rPr lang="en-US" altLang="zh-TW" sz="2000" dirty="0"/>
+              <a:t>Measure Flex-π dead-layer removal and K/V hoisting on GPU</a:t>
             </a:r>
           </a:p>
           <a:p>
@@ -10152,19 +12232,8 @@
               </a:spcAft>
             </a:pPr>
             <a:r>
-              <a:rPr lang="zh-TW" altLang="en-US" dirty="0"/>
-              <a:t>若往硬體原型推進，應先驗證哪一個單元？</a:t>
-            </a:r>
-          </a:p>
-          <a:p>
-            <a:pPr>
-              <a:spcAft>
-                <a:spcPts val="0"/>
-              </a:spcAft>
-            </a:pPr>
-            <a:r>
-              <a:rPr lang="zh-TW" altLang="en-US" dirty="0" b="1"/>
-              <a:t>謝謝老師</a:t>
+              <a:rPr lang="en-US" altLang="zh-TW" sz="2000" dirty="0"/>
+              <a:t>Add non-GEMM latency and inter-core communication to the simulator</a:t>
             </a:r>
           </a:p>
         </p:txBody>
@@ -10199,7 +12268,361 @@
           <a:p>
             <a:r>
               <a:rPr lang="en-US" altLang="zh-TW" dirty="0"/>
-              <a:t>結語與請教</a:t>
+              <a:t>Limitations &amp; Future Work</a:t>
+            </a:r>
+            <a:endParaRPr lang="en-US" altLang="zh-TW" dirty="0">
+              <a:latin typeface="+mn-ea"/>
+              <a:cs typeface="Times New Roman" panose="02020603050405020304" pitchFamily="18" charset="0"/>
+            </a:endParaRPr>
+          </a:p>
+        </p:txBody>
+      </p:sp>
+      <p:sp>
+        <p:nvSpPr>
+          <p:cNvPr id="2" name="投影片編號版面配置區 1">
+            <a:extLst>
+              <a:ext uri="{FF2B5EF4-FFF2-40B4-BE49-F238E27FC236}">
+                <a16:creationId xmlns:a16="http://schemas.microsoft.com/office/drawing/2014/main" id="{9B73AECC-E727-FB48-3345-1117D9DF8296}"/>
+              </a:ext>
+            </a:extLst>
+          </p:cNvPr>
+          <p:cNvSpPr>
+            <a:spLocks noGrp="1"/>
+          </p:cNvSpPr>
+          <p:nvPr>
+            <p:ph type="sldNum" sz="quarter" idx="12"/>
+          </p:nvPr>
+        </p:nvSpPr>
+        <p:spPr/>
+        <p:txBody>
+          <a:bodyPr/>
+          <a:lstStyle/>
+          <a:p>
+            <a:fld id="{E61F77C1-B770-47FB-877F-E631DD26508E}" type="slidenum">
+              <a:rPr lang="zh-TW" altLang="en-US" smtClean="0"/>
+              <a:t>2</a:t>
+            </a:fld>
+            <a:endParaRPr lang="zh-TW" altLang="en-US" dirty="0"/>
+          </a:p>
+        </p:txBody>
+      </p:sp>
+    </p:spTree>
+    <p:extLst>
+      <p:ext uri="{BB962C8B-B14F-4D97-AF65-F5344CB8AC3E}">
+        <p14:creationId xmlns:p14="http://schemas.microsoft.com/office/powerpoint/2010/main" val="340821465"/>
+      </p:ext>
+    </p:extLst>
+  </p:cSld>
+  <p:clrMapOvr>
+    <a:masterClrMapping/>
+  </p:clrMapOvr>
+</p:sld>
+</file>
+
+<file path=ppt/slides/slide26.xml><?xml version="1.0" encoding="utf-8"?>
+<p:sld xmlns:a="http://schemas.openxmlformats.org/drawingml/2006/main" xmlns:r="http://schemas.openxmlformats.org/officeDocument/2006/relationships" xmlns:p="http://schemas.openxmlformats.org/presentationml/2006/main">
+  <p:cSld>
+    <p:spTree>
+      <p:nvGrpSpPr>
+        <p:cNvPr id="1" name="">
+          <a:extLst>
+            <a:ext uri="{FF2B5EF4-FFF2-40B4-BE49-F238E27FC236}">
+              <a16:creationId xmlns:a16="http://schemas.microsoft.com/office/drawing/2014/main" id="{D3360C21-ECAB-84A5-87AC-3F78426689AE}"/>
+            </a:ext>
+          </a:extLst>
+        </p:cNvPr>
+        <p:cNvGrpSpPr/>
+        <p:nvPr/>
+      </p:nvGrpSpPr>
+      <p:grpSpPr>
+        <a:xfrm>
+          <a:off x="0" y="0"/>
+          <a:ext cx="0" cy="0"/>
+          <a:chOff x="0" y="0"/>
+          <a:chExt cx="0" cy="0"/>
+        </a:xfrm>
+      </p:grpSpPr>
+      <p:sp>
+        <p:nvSpPr>
+          <p:cNvPr id="12" name="內容版面配置區 5">
+            <a:extLst>
+              <a:ext uri="{FF2B5EF4-FFF2-40B4-BE49-F238E27FC236}">
+                <a16:creationId xmlns:a16="http://schemas.microsoft.com/office/drawing/2014/main" id="{98A79EE8-057B-9F45-406A-BCEA24834930}"/>
+              </a:ext>
+            </a:extLst>
+          </p:cNvPr>
+          <p:cNvSpPr txBox="1">
+            <a:spLocks/>
+          </p:cNvSpPr>
+          <p:nvPr/>
+        </p:nvSpPr>
+        <p:spPr bwMode="auto">
+          <a:xfrm>
+            <a:off x="609600" y="1175657"/>
+            <a:ext cx="10972800" cy="4950509"/>
+          </a:xfrm>
+          <a:prstGeom prst="rect">
+            <a:avLst/>
+          </a:prstGeom>
+          <a:noFill/>
+          <a:ln w="9525">
+            <a:noFill/>
+            <a:miter lim="800000"/>
+            <a:headEnd/>
+            <a:tailEnd/>
+          </a:ln>
+        </p:spPr>
+        <p:txBody>
+          <a:bodyPr vert="horz" wrap="square" lIns="91440" tIns="45720" rIns="91440" bIns="45720" numCol="1" anchor="t" anchorCtr="0" compatLnSpc="1">
+            <a:prstTxWarp prst="textNoShape">
+              <a:avLst/>
+            </a:prstTxWarp>
+            <a:normAutofit/>
+          </a:bodyPr>
+          <a:lstStyle>
+            <a:lvl1pPr marL="342891" indent="-342891" algn="l" rtl="0" eaLnBrk="1" fontAlgn="base" hangingPunct="1">
+              <a:spcBef>
+                <a:spcPct val="20000"/>
+              </a:spcBef>
+              <a:spcAft>
+                <a:spcPct val="0"/>
+              </a:spcAft>
+              <a:buFont typeface="Arial" charset="0"/>
+              <a:buChar char="•"/>
+              <a:defRPr sz="2800" kern="1200">
+                <a:solidFill>
+                  <a:schemeClr val="tx1"/>
+                </a:solidFill>
+                <a:latin typeface="+mn-lt"/>
+                <a:ea typeface="+mn-ea"/>
+                <a:cs typeface="+mn-cs"/>
+              </a:defRPr>
+            </a:lvl1pPr>
+            <a:lvl2pPr marL="742932" indent="-285744" algn="l" rtl="0" eaLnBrk="1" fontAlgn="base" hangingPunct="1">
+              <a:spcBef>
+                <a:spcPct val="20000"/>
+              </a:spcBef>
+              <a:spcAft>
+                <a:spcPct val="0"/>
+              </a:spcAft>
+              <a:buFont typeface="Arial" charset="0"/>
+              <a:buChar char="–"/>
+              <a:defRPr sz="2400" kern="1200">
+                <a:solidFill>
+                  <a:schemeClr val="accent1">
+                    <a:lumMod val="75000"/>
+                  </a:schemeClr>
+                </a:solidFill>
+                <a:latin typeface="+mn-lt"/>
+                <a:ea typeface="+mn-ea"/>
+                <a:cs typeface="+mn-cs"/>
+              </a:defRPr>
+            </a:lvl2pPr>
+            <a:lvl3pPr marL="1142971" indent="-228594" algn="l" rtl="0" eaLnBrk="1" fontAlgn="base" hangingPunct="1">
+              <a:spcBef>
+                <a:spcPct val="20000"/>
+              </a:spcBef>
+              <a:spcAft>
+                <a:spcPct val="0"/>
+              </a:spcAft>
+              <a:buFont typeface="Arial" charset="0"/>
+              <a:buChar char="•"/>
+              <a:defRPr sz="2000" kern="1200">
+                <a:solidFill>
+                  <a:schemeClr val="accent1"/>
+                </a:solidFill>
+                <a:latin typeface="+mn-lt"/>
+                <a:ea typeface="+mn-ea"/>
+                <a:cs typeface="+mn-cs"/>
+              </a:defRPr>
+            </a:lvl3pPr>
+            <a:lvl4pPr marL="1600160" indent="-228594" algn="l" rtl="0" eaLnBrk="1" fontAlgn="base" hangingPunct="1">
+              <a:spcBef>
+                <a:spcPct val="20000"/>
+              </a:spcBef>
+              <a:spcAft>
+                <a:spcPct val="0"/>
+              </a:spcAft>
+              <a:buFont typeface="Arial" charset="0"/>
+              <a:buChar char="–"/>
+              <a:defRPr sz="1800" kern="1200">
+                <a:solidFill>
+                  <a:schemeClr val="accent6">
+                    <a:lumMod val="75000"/>
+                  </a:schemeClr>
+                </a:solidFill>
+                <a:latin typeface="+mn-lt"/>
+                <a:ea typeface="+mn-ea"/>
+                <a:cs typeface="+mn-cs"/>
+              </a:defRPr>
+            </a:lvl4pPr>
+            <a:lvl5pPr marL="2057349" indent="-228594" algn="l" rtl="0" eaLnBrk="1" fontAlgn="base" hangingPunct="1">
+              <a:spcBef>
+                <a:spcPct val="20000"/>
+              </a:spcBef>
+              <a:spcAft>
+                <a:spcPct val="0"/>
+              </a:spcAft>
+              <a:buFont typeface="Arial" charset="0"/>
+              <a:buChar char="»"/>
+              <a:defRPr sz="1800" kern="1200">
+                <a:solidFill>
+                  <a:schemeClr val="accent6"/>
+                </a:solidFill>
+                <a:latin typeface="+mn-lt"/>
+                <a:ea typeface="+mn-ea"/>
+                <a:cs typeface="+mn-cs"/>
+              </a:defRPr>
+            </a:lvl5pPr>
+            <a:lvl6pPr marL="2514537" indent="-228594" algn="l" defTabSz="914377" rtl="0" eaLnBrk="1" latinLnBrk="0" hangingPunct="1">
+              <a:spcBef>
+                <a:spcPct val="20000"/>
+              </a:spcBef>
+              <a:buFont typeface="Arial" pitchFamily="34" charset="0"/>
+              <a:buChar char="•"/>
+              <a:defRPr sz="2000" kern="1200">
+                <a:solidFill>
+                  <a:schemeClr val="tx1"/>
+                </a:solidFill>
+                <a:latin typeface="+mn-lt"/>
+                <a:ea typeface="+mn-ea"/>
+                <a:cs typeface="+mn-cs"/>
+              </a:defRPr>
+            </a:lvl6pPr>
+            <a:lvl7pPr marL="2971726" indent="-228594" algn="l" defTabSz="914377" rtl="0" eaLnBrk="1" latinLnBrk="0" hangingPunct="1">
+              <a:spcBef>
+                <a:spcPct val="20000"/>
+              </a:spcBef>
+              <a:buFont typeface="Arial" pitchFamily="34" charset="0"/>
+              <a:buChar char="•"/>
+              <a:defRPr sz="2000" kern="1200">
+                <a:solidFill>
+                  <a:schemeClr val="tx1"/>
+                </a:solidFill>
+                <a:latin typeface="+mn-lt"/>
+                <a:ea typeface="+mn-ea"/>
+                <a:cs typeface="+mn-cs"/>
+              </a:defRPr>
+            </a:lvl7pPr>
+            <a:lvl8pPr marL="3428914" indent="-228594" algn="l" defTabSz="914377" rtl="0" eaLnBrk="1" latinLnBrk="0" hangingPunct="1">
+              <a:spcBef>
+                <a:spcPct val="20000"/>
+              </a:spcBef>
+              <a:buFont typeface="Arial" pitchFamily="34" charset="0"/>
+              <a:buChar char="•"/>
+              <a:defRPr sz="2000" kern="1200">
+                <a:solidFill>
+                  <a:schemeClr val="tx1"/>
+                </a:solidFill>
+                <a:latin typeface="+mn-lt"/>
+                <a:ea typeface="+mn-ea"/>
+                <a:cs typeface="+mn-cs"/>
+              </a:defRPr>
+            </a:lvl8pPr>
+            <a:lvl9pPr marL="3886103" indent="-228594" algn="l" defTabSz="914377" rtl="0" eaLnBrk="1" latinLnBrk="0" hangingPunct="1">
+              <a:spcBef>
+                <a:spcPct val="20000"/>
+              </a:spcBef>
+              <a:buFont typeface="Arial" pitchFamily="34" charset="0"/>
+              <a:buChar char="•"/>
+              <a:defRPr sz="2000" kern="1200">
+                <a:solidFill>
+                  <a:schemeClr val="tx1"/>
+                </a:solidFill>
+                <a:latin typeface="+mn-lt"/>
+                <a:ea typeface="+mn-ea"/>
+                <a:cs typeface="+mn-cs"/>
+              </a:defRPr>
+            </a:lvl9pPr>
+          </a:lstStyle>
+          <a:p>
+            <a:pPr>
+              <a:spcAft>
+                <a:spcPts val="0"/>
+              </a:spcAft>
+            </a:pPr>
+            <a:r>
+              <a:rPr lang="en-US" altLang="zh-TW" sz="2400" dirty="0"/>
+              <a:t>Questions</a:t>
+            </a:r>
+          </a:p>
+          <a:p>
+            <a:pPr lvl="1">
+              <a:spcAft>
+                <a:spcPts val="0"/>
+              </a:spcAft>
+            </a:pPr>
+            <a:r>
+              <a:rPr lang="en-US" altLang="zh-TW" sz="2000" dirty="0"/>
+              <a:t>How much of the utilization gain do interconnect and control of many small arrays cost?</a:t>
+            </a:r>
+          </a:p>
+          <a:p>
+            <a:pPr lvl="1">
+              <a:spcAft>
+                <a:spcPts val="0"/>
+              </a:spcAft>
+            </a:pPr>
+            <a:r>
+              <a:rPr lang="en-US" altLang="zh-TW" sz="2000" dirty="0"/>
+              <a:t>Is ≥ 0.4 GB of on-chip SRAM for expert weights worthwhile, or should candidate batching come first?</a:t>
+            </a:r>
+          </a:p>
+          <a:p>
+            <a:pPr lvl="1">
+              <a:spcAft>
+                <a:spcPts val="0"/>
+              </a:spcAft>
+            </a:pPr>
+            <a:r>
+              <a:rPr lang="en-US" altLang="zh-TW" sz="2000" dirty="0"/>
+              <a:t>Which unit should a first RTL / FPGA prototype validate?</a:t>
+            </a:r>
+          </a:p>
+          <a:p>
+            <a:pPr>
+              <a:spcAft>
+                <a:spcPts val="0"/>
+              </a:spcAft>
+            </a:pPr>
+            <a:r>
+              <a:rPr lang="en-US" altLang="zh-TW" sz="2400" dirty="0"/>
+              <a:t>Thank you</a:t>
+            </a:r>
+          </a:p>
+        </p:txBody>
+      </p:sp>
+      <p:sp>
+        <p:nvSpPr>
+          <p:cNvPr id="3" name="副標題 2">
+            <a:extLst>
+              <a:ext uri="{FF2B5EF4-FFF2-40B4-BE49-F238E27FC236}">
+                <a16:creationId xmlns:a16="http://schemas.microsoft.com/office/drawing/2014/main" id="{0D642BDC-5B19-506B-CC3D-CAF272E3FB6A}"/>
+              </a:ext>
+            </a:extLst>
+          </p:cNvPr>
+          <p:cNvSpPr>
+            <a:spLocks noGrp="1"/>
+          </p:cNvSpPr>
+          <p:nvPr>
+            <p:ph type="title"/>
+          </p:nvPr>
+        </p:nvSpPr>
+        <p:spPr>
+          <a:xfrm>
+            <a:off x="609600" y="317155"/>
+            <a:ext cx="10972800" cy="582594"/>
+          </a:xfrm>
+        </p:spPr>
+        <p:txBody>
+          <a:bodyPr wrap="square" anchor="ctr">
+            <a:normAutofit fontScale="90000"/>
+          </a:bodyPr>
+          <a:lstStyle/>
+          <a:p>
+            <a:r>
+              <a:rPr lang="en-US" altLang="zh-TW" dirty="0"/>
+              <a:t>Discussion</a:t>
             </a:r>
             <a:endParaRPr lang="en-US" altLang="zh-TW" dirty="0">
               <a:latin typeface="+mn-ea"/>

--- a/CLAUDE/reports/World_Model_ASIC_report_2026-10-13.pptx
+++ b/CLAUDE/reports/World_Model_ASIC_report_2026-10-13.pptx
@@ -535,7 +535,13 @@
           <a:p>
             <a:r>
               <a:rPr lang="zh-TW" altLang="en-US" dirty="0"/>
-              <a:t>老師好，今天報告世界模型與 VLA 推論加速器的研究：機器人用的推論晶片，應該在哪裡和語言模型加速器做出區別。</a:t>
+              <a:t>老師好，今天由我來報告。題目是：World Model 與 VLA 的推論加速——機器人用的 ASIC，應該在哪裡和語言模型加速器做出區別。</a:t>
+            </a:r>
+          </a:p>
+          <a:p>
+            <a:r>
+              <a:rPr lang="zh-TW" altLang="en-US" dirty="0"/>
+              <a:t>這份報告整理了我們研究 repo 裡三輪的分析，以及一個六十億參數模型的深入案例。報告大約十八分鐘，最後有三個問題想請教老師。</a:t>
             </a:r>
           </a:p>
         </p:txBody>
@@ -594,7 +600,25 @@
           <a:p>
             <a:r>
               <a:rPr lang="zh-TW" altLang="en-US" dirty="0"/>
-              <a:t>老師好。今天報告的問題是：為機器人用的世界模型設計推論晶片，應該和現在的大型語言模型加速器有什麼不同。現有加速器多半是為語言模型服務設計的，假設很長的逐字生成和不斷長大的 KV cache；但機器人模型的計算形狀不一樣：計算圖固定、只有幾步到十步、每步是中等大小的矩陣。所以我們想釐清：哪些語言模型的加速技巧能搬過來，晶片又該在哪裡做出區別。</a:t>
+              <a:t>先說研究背景。這兩年機器人基礎模型發展很快，大致有三類：直接從畫面和指令輸出動作的 VLA；會預測未來畫面的影片世界模型；以及兩者合在一起、同時預測畫面和動作的世界動作模型。這些模型正在從資料中心，往機器人身上的邊緣晶片移動。</a:t>
+            </a:r>
+          </a:p>
+          <a:p>
+            <a:r>
+              <a:rPr lang="zh-TW" altLang="en-US" dirty="0"/>
+              <a:t>問題是，目前的 AI 加速器幾乎都是為語言模型服務最佳化的。語言模型的特徵是很長的自回歸 decode，一次生一個 token，而且 KV cache 會隨對話一路長大。</a:t>
+            </a:r>
+          </a:p>
+          <a:p>
+            <a:r>
+              <a:rPr lang="zh-TW" altLang="en-US" dirty="0"/>
+              <a:t>但機器人推論的形狀不一樣：計算圖是固定的，去噪只有四到十步，每一步處理的是幾十到幾百列的中等大小矩陣。所以我們不清楚語言模型那一套加速技巧有多少能搬過來，也不清楚機器人晶片真正需要哪些功能。</a:t>
+            </a:r>
+          </a:p>
+          <a:p>
+            <a:r>
+              <a:rPr lang="zh-TW" altLang="en-US" dirty="0"/>
+              <a:t>這份研究的目標，就是找出世界模型和 VLA 的 ASIC，應該在哪裡和傳統的語言模型加速器做出區別。</a:t>
             </a:r>
           </a:p>
         </p:txBody>
@@ -653,7 +677,13 @@
           <a:p>
             <a:r>
               <a:rPr lang="zh-TW" altLang="en-US" dirty="0"/>
-              <a:t>我們分析了十二個開源模型，分成五類，以 Llama 3.1 作對照。架構參數都直接讀自原始碼，計算量直接計數；再做 roofline 分析，並用 SCALE-Sim 校準的週期級模擬評估陣列利用率。研究由三個 AI 協作者分工撰寫並互相審查。</a:t>
+              <a:t>研究方法有四個部分。第一，我們從十二個開源模型的原始碼直接讀出架構參數，計算量也是在官方程式碼上直接計數，不靠論文描述。第二，在兩種硬體上做 roofline 分析：邊緣端以 NVIDIA Thor 等級為準，資料中心端以 H100 為準。第三，用 SCALE-Sim 校準過的週期級模擬器，評估不同陣列形狀的實際利用率。第四，這個 repo 由三個 AI 研究代理分工撰寫、互相審查，審查確實抓出了一些錯誤，我最後會說明。</a:t>
+            </a:r>
+          </a:p>
+          <a:p>
+            <a:r>
+              <a:rPr lang="zh-TW" altLang="en-US" dirty="0"/>
+              <a:t>【指著表格】下面這張表是分析對象，分成五類。Flow-matching 的 VLA，例如 π0 和 GR00T，特徵是前段跑一次、後段的動作專家迴圈四到十步。自回歸的 VLA，像 OpenVLA，本質上就是一小段語言模型 decode。影片世界模型，每一步要去噪幾千個 token。世界動作模型，同時去噪影片和動作。潛在空間的模型預測控制，編碼一次之後平行展開幾百條候選。最後一列是 Llama 3.1 8B，當作語言模型的對照組。</a:t>
             </a:r>
           </a:p>
         </p:txBody>
@@ -712,7 +742,25 @@
           <a:p>
             <a:r>
               <a:rPr lang="zh-TW" altLang="en-US" dirty="0"/>
-              <a:t>貫穿整份研究的觀念是：瓶頸不屬於某一類模型，而屬於哪個運算階段、跑在哪種硬體上。圖上每一點是一個模型的一個階段。同一個模型裡，不同階段的運算密度可以差十倍以上；同一個階段搬到頻寬較低的邊緣晶片，也可能從算力受限變成頻寬受限。所以設計晶片時要先把模型拆成階段。</a:t>
+              <a:t>接下來是貫穿整份研究最重要的觀念：瓶頸不是模型類別的屬性，而是「運算階段乘上硬體」的組合。</a:t>
+            </a:r>
+          </a:p>
+          <a:p>
+            <a:r>
+              <a:rPr lang="zh-TW" altLang="en-US" dirty="0"/>
+              <a:t>【指著圖】這張是 roofline 圖。橫軸是每從 DRAM 搬一個 byte 能做幾次運算，也就是算術強度；縱軸是可達到的算力。上面實線是 H100，下面虛線是 Thor。圖上每一個點，是某個模型的某一個階段。</a:t>
+            </a:r>
+          </a:p>
+          <a:p>
+            <a:r>
+              <a:rPr lang="zh-TW" altLang="en-US" dirty="0"/>
+              <a:t>可以看到三件事。第一，同一個模型的不同階段，算術強度可以差十倍以上，例如 VLA 的前段在右邊，動作專家在左邊。第二，同一個階段在 H100 上可能已經過了轉折點、是算力受限，但到頻寬只有約七分之一的 Thor 上，就落在斜線上、變成頻寬受限。第三，flow-matching 的動作專家落在接近語言模型 decode 的區域，而影片 DiT 在最右邊。</a:t>
+            </a:r>
+          </a:p>
+          <a:p>
+            <a:r>
+              <a:rPr lang="zh-TW" altLang="en-US" dirty="0"/>
+              <a:t>所以設計晶片之前，要先把模型拆成階段，各自算出形狀和算術強度，再對照硬體，而不是先問這是哪一類模型。</a:t>
             </a:r>
           </a:p>
         </p:txBody>
@@ -771,7 +819,25 @@
           <a:p>
             <a:r>
               <a:rPr lang="zh-TW" altLang="en-US" dirty="0"/>
-              <a:t>第一類是直接輸出動作的 VLA。前段的視覺語言模型只跑一次，後段的小型動作專家要反覆修正幾步到十步。以 π0 為例，動作專家只佔百分之九的計算量，卻佔 Thor 上一半以上的延遲，因為每一步都要重讀它的權重，但每次只算約五十列。圖中可以看到，權重從外部串流時延遲隨步數線性上升；權重放在片上時幾乎是平的。這和語言模型逐字生成很像，差別在於被重讀的網路小到有機會放進晶片，而且每次算的是矩陣而不是向量。</a:t>
+              <a:t>先看第一類，flow-matching 的 VLA。它的推論分兩段：前段的視覺語言模型把畫面和指令處理一次；後段是一個小型的動作專家，從雜訊出發做常微分方程積分，π0 積十步，GR00T 積四步。</a:t>
+            </a:r>
+          </a:p>
+          <a:p>
+            <a:r>
+              <a:rPr lang="zh-TW" altLang="en-US" dirty="0"/>
+              <a:t>以 π0 在 Thor 上為例，動作專家只佔百分之九的計算量，卻佔了百分之五十六的延遲。原因是每一步都要重新讀一次專家的權重，但每次只服務五十一列的矩陣，每個 byte 只做大約六十次運算，所以是頻寬受限。</a:t>
+            </a:r>
+          </a:p>
+          <a:p>
+            <a:r>
+              <a:rPr lang="zh-TW" altLang="en-US" dirty="0"/>
+              <a:t>【指著圖】這張圖橫軸是積分步數，縱軸是一段動作的延遲。藍線是權重每步從 DRAM 重讀，延遲隨步數線性上升；橘線是把專家權重放在片上，幾乎是平的。專家權重在 FP8 下只有 97 到 415 MB，是片上 SRAM 有機會裝得下的量級；語言模型的十幾 GB 就不可能。</a:t>
+            </a:r>
+          </a:p>
+          <a:p>
+            <a:r>
+              <a:rPr lang="zh-TW" altLang="en-US" dirty="0"/>
+              <a:t>最後要強調：這不是矩陣乘向量。每一步是四十到五十一列的矩陣，和語言模型 decode 一次一列有本質差別，這會影響後面陣列形狀的選擇。</a:t>
             </a:r>
           </a:p>
         </p:txBody>
@@ -830,7 +896,25 @@
           <a:p>
             <a:r>
               <a:rPr lang="zh-TW" altLang="en-US" dirty="0"/>
-              <a:t>需要保存的中間狀態也和語言模型完全不同。VLA 只有零點七到十幾 MB，大小由相機數和 token 數決定，每次重新規劃就丟掉；語言模型則隨上下文和批次一路長到十幾 GB。只有逐段生成的影片世界模型需要跨段保存 GB 級的滑動視窗。所以這類晶片不需要分頁式的 KV 管理，所有狀態大小在編譯時就已知。</a:t>
+              <a:t>第二個差異在需要保存的狀態，也就是 KV cache 或中間特徵。</a:t>
+            </a:r>
+          </a:p>
+          <a:p>
+            <a:r>
+              <a:rPr lang="zh-TW" altLang="en-US" dirty="0"/>
+              <a:t>【指著圖】這張圖橫軸是對數尺度的大小。灰色是語言模型，藍色是 VLA，橘色是影片世界模型，綠色是世界動作模型。</a:t>
+            </a:r>
+          </a:p>
+          <a:p>
+            <a:r>
+              <a:rPr lang="zh-TW" altLang="en-US" dirty="0"/>
+              <a:t>VLA 的狀態只有零點七到十八 MB，大小由相機數和每張圖的 token 數決定，每次重新規劃就整個丟掉。語言模型則隨上下文和批次長大，八千 token 約 1 GB，十二萬八千 token 就到 17 GB。只有逐段自回歸生成的影片模型，像 Matrix-Game 2.0 和 DreamZero，需要跨段保存 GB 級的滑動視窗。</a:t>
+            </a:r>
+          </a:p>
+          <a:p>
+            <a:r>
+              <a:rPr lang="zh-TW" altLang="en-US" dirty="0"/>
+              <a:t>所以這類晶片不需要 PagedAttention 那種分頁式的 KV 管理。所有狀態的大小在編譯時就能算出來，用靜態配置的緩衝區就夠了。</a:t>
             </a:r>
           </a:p>
         </p:txBody>
@@ -889,7 +973,25 @@
           <a:p>
             <a:r>
               <a:rPr lang="zh-TW" altLang="en-US" dirty="0"/>
-              <a:t>第三類是在潛在空間做規劃的模型。一次決策的成本約等於編碼加上搜尋輪數、候選數、預測步數和每次轉移成本的乘積。表中兩個模型都叫潛在世界模型，但一個的狀態是緊湊向量、轉移是小型 MLP，另一個是每幀 256 個 token 的 Transformer，每次轉移成本差了三到五個數量級。所以狀態表示的選擇，比候選數或步數更重要，是晶片規格的第一個參數。另外，讓動作模型一次多產生候選幾乎不增加時間，因為多出的候選搭在原本就要做的權重讀取上。</a:t>
+              <a:t>第三類是在潛在空間做規劃的模型，用來做模型預測控制。一次決策的成本，大約是編碼成本，加上搜尋輪數 I、乘候選數 K、乘預測步數 H、再乘每次轉移的成本。</a:t>
+            </a:r>
+          </a:p>
+          <a:p>
+            <a:r>
+              <a:rPr lang="zh-TW" altLang="en-US" dirty="0"/>
+              <a:t>【指著表格】我們拿兩個真實模型代進去。TD-MPC2 的狀態是一個緊湊向量，轉移模型是小型 MLP，規劃器是 MPPI，六輪、五百一十二條候選、三步。V-JEPA 2-AC 的狀態是每幀 256 個 token、每個 1024 維，轉移模型是 Transformer，規劃器是 CEM，十輪、四百條候選、兩步。兩者都叫潛在世界模型，但每次轉移的成本差了 2,400 到 90,000 倍。</a:t>
+            </a:r>
+          </a:p>
+          <a:p>
+            <a:r>
+              <a:rPr lang="zh-TW" altLang="en-US" dirty="0"/>
+              <a:t>所以我們的結論是：狀態用向量還是 token 集合來表示，是 ASIC 規格的第一個參數，比候選數、步數都重要。這類模型也是唯一能用平行候選把硬體填滿的機器人工作負載。</a:t>
+            </a:r>
+          </a:p>
+          <a:p>
+            <a:r>
+              <a:rPr lang="zh-TW" altLang="en-US" dirty="0"/>
+              <a:t>另一個發現是，「policy 提候選、世界模型評分」這種架構在硬體上幾乎是免費的：在 Thor 上讓 π0 一次產生十六段候選動作，只比一段多百分之二十五的時間，因為多出來的候選搭在原本就要做的權重讀取上。</a:t>
             </a:r>
           </a:p>
         </p:txBody>
@@ -948,7 +1050,19 @@
           <a:p>
             <a:r>
               <a:rPr lang="zh-TW" altLang="en-US" dirty="0"/>
-              <a:t>我們逐項量化了約六十項 2026 年以前的語言模型加速技巧。只有低精度權重對所有類別都有效。分頁式記憶體、動態批次、投機解碼這些招牌技巧，都建立在狀態會長大、有很多使用者可以合併的前提上，機器人兩者都沒有。影片模型真正有效的則是擴散模型才有的槓桿：減少去噪步數，以及在步與步之間重用計算。</a:t>
+              <a:t>接著我們問：語言模型的加速技巧到底能搬多少？我們把 2026 年以前大約六十項技巧，硬體和軟體都有，逐項量化對每一類模型的效果。</a:t>
+            </a:r>
+          </a:p>
+          <a:p>
+            <a:r>
+              <a:rPr lang="zh-TW" altLang="en-US" dirty="0"/>
+              <a:t>【指著熱圖】這張熱圖每一列是一項技巧，每一行是一個模型，顏色越深代表在 Thor 上的加速越大，灰色代表不適用。</a:t>
+            </a:r>
+          </a:p>
+          <a:p>
+            <a:r>
+              <a:rPr lang="zh-TW" altLang="en-US" dirty="0"/>
+              <a:t>結論可以歸納成四點。第一，低精度，也就是 FP8 和 FP4，對每一類都有效，是唯一的通用解。第二，語言模型 serving 的招牌技巧，像分頁式 KV、continuous batching、投機解碼，對 VLA 幾乎沒有效果，因為它們都假設狀態會長大、有很多使用者可以合併，機器人兩者都沒有。第三，減少權重頻寬的技巧對 VLA 有效，但對影片世界模型無效，因為後者是算力受限。第四，影片世界模型最有效的是擴散模型特有的槓桿：步數蒸餾，以及跨去噪步重用特徵，圖上顏色最深的幾格就是。</a:t>
             </a:r>
           </a:p>
         </p:txBody>
@@ -1007,7 +1121,25 @@
           <a:p>
             <a:r>
               <a:rPr lang="zh-TW" altLang="en-US" dirty="0"/>
-              <a:t>陣列層級的模擬支持這個判斷。同樣的乘加單元數，如果用一個 128 乘 128 的權重固定陣列，VLA 動作迴圈只有一成左右的利用率；切成 16 個 32 乘 32 的小陣列、讓每個矩陣自選資料流，可以提高到六到八成，而大矩陣的工作負載在小陣列上仍有九成以上。語言模型 decode 在任何陣列上都很低，這也解釋了它們為什麼轉向向量引擎。另外，權重放片上只有搭配小陣列才真正有效。</a:t>
+              <a:t>前面都在談頻寬，這一頁補上另一半：算力實際用到多少。我們用 SCALE-Sim 對 systolic array 做週期級模擬，代入每個模型真實的矩陣形狀。</a:t>
+            </a:r>
+          </a:p>
+          <a:p>
+            <a:r>
+              <a:rPr lang="zh-TW" altLang="en-US" dirty="0"/>
+              <a:t>固定一萬六千三百八十四個乘加單元，比較兩種切法：一個 TPU 式的 128 乘 128 weight-stationary 大陣列，和十六個 32 乘 32 的小陣列，並讓每個矩陣自行選擇資料流。</a:t>
+            </a:r>
+          </a:p>
+          <a:p>
+            <a:r>
+              <a:rPr lang="zh-TW" altLang="en-US" dirty="0"/>
+              <a:t>【指著熱圖】每一列是一個工作負載，左邊一組是 128 乘 128，右邊一組是 32 乘 32。VLA 的動作迴圈只有四十一到五十一列，在大陣列上只有百分之九到十二的利用率，換成小陣列提高到百分之五十九到七十七。影片 DiT、潛在規劃和 VLM 前段這些大矩陣，在小陣列上仍有百分之八十八到九十八，所以小陣列並不犧牲大矩陣。最下面兩列是語言模型 decode，在任何 systolic array 上都只有零到百分之八，這也解釋了為什麼語言模型加速器要轉向 GEMV 引擎或記憶體內運算。</a:t>
+            </a:r>
+          </a:p>
+          <a:p>
+            <a:r>
+              <a:rPr lang="zh-TW" altLang="en-US" dirty="0"/>
+              <a:t>最後一點：專家權重放片上，只有搭配小陣列才有效。在 Thor 等級晶片上，π0 一段動作從 38.0 毫秒降到 22.9 毫秒；如果仍用大陣列，瓶頸只是換成利用率。</a:t>
             </a:r>
           </a:p>
         </p:txBody>
@@ -1066,7 +1198,25 @@
           <a:p>
             <a:r>
               <a:rPr lang="zh-TW" altLang="en-US" dirty="0"/>
-              <a:t>為了驗證這些觀念，我們解剖了 Flex-π。它用 50 億參數的影片模型當主幹，加上 10 億參數的動作網路。每次推論先把當下觀測送進主幹一次，存下每層的注意力資料，這是 prefill；再對一整段動作做四步去噪。我們從原始碼算出的計算量和官方實測吻合。關鍵發現是：在邊緣硬體上，成本主體不是後段的去噪，而是每次推論都要重做的前段；語言模型可以把前段攤提掉，這裡不行。</a:t>
+              <a:t>為了驗證前面的觀念，我們挑了一個新模型做深入解剖：Flex-π，六十億參數的世界動作模型。它用 Wan 2.2 的五十億參數影片模型當主幹，再加一個十億參數的動作專家，同時去噪四種串流：未來 RGB、點雲、DINOv3 語意特徵和動作。</a:t>
+            </a:r>
+          </a:p>
+          <a:p>
+            <a:r>
+              <a:rPr lang="zh-TW" altLang="en-US" dirty="0"/>
+              <a:t>它的推論分兩段。Prefill：把當下觀測編成三百八十七個錨點 token，通過主幹一次，存下每層的 K 和 V。Decode：做四步 Euler 積分，只出動作時每步處理三十二個 token，全部一起生成時是八百零六個。</a:t>
+            </a:r>
+          </a:p>
+          <a:p>
+            <a:r>
+              <a:rPr lang="zh-TW" altLang="en-US" dirty="0"/>
+              <a:t>【指著左圖】左圖是計算量的去向，主要都是線性層，attention 分數只佔百分之二到五。【指著右圖】右圖是各模式的理想延遲和官方 RTX 5090 實測的比較，全部生成的模式吻合到百分之八十五到九十三，代表我們的計數可信。</a:t>
+            </a:r>
+          </a:p>
+          <a:p>
+            <a:r>
+              <a:rPr lang="zh-TW" altLang="en-US" dirty="0"/>
+              <a:t>最重要的是最後一點：在邊緣硬體上，只出動作的延遲主體不是 decode，而是每次推論都要重做的 prefill。語言模型的 prefill 可以被幾百步 decode 攤提，這裡不行。</a:t>
             </a:r>
           </a:p>
         </p:txBody>
@@ -1125,7 +1275,19 @@
           <a:p>
             <a:r>
               <a:rPr lang="zh-TW" altLang="en-US" dirty="0"/>
-              <a:t>我們也從原始碼找到幾處可以直接刪掉、結果完全不變的計算：只輸出動作時，主幹最上面七層算出來沒有人用；文字指令的 K/V 每步都重算，其實整個任務都不變。存下的錨點 K/V 不是語言模型意義上的快取，跨推論不能重用，只在同一次推論的幾步之間有用。表中是 Thor 等級晶片上的估算：語言模型式的設計只能降到 55.6 毫秒，加入小陣列、刪除冗餘、專家常駐片上後可降到約 19.6 毫秒。總計含編碼器約 4.8 毫秒，都是理想下限。</a:t>
+              <a:t>從官方原始碼裡，我們還找到幾處結果完全等價、可以直接刪掉的計算。第一，Flex-π 採用分層連接設計，動作只在中間十六層讀取視覺資訊；但只出動作時，prefill 仍跑完三十層，最上面七層算出來沒有人用，約佔 prefill 的百分之二十六。第二，文字指令的 cross-attention K、V 每一步都重算，其實整個任務期間都不變。第三，存下來的錨點 K/V 只有 143 MB，它不是跨推論的快取，下一次推論看到新畫面就要重建；它的價值只在同一次推論的四步之間。</a:t>
+            </a:r>
+          </a:p>
+          <a:p>
+            <a:r>
+              <a:rPr lang="zh-TW" altLang="en-US" dirty="0"/>
+              <a:t>【指著表格】這張表是 Thor 等級晶片上，只出動作模式的估算。BF16 理想值是 72 毫秒；用語言模型式的設計，FP8 加單一大陣列，只能降到 55.6；換成小陣列降到 39.3；再刪除死碼、提出不變量，降到 32.3；最後讓動作專家常駐片上，降到 19.6 毫秒。</a:t>
+            </a:r>
+          </a:p>
+          <a:p>
+            <a:r>
+              <a:rPr lang="zh-TW" altLang="en-US" dirty="0"/>
+              <a:t>做完這些以後，剩下的瓶頸幾乎只有每次推論都要串流一次五十億參數的主幹。表中總計含編碼器約 4.8 毫秒，都是理想下限。</a:t>
             </a:r>
           </a:p>
         </p:txBody>
@@ -1184,7 +1346,13 @@
           <a:p>
             <a:r>
               <a:rPr lang="zh-TW" altLang="en-US" dirty="0"/>
-              <a:t>綜合以上，我們建議的晶片和語言模型加速器有五個區別：用多個小陣列取代單一大陣列；權重依重用率分兩路，反覆讀的小網路放片上、只讀一次的大主幹用低精度串流，外部記憶體以頻寬為優先；狀態靜態配置；編譯器把每種推論模式編成固定排程，保證最壞延遲，這對閉迴路控制比平均吞吐量更重要；以及三維卷積前端。下表是規格上必須先決定的三個取捨。</a:t>
+              <a:t>綜合以上，我們建議的晶片和語言模型加速器有五個區別。運算：多個 32 乘 32 小陣列，支援 output-stationary 和 weight-stationary 切換，不做 GEMV 引擎或記憶體內運算。記憶體：兩級權重，反覆讀的專家放片上，只讀一次的主幹用 FP8 或 FP4 串流；DRAM 規格以頻寬為優先，而不是容量。狀態：靜態配置的緩衝區，大小在編譯時已知。編譯器：每種推論模式一張靜態排程，刪除冗餘計算並保證最壞延遲，這對閉迴路控制比平均吞吐量更重要。前端：支援三維卷積的 VAE，注意力只需要一個能處理結構化遮罩的小單元。</a:t>
+            </a:r>
+          </a:p>
+          <a:p>
+            <a:r>
+              <a:rPr lang="zh-TW" altLang="en-US" dirty="0"/>
+              <a:t>【指著表格】規格上有三個需要先決定的取捨。第一，要不要支援自回歸的影片世界模型：支援就要預留 GB 級的 KV 頻寬，不支援就完全不需要 KV 記憶體。第二，動作專家要放片上，需要 0.4 GB 以上的 SRAM；還是用串流加多候選批次來分攤讀取，不增加面積。第三，主幹精度：FP8 在 Thor 等級頻寬下仍是頻寬受限，要到 FP4 才能讓 prefill 轉成算力受限。</a:t>
             </a:r>
           </a:p>
         </p:txBody>
@@ -1243,7 +1411,13 @@
           <a:p>
             <a:r>
               <a:rPr lang="zh-TW" altLang="en-US" dirty="0"/>
-              <a:t>這些結論都來自原始碼計數、理論估算和模擬，不是晶片實測，也還沒實際執行 Flex-π 的權重。互審過程中我們撤回了一項加速宣稱，也修正了陣列模型的排程假設；也接受了提醒：矩陣運算加速之後，正規化、排序這類非矩陣運算可能變成新瓶頸。下一步是在 GPU 上實測多候選是否真的幾乎不增加時間，以及刪除冗餘計算的效益；若前者不成立，我們會撤回動作網路受頻寬限制的結論。</a:t>
+              <a:t>必須說明幾個限制。所有延遲都是理想 roofline 或週期模擬的下限，沒有 RTL，也沒有晶片實測。我們沒有實際執行 Flex-π 的權重，非矩陣運算和多核心之間的通訊也還沒有建模。互審過程中有一項說法被撤回：我們曾宣稱 TD-MPC2 的 Q 值頭「先抽樣再計算」可以加速，重做有鑑別力的測試後，等價性成立，但在 CPU 上沒有變快，所以撤回了加速的說法。</a:t>
+            </a:r>
+          </a:p>
+          <a:p>
+            <a:r>
+              <a:rPr lang="zh-TW" altLang="en-US" dirty="0"/>
+              <a:t>下一步有三件事。第一，在 GPU 上實測 π0 一次產生多段候選的延遲；如果十六段候選超過一段的兩倍，我們就撤回「動作專家受頻寬限制」的結論。第二，在 GPU 上量測 Flex-π 刪除死碼和提出文字 K/V 的實際效益。第三，在模擬器中加入非矩陣運算和核心間通訊，評估完整的控制週期預算。</a:t>
             </a:r>
           </a:p>
         </p:txBody>
@@ -1302,7 +1476,19 @@
           <a:p>
             <a:r>
               <a:rPr lang="zh-TW" altLang="en-US" dirty="0"/>
-              <a:t>總結一句話：機器人世界模型的晶片，差異化方向不是更大，而是更貼合它固定、短而中等大小的計算形狀。最後想請教老師三個問題：多個小陣列帶來的互連與控制成本，會吃掉多少利用率上的好處？把小網路權重放進晶片需要相當大的 SRAM，這值得嗎，還是應該優先用多候選來分攤讀取？若要往硬體原型推進，應該先驗證哪一個單元？報告到這裡，謝謝老師。</a:t>
+              <a:t>總結一句話：機器人世界模型的晶片，差異化的方向不是更大，而是更貼合它固定、短而中等大小的計算形狀。</a:t>
+            </a:r>
+          </a:p>
+          <a:p>
+            <a:r>
+              <a:rPr lang="zh-TW" altLang="en-US" dirty="0"/>
+              <a:t>最後想請教老師三個問題。第一，用多個小陣列取代單一大陣列，互連和控制的面積與功耗代價，大概會吃掉多少利用率上的好處？第二，專家權重放片上需要 0.4 GB 以上的 SRAM，以目前的製程和封裝，老師覺得值得嗎，還是應該優先做串流加多候選批次？第三，如果要往 RTL 或 FPGA 原型推進，應該先驗證哪一個單元，最能證明這個方向成立？</a:t>
+            </a:r>
+          </a:p>
+          <a:p>
+            <a:r>
+              <a:rPr lang="zh-TW" altLang="en-US" dirty="0"/>
+              <a:t>報告到這裡，謝謝老師。</a:t>
             </a:r>
           </a:p>
         </p:txBody>
